--- a/slides/CS112_Team3_Presentation.pptx
+++ b/slides/CS112_Team3_Presentation.pptx
@@ -3119,7 +3119,7 @@
             <a:avLst/>
           </a:prstGeom>
           <a:solidFill>
-            <a:srgbClr val="FFFFFF"/>
+            <a:srgbClr val="0E2942"/>
           </a:solidFill>
           <a:ln>
             <a:noFill/>
@@ -3156,14 +3156,14 @@
         </p:nvSpPr>
         <p:spPr>
           <a:xfrm>
-            <a:off x="0" y="2194560"/>
-            <a:ext cx="12191695" cy="109728"/>
+            <a:off x="0" y="0"/>
+            <a:ext cx="12191695" cy="164592"/>
           </a:xfrm>
           <a:prstGeom prst="rect">
             <a:avLst/>
           </a:prstGeom>
           <a:solidFill>
-            <a:srgbClr val="2563EB"/>
+            <a:srgbClr val="15B8A6"/>
           </a:solidFill>
           <a:ln>
             <a:noFill/>
@@ -3200,8 +3200,8 @@
         </p:nvSpPr>
         <p:spPr>
           <a:xfrm>
-            <a:off x="822960" y="2468880"/>
-            <a:ext cx="10515600" cy="1463040"/>
+            <a:off x="822960" y="1417320"/>
+            <a:ext cx="10515600" cy="365760"/>
           </a:xfrm>
           <a:prstGeom prst="rect">
             <a:avLst/>
@@ -3209,20 +3209,28 @@
           <a:noFill/>
         </p:spPr>
         <p:txBody>
-          <a:bodyPr wrap="square">
+          <a:bodyPr wrap="square" anchor="t" lIns="0" rIns="0" tIns="0" bIns="0">
             <a:spAutoFit/>
           </a:bodyPr>
           <a:lstStyle/>
           <a:p>
-            <a:pPr>
-              <a:defRPr sz="3800" b="1">
-                <a:solidFill>
-                  <a:srgbClr val="1C2733"/>
-                </a:solidFill>
-              </a:defRPr>
-            </a:pPr>
-            <a:r>
-              <a:t>National Grid Analysis · GridCare-Lite · ClinicCare-Lite</a:t>
+            <a:pPr algn="l">
+              <a:lnSpc>
+                <a:spcPct val="112000"/>
+              </a:lnSpc>
+              <a:spcAft>
+                <a:spcPts val="600"/>
+              </a:spcAft>
+              <a:buNone/>
+            </a:pPr>
+            <a:r>
+              <a:rPr sz="1200" b="1" i="0">
+                <a:solidFill>
+                  <a:srgbClr val="B9CADA"/>
+                </a:solidFill>
+                <a:latin typeface="Segoe UI"/>
+              </a:rPr>
+              <a:t>CS 112  ·  COMPUTER PROGRAMMING FOR CS  ·  SUMMER 2026</a:t>
             </a:r>
           </a:p>
         </p:txBody>
@@ -3235,8 +3243,8 @@
         </p:nvSpPr>
         <p:spPr>
           <a:xfrm>
-            <a:off x="822960" y="4023360"/>
-            <a:ext cx="10515600" cy="2103120"/>
+            <a:off x="822960" y="1828800"/>
+            <a:ext cx="10515600" cy="1828800"/>
           </a:xfrm>
           <a:prstGeom prst="rect">
             <a:avLst/>
@@ -3244,67 +3252,174 @@
           <a:noFill/>
         </p:spPr>
         <p:txBody>
-          <a:bodyPr wrap="square">
+          <a:bodyPr wrap="square" anchor="t" lIns="0" rIns="0" tIns="0" bIns="0">
             <a:spAutoFit/>
           </a:bodyPr>
           <a:lstStyle/>
           <a:p>
-            <a:pPr>
+            <a:pPr algn="l">
+              <a:lnSpc>
+                <a:spcPct val="108000"/>
+              </a:lnSpc>
+              <a:spcAft>
+                <a:spcPts val="0"/>
+              </a:spcAft>
+              <a:buNone/>
+            </a:pPr>
+            <a:r>
+              <a:rPr sz="3400" b="1" i="0">
+                <a:solidFill>
+                  <a:srgbClr val="FFFFFF"/>
+                </a:solidFill>
+                <a:latin typeface="Segoe UI Semibold"/>
+              </a:rPr>
+              <a:t>National Grid Analysis</a:t>
+            </a:r>
+          </a:p>
+          <a:p>
+            <a:pPr algn="l">
+              <a:lnSpc>
+                <a:spcPct val="108000"/>
+              </a:lnSpc>
               <a:spcAft>
                 <a:spcPts val="600"/>
               </a:spcAft>
-              <a:defRPr sz="1800">
-                <a:solidFill>
-                  <a:srgbClr val="1C2733"/>
-                </a:solidFill>
-              </a:defRPr>
-            </a:pPr>
-            <a:r>
-              <a:t>CS 112 — Computer Programming for CS · Summer 2026</a:t>
-            </a:r>
-          </a:p>
-          <a:p>
-            <a:pPr>
-              <a:spcAft>
-                <a:spcPts val="600"/>
-              </a:spcAft>
-              <a:defRPr sz="1800">
-                <a:solidFill>
-                  <a:srgbClr val="1C2733"/>
-                </a:solidFill>
-              </a:defRPr>
-            </a:pPr>
-            <a:r>
+              <a:buNone/>
+            </a:pPr>
+            <a:r>
+              <a:rPr sz="3400" b="1" i="0">
+                <a:solidFill>
+                  <a:srgbClr val="15B8A6"/>
+                </a:solidFill>
+                <a:latin typeface="Segoe UI Semibold"/>
+              </a:rPr>
+              <a:t>GridCare-Lite  ·  ClinicCare-Lite</a:t>
+            </a:r>
+          </a:p>
+        </p:txBody>
+      </p:sp>
+      <p:sp>
+        <p:nvSpPr>
+          <p:cNvPr id="6" name="Rectangle 5"/>
+          <p:cNvSpPr/>
+          <p:nvPr/>
+        </p:nvSpPr>
+        <p:spPr>
+          <a:xfrm>
+            <a:off x="822960" y="3886200"/>
+            <a:ext cx="2194560" cy="82296"/>
+          </a:xfrm>
+          <a:prstGeom prst="rect">
+            <a:avLst/>
+          </a:prstGeom>
+          <a:solidFill>
+            <a:srgbClr val="15B8A6"/>
+          </a:solidFill>
+          <a:ln>
+            <a:noFill/>
+          </a:ln>
+          <a:effectLst/>
+        </p:spPr>
+        <p:style>
+          <a:lnRef idx="1">
+            <a:schemeClr val="accent1"/>
+          </a:lnRef>
+          <a:fillRef idx="3">
+            <a:schemeClr val="accent1"/>
+          </a:fillRef>
+          <a:effectRef idx="2">
+            <a:schemeClr val="accent1"/>
+          </a:effectRef>
+          <a:fontRef idx="minor">
+            <a:schemeClr val="lt1"/>
+          </a:fontRef>
+        </p:style>
+        <p:txBody>
+          <a:bodyPr rtlCol="0" anchor="ctr"/>
+          <a:lstStyle/>
+          <a:p>
+            <a:pPr algn="ctr"/>
+          </a:p>
+        </p:txBody>
+      </p:sp>
+      <p:sp>
+        <p:nvSpPr>
+          <p:cNvPr id="7" name="TextBox 6"/>
+          <p:cNvSpPr txBox="1"/>
+          <p:nvPr/>
+        </p:nvSpPr>
+        <p:spPr>
+          <a:xfrm>
+            <a:off x="822960" y="4251960"/>
+            <a:ext cx="10515600" cy="2194560"/>
+          </a:xfrm>
+          <a:prstGeom prst="rect">
+            <a:avLst/>
+          </a:prstGeom>
+          <a:noFill/>
+        </p:spPr>
+        <p:txBody>
+          <a:bodyPr wrap="square" anchor="t" lIns="0" rIns="0" tIns="0" bIns="0">
+            <a:spAutoFit/>
+          </a:bodyPr>
+          <a:lstStyle/>
+          <a:p>
+            <a:pPr algn="l">
+              <a:lnSpc>
+                <a:spcPct val="130000"/>
+              </a:lnSpc>
+              <a:spcAft>
+                <a:spcPts val="800"/>
+              </a:spcAft>
+              <a:buNone/>
+            </a:pPr>
+            <a:r>
+              <a:rPr sz="1500" b="0" i="0">
+                <a:solidFill>
+                  <a:srgbClr val="B9CADA"/>
+                </a:solidFill>
+                <a:latin typeface="Segoe UI"/>
+              </a:rPr>
               <a:t>Cohort A · Team 3</a:t>
             </a:r>
           </a:p>
           <a:p>
-            <a:pPr>
-              <a:spcAft>
-                <a:spcPts val="600"/>
-              </a:spcAft>
-              <a:defRPr sz="1800">
-                <a:solidFill>
-                  <a:srgbClr val="1C2733"/>
-                </a:solidFill>
-              </a:defRPr>
-            </a:pPr>
-            <a:r>
+            <a:pPr algn="l">
+              <a:lnSpc>
+                <a:spcPct val="130000"/>
+              </a:lnSpc>
+              <a:spcAft>
+                <a:spcPts val="800"/>
+              </a:spcAft>
+              <a:buNone/>
+            </a:pPr>
+            <a:r>
+              <a:rPr sz="1700" b="0" i="0">
+                <a:solidFill>
+                  <a:srgbClr val="FFFFFF"/>
+                </a:solidFill>
+                <a:latin typeface="Segoe UI"/>
+              </a:rPr>
               <a:t>Nana Kojo Atta-Benyah · Brian Edem Bedzrah · Shawn Tei Kpoti · Nana Ekow Amuah</a:t>
             </a:r>
           </a:p>
           <a:p>
-            <a:pPr>
-              <a:spcAft>
-                <a:spcPts val="600"/>
-              </a:spcAft>
-              <a:defRPr sz="1800">
-                <a:solidFill>
-                  <a:srgbClr val="5B6B7D"/>
-                </a:solidFill>
-              </a:defRPr>
-            </a:pPr>
-            <a:r>
+            <a:pPr algn="l">
+              <a:lnSpc>
+                <a:spcPct val="130000"/>
+              </a:lnSpc>
+              <a:spcAft>
+                <a:spcPts val="800"/>
+              </a:spcAft>
+              <a:buNone/>
+            </a:pPr>
+            <a:r>
+              <a:rPr sz="1500" b="0" i="0">
+                <a:solidFill>
+                  <a:srgbClr val="15B8A6"/>
+                </a:solidFill>
+                <a:latin typeface="Segoe UI"/>
+              </a:rPr>
               <a:t>github.com/Nana-Kojo801/cs-final-project</a:t>
             </a:r>
           </a:p>
@@ -3381,13 +3496,13 @@
         <p:spPr>
           <a:xfrm>
             <a:off x="0" y="0"/>
-            <a:ext cx="12191695" cy="960120"/>
+            <a:ext cx="146304" cy="6858000"/>
           </a:xfrm>
           <a:prstGeom prst="rect">
             <a:avLst/>
           </a:prstGeom>
           <a:solidFill>
-            <a:srgbClr val="F1F5FB"/>
+            <a:srgbClr val="15B8A6"/>
           </a:solidFill>
           <a:ln>
             <a:noFill/>
@@ -3418,20 +3533,106 @@
       </p:sp>
       <p:sp>
         <p:nvSpPr>
-          <p:cNvPr id="4" name="Rectangle 3"/>
+          <p:cNvPr id="4" name="TextBox 3"/>
+          <p:cNvSpPr txBox="1"/>
+          <p:nvPr/>
+        </p:nvSpPr>
+        <p:spPr>
+          <a:xfrm>
+            <a:off x="822960" y="475488"/>
+            <a:ext cx="10515600" cy="274320"/>
+          </a:xfrm>
+          <a:prstGeom prst="rect">
+            <a:avLst/>
+          </a:prstGeom>
+          <a:noFill/>
+        </p:spPr>
+        <p:txBody>
+          <a:bodyPr wrap="square" anchor="t" lIns="0" rIns="0" tIns="0" bIns="0">
+            <a:spAutoFit/>
+          </a:bodyPr>
+          <a:lstStyle/>
+          <a:p>
+            <a:pPr algn="l">
+              <a:lnSpc>
+                <a:spcPct val="112000"/>
+              </a:lnSpc>
+              <a:spcAft>
+                <a:spcPts val="600"/>
+              </a:spcAft>
+              <a:buNone/>
+            </a:pPr>
+            <a:r>
+              <a:rPr sz="1100" b="1" i="0">
+                <a:solidFill>
+                  <a:srgbClr val="15B8A6"/>
+                </a:solidFill>
+                <a:latin typeface="Segoe UI"/>
+              </a:rPr>
+              <a:t>PART 2  ·  GRIDCARE-LITE</a:t>
+            </a:r>
+          </a:p>
+        </p:txBody>
+      </p:sp>
+      <p:sp>
+        <p:nvSpPr>
+          <p:cNvPr id="5" name="TextBox 4"/>
+          <p:cNvSpPr txBox="1"/>
+          <p:nvPr/>
+        </p:nvSpPr>
+        <p:spPr>
+          <a:xfrm>
+            <a:off x="822960" y="786384"/>
+            <a:ext cx="10515600" cy="822960"/>
+          </a:xfrm>
+          <a:prstGeom prst="rect">
+            <a:avLst/>
+          </a:prstGeom>
+          <a:noFill/>
+        </p:spPr>
+        <p:txBody>
+          <a:bodyPr wrap="square" anchor="t" lIns="0" rIns="0" tIns="0" bIns="0">
+            <a:spAutoFit/>
+          </a:bodyPr>
+          <a:lstStyle/>
+          <a:p>
+            <a:pPr algn="l">
+              <a:lnSpc>
+                <a:spcPct val="100000"/>
+              </a:lnSpc>
+              <a:spcAft>
+                <a:spcPts val="600"/>
+              </a:spcAft>
+              <a:buNone/>
+            </a:pPr>
+            <a:r>
+              <a:rPr sz="2700" b="1" i="0">
+                <a:solidFill>
+                  <a:srgbClr val="0E2942"/>
+                </a:solidFill>
+                <a:latin typeface="Segoe UI Semibold"/>
+              </a:rPr>
+              <a:t>GridCare-Lite — the workflow</a:t>
+            </a:r>
+          </a:p>
+        </p:txBody>
+      </p:sp>
+      <p:sp>
+        <p:nvSpPr>
+          <p:cNvPr id="6" name="Rectangle 5"/>
           <p:cNvSpPr/>
           <p:nvPr/>
         </p:nvSpPr>
         <p:spPr>
           <a:xfrm>
-            <a:off x="0" y="960120"/>
-            <a:ext cx="12191695" cy="45720"/>
+            <a:off x="822960" y="1463040"/>
+            <a:ext cx="1234440" cy="54864"/>
           </a:xfrm>
           <a:prstGeom prst="rect">
             <a:avLst/>
           </a:prstGeom>
           <a:solidFill>
-            <a:srgbClr val="2563EB"/>
+            <a:srgbClr val="F59E0B"/>
           </a:solidFill>
           <a:ln>
             <a:noFill/>
@@ -3462,14 +3663,14 @@
       </p:sp>
       <p:sp>
         <p:nvSpPr>
-          <p:cNvPr id="5" name="TextBox 4"/>
+          <p:cNvPr id="7" name="TextBox 6"/>
           <p:cNvSpPr txBox="1"/>
           <p:nvPr/>
         </p:nvSpPr>
         <p:spPr>
           <a:xfrm>
-            <a:off x="640080" y="164592"/>
-            <a:ext cx="10972800" cy="685800"/>
+            <a:off x="822960" y="6382512"/>
+            <a:ext cx="7315200" cy="274320"/>
           </a:xfrm>
           <a:prstGeom prst="rect">
             <a:avLst/>
@@ -3477,34 +3678,42 @@
           <a:noFill/>
         </p:spPr>
         <p:txBody>
-          <a:bodyPr wrap="none">
+          <a:bodyPr wrap="square" anchor="t" lIns="0" rIns="0" tIns="0" bIns="0">
             <a:spAutoFit/>
           </a:bodyPr>
           <a:lstStyle/>
           <a:p>
-            <a:pPr>
-              <a:defRPr sz="2600" b="1">
-                <a:solidFill>
-                  <a:srgbClr val="1C2733"/>
-                </a:solidFill>
-              </a:defRPr>
-            </a:pPr>
-            <a:r>
-              <a:t>GridCare-Lite — the workflow</a:t>
-            </a:r>
-          </a:p>
-        </p:txBody>
-      </p:sp>
-      <p:sp>
-        <p:nvSpPr>
-          <p:cNvPr id="6" name="TextBox 5"/>
+            <a:pPr algn="l">
+              <a:lnSpc>
+                <a:spcPct val="112000"/>
+              </a:lnSpc>
+              <a:spcAft>
+                <a:spcPts val="600"/>
+              </a:spcAft>
+              <a:buNone/>
+            </a:pPr>
+            <a:r>
+              <a:rPr sz="900" b="0" i="0">
+                <a:solidFill>
+                  <a:srgbClr val="5C6C7E"/>
+                </a:solidFill>
+                <a:latin typeface="Segoe UI"/>
+              </a:rPr>
+              <a:t>CS 112  ·  Cohort A — Team 3</a:t>
+            </a:r>
+          </a:p>
+        </p:txBody>
+      </p:sp>
+      <p:sp>
+        <p:nvSpPr>
+          <p:cNvPr id="8" name="TextBox 7"/>
           <p:cNvSpPr txBox="1"/>
           <p:nvPr/>
         </p:nvSpPr>
         <p:spPr>
           <a:xfrm>
-            <a:off x="640080" y="1280160"/>
-            <a:ext cx="10972800" cy="5120640"/>
+            <a:off x="10820095" y="6382512"/>
+            <a:ext cx="822960" cy="274320"/>
           </a:xfrm>
           <a:prstGeom prst="rect">
             <a:avLst/>
@@ -3512,89 +3721,245 @@
           <a:noFill/>
         </p:spPr>
         <p:txBody>
-          <a:bodyPr wrap="square" anchor="t">
+          <a:bodyPr wrap="square" anchor="t" lIns="0" rIns="0" tIns="0" bIns="0">
             <a:spAutoFit/>
           </a:bodyPr>
           <a:lstStyle/>
           <a:p>
-            <a:pPr>
+            <a:pPr algn="r">
+              <a:lnSpc>
+                <a:spcPct val="112000"/>
+              </a:lnSpc>
+              <a:spcAft>
+                <a:spcPts val="600"/>
+              </a:spcAft>
+              <a:buNone/>
+            </a:pPr>
+            <a:r>
+              <a:rPr sz="900" b="1" i="0">
+                <a:solidFill>
+                  <a:srgbClr val="5C6C7E"/>
+                </a:solidFill>
+                <a:latin typeface="Segoe UI"/>
+              </a:rPr>
+              <a:t>10</a:t>
+            </a:r>
+          </a:p>
+        </p:txBody>
+      </p:sp>
+      <p:sp>
+        <p:nvSpPr>
+          <p:cNvPr id="9" name="TextBox 8"/>
+          <p:cNvSpPr txBox="1"/>
+          <p:nvPr/>
+        </p:nvSpPr>
+        <p:spPr>
+          <a:xfrm>
+            <a:off x="822960" y="2331720"/>
+            <a:ext cx="10515600" cy="2267712"/>
+          </a:xfrm>
+          <a:prstGeom prst="rect">
+            <a:avLst/>
+          </a:prstGeom>
+          <a:noFill/>
+        </p:spPr>
+        <p:txBody>
+          <a:bodyPr wrap="square" anchor="t" lIns="0" rIns="0" tIns="0" bIns="0">
+            <a:spAutoFit/>
+          </a:bodyPr>
+          <a:lstStyle/>
+          <a:p>
+            <a:pPr algn="l">
+              <a:lnSpc>
+                <a:spcPct val="114000"/>
+              </a:lnSpc>
               <a:spcAft>
                 <a:spcPts val="700"/>
               </a:spcAft>
-              <a:defRPr sz="1600"/>
-            </a:pPr>
-            <a:r>
+              <a:buNone/>
+            </a:pPr>
+            <a:r>
+              <a:rPr sz="1500" b="1" i="0">
+                <a:solidFill>
+                  <a:srgbClr val="2F6FED"/>
+                </a:solidFill>
+                <a:latin typeface="Segoe UI"/>
+              </a:rPr>
+              <a:t>1.  </a:t>
+            </a:r>
+            <a:r>
+              <a:rPr sz="1500" b="0" i="0">
+                <a:solidFill>
+                  <a:srgbClr val="1B2A38"/>
+                </a:solidFill>
+                <a:latin typeface="Segoe UI"/>
+              </a:rPr>
               <a:t>Engineer logs an outage against a substation</a:t>
             </a:r>
           </a:p>
           <a:p>
-            <a:pPr>
+            <a:pPr algn="l">
+              <a:lnSpc>
+                <a:spcPct val="114000"/>
+              </a:lnSpc>
               <a:spcAft>
                 <a:spcPts val="700"/>
               </a:spcAft>
-              <a:defRPr sz="1600"/>
-            </a:pPr>
-            <a:r>
+              <a:buNone/>
+            </a:pPr>
+            <a:r>
+              <a:rPr sz="1500" b="1" i="0">
+                <a:solidFill>
+                  <a:srgbClr val="2F6FED"/>
+                </a:solidFill>
+                <a:latin typeface="Segoe UI"/>
+              </a:rPr>
+              <a:t>2.  </a:t>
+            </a:r>
+            <a:r>
+              <a:rPr sz="1500" b="0" i="0">
+                <a:solidFill>
+                  <a:srgbClr val="1B2A38"/>
+                </a:solidFill>
+                <a:latin typeface="Segoe UI"/>
+              </a:rPr>
               <a:t>Admin creates + assigns a work order (technician + date)</a:t>
             </a:r>
           </a:p>
           <a:p>
-            <a:pPr>
+            <a:pPr algn="l">
+              <a:lnSpc>
+                <a:spcPct val="114000"/>
+              </a:lnSpc>
               <a:spcAft>
                 <a:spcPts val="700"/>
               </a:spcAft>
-              <a:defRPr sz="1600"/>
-            </a:pPr>
-            <a:r>
-              <a:t>Technician starts work -&gt; outage In Progress</a:t>
-            </a:r>
-          </a:p>
-          <a:p>
-            <a:pPr>
+              <a:buNone/>
+            </a:pPr>
+            <a:r>
+              <a:rPr sz="1500" b="1" i="0">
+                <a:solidFill>
+                  <a:srgbClr val="2F6FED"/>
+                </a:solidFill>
+                <a:latin typeface="Segoe UI"/>
+              </a:rPr>
+              <a:t>3.  </a:t>
+            </a:r>
+            <a:r>
+              <a:rPr sz="1500" b="0" i="0">
+                <a:solidFill>
+                  <a:srgbClr val="1B2A38"/>
+                </a:solidFill>
+                <a:latin typeface="Segoe UI"/>
+              </a:rPr>
+              <a:t>Technician starts work → outage In Progress</a:t>
+            </a:r>
+          </a:p>
+          <a:p>
+            <a:pPr algn="l">
+              <a:lnSpc>
+                <a:spcPct val="114000"/>
+              </a:lnSpc>
               <a:spcAft>
                 <a:spcPts val="700"/>
               </a:spcAft>
-              <a:defRPr sz="1600"/>
-            </a:pPr>
-            <a:r>
-              <a:t>Technician completes with mandatory notes -&gt; work order Completed, outage auto-Resolved</a:t>
-            </a:r>
-          </a:p>
-          <a:p>
-            <a:pPr>
+              <a:buNone/>
+            </a:pPr>
+            <a:r>
+              <a:rPr sz="1500" b="1" i="0">
+                <a:solidFill>
+                  <a:srgbClr val="2F6FED"/>
+                </a:solidFill>
+                <a:latin typeface="Segoe UI"/>
+              </a:rPr>
+              <a:t>4.  </a:t>
+            </a:r>
+            <a:r>
+              <a:rPr sz="1500" b="0" i="0">
+                <a:solidFill>
+                  <a:srgbClr val="1B2A38"/>
+                </a:solidFill>
+                <a:latin typeface="Segoe UI"/>
+              </a:rPr>
+              <a:t>Technician completes with mandatory notes → work order Completed, outage auto-Resolved</a:t>
+            </a:r>
+          </a:p>
+          <a:p>
+            <a:pPr algn="l">
+              <a:lnSpc>
+                <a:spcPct val="114000"/>
+              </a:lnSpc>
               <a:spcAft>
                 <a:spcPts val="700"/>
               </a:spcAft>
-              <a:defRPr sz="1600"/>
-            </a:pPr>
-            <a:r>
+              <a:buNone/>
+            </a:pPr>
+            <a:r>
+              <a:rPr sz="1500" b="1" i="0">
+                <a:solidFill>
+                  <a:srgbClr val="2F6FED"/>
+                </a:solidFill>
+                <a:latin typeface="Segoe UI"/>
+              </a:rPr>
+              <a:t>5.  </a:t>
+            </a:r>
+            <a:r>
+              <a:rPr sz="1500" b="0" i="0">
+                <a:solidFill>
+                  <a:srgbClr val="1B2A38"/>
+                </a:solidFill>
+                <a:latin typeface="Segoe UI"/>
+              </a:rPr>
               <a:t>Customer-service logs + links a complaint</a:t>
             </a:r>
           </a:p>
           <a:p>
-            <a:pPr>
+            <a:pPr algn="l">
+              <a:lnSpc>
+                <a:spcPct val="114000"/>
+              </a:lnSpc>
               <a:spcAft>
                 <a:spcPts val="700"/>
               </a:spcAft>
-              <a:defRPr sz="1600"/>
-            </a:pPr>
-            <a:r>
+              <a:buNone/>
+            </a:pPr>
+            <a:r>
+              <a:rPr sz="1500" b="1" i="0">
+                <a:solidFill>
+                  <a:srgbClr val="2F6FED"/>
+                </a:solidFill>
+                <a:latin typeface="Segoe UI"/>
+              </a:rPr>
+              <a:t>6.  </a:t>
+            </a:r>
+            <a:r>
+              <a:rPr sz="1500" b="0" i="0">
+                <a:solidFill>
+                  <a:srgbClr val="1B2A38"/>
+                </a:solidFill>
+                <a:latin typeface="Segoe UI"/>
+              </a:rPr>
               <a:t>Reports screen recomputes open counts + average resolution time</a:t>
             </a:r>
           </a:p>
           <a:p>
-            <a:pPr>
+            <a:pPr algn="l">
+              <a:lnSpc>
+                <a:spcPct val="114000"/>
+              </a:lnSpc>
               <a:spcAft>
                 <a:spcPts val="700"/>
               </a:spcAft>
-              <a:defRPr sz="1500" i="0">
-                <a:solidFill>
-                  <a:srgbClr val="1C2733"/>
-                </a:solidFill>
-              </a:defRPr>
-            </a:pPr>
-            <a:r>
-              <a:t>Invalid input (bad date, empty field, wrong role, duplicate, bad transition) -&gt; clear message, never a crash.</a:t>
+              <a:buNone/>
+            </a:pPr>
+            <a:r>
+              <a:rPr sz="1450" b="0" i="0">
+                <a:solidFill>
+                  <a:srgbClr val="1B2A38"/>
+                </a:solidFill>
+                <a:latin typeface="Segoe UI"/>
+              </a:rPr>
+              <a:t>Invalid input (bad date, empty field, wrong role, duplicate, bad transition) → clear message, never a crash.</a:t>
             </a:r>
           </a:p>
         </p:txBody>
@@ -3670,13 +4035,13 @@
         <p:spPr>
           <a:xfrm>
             <a:off x="0" y="0"/>
-            <a:ext cx="12191695" cy="960120"/>
+            <a:ext cx="146304" cy="6858000"/>
           </a:xfrm>
           <a:prstGeom prst="rect">
             <a:avLst/>
           </a:prstGeom>
           <a:solidFill>
-            <a:srgbClr val="F1F5FB"/>
+            <a:srgbClr val="15B8A6"/>
           </a:solidFill>
           <a:ln>
             <a:noFill/>
@@ -3707,20 +4072,106 @@
       </p:sp>
       <p:sp>
         <p:nvSpPr>
-          <p:cNvPr id="4" name="Rectangle 3"/>
+          <p:cNvPr id="4" name="TextBox 3"/>
+          <p:cNvSpPr txBox="1"/>
+          <p:nvPr/>
+        </p:nvSpPr>
+        <p:spPr>
+          <a:xfrm>
+            <a:off x="822960" y="475488"/>
+            <a:ext cx="10515600" cy="274320"/>
+          </a:xfrm>
+          <a:prstGeom prst="rect">
+            <a:avLst/>
+          </a:prstGeom>
+          <a:noFill/>
+        </p:spPr>
+        <p:txBody>
+          <a:bodyPr wrap="square" anchor="t" lIns="0" rIns="0" tIns="0" bIns="0">
+            <a:spAutoFit/>
+          </a:bodyPr>
+          <a:lstStyle/>
+          <a:p>
+            <a:pPr algn="l">
+              <a:lnSpc>
+                <a:spcPct val="112000"/>
+              </a:lnSpc>
+              <a:spcAft>
+                <a:spcPts val="600"/>
+              </a:spcAft>
+              <a:buNone/>
+            </a:pPr>
+            <a:r>
+              <a:rPr sz="1100" b="1" i="0">
+                <a:solidFill>
+                  <a:srgbClr val="15B8A6"/>
+                </a:solidFill>
+                <a:latin typeface="Segoe UI"/>
+              </a:rPr>
+              <a:t>PART 3  ·  CLINICCARE-LITE</a:t>
+            </a:r>
+          </a:p>
+        </p:txBody>
+      </p:sp>
+      <p:sp>
+        <p:nvSpPr>
+          <p:cNvPr id="5" name="TextBox 4"/>
+          <p:cNvSpPr txBox="1"/>
+          <p:nvPr/>
+        </p:nvSpPr>
+        <p:spPr>
+          <a:xfrm>
+            <a:off x="822960" y="786384"/>
+            <a:ext cx="10515600" cy="822960"/>
+          </a:xfrm>
+          <a:prstGeom prst="rect">
+            <a:avLst/>
+          </a:prstGeom>
+          <a:noFill/>
+        </p:spPr>
+        <p:txBody>
+          <a:bodyPr wrap="square" anchor="t" lIns="0" rIns="0" tIns="0" bIns="0">
+            <a:spAutoFit/>
+          </a:bodyPr>
+          <a:lstStyle/>
+          <a:p>
+            <a:pPr algn="l">
+              <a:lnSpc>
+                <a:spcPct val="100000"/>
+              </a:lnSpc>
+              <a:spcAft>
+                <a:spcPts val="600"/>
+              </a:spcAft>
+              <a:buNone/>
+            </a:pPr>
+            <a:r>
+              <a:rPr sz="2700" b="1" i="0">
+                <a:solidFill>
+                  <a:srgbClr val="0E2942"/>
+                </a:solidFill>
+                <a:latin typeface="Segoe UI Semibold"/>
+              </a:rPr>
+              <a:t>ClinicCare-Lite</a:t>
+            </a:r>
+          </a:p>
+        </p:txBody>
+      </p:sp>
+      <p:sp>
+        <p:nvSpPr>
+          <p:cNvPr id="6" name="Rectangle 5"/>
           <p:cNvSpPr/>
           <p:nvPr/>
         </p:nvSpPr>
         <p:spPr>
           <a:xfrm>
-            <a:off x="0" y="960120"/>
-            <a:ext cx="12191695" cy="45720"/>
+            <a:off x="822960" y="1463040"/>
+            <a:ext cx="1234440" cy="54864"/>
           </a:xfrm>
           <a:prstGeom prst="rect">
             <a:avLst/>
           </a:prstGeom>
           <a:solidFill>
-            <a:srgbClr val="2563EB"/>
+            <a:srgbClr val="F59E0B"/>
           </a:solidFill>
           <a:ln>
             <a:noFill/>
@@ -3751,14 +4202,14 @@
       </p:sp>
       <p:sp>
         <p:nvSpPr>
-          <p:cNvPr id="5" name="TextBox 4"/>
+          <p:cNvPr id="7" name="TextBox 6"/>
           <p:cNvSpPr txBox="1"/>
           <p:nvPr/>
         </p:nvSpPr>
         <p:spPr>
           <a:xfrm>
-            <a:off x="640080" y="164592"/>
-            <a:ext cx="10972800" cy="685800"/>
+            <a:off x="822960" y="6382512"/>
+            <a:ext cx="7315200" cy="274320"/>
           </a:xfrm>
           <a:prstGeom prst="rect">
             <a:avLst/>
@@ -3766,34 +4217,42 @@
           <a:noFill/>
         </p:spPr>
         <p:txBody>
-          <a:bodyPr wrap="none">
+          <a:bodyPr wrap="square" anchor="t" lIns="0" rIns="0" tIns="0" bIns="0">
             <a:spAutoFit/>
           </a:bodyPr>
           <a:lstStyle/>
           <a:p>
-            <a:pPr>
-              <a:defRPr sz="2600" b="1">
-                <a:solidFill>
-                  <a:srgbClr val="1C2733"/>
-                </a:solidFill>
-              </a:defRPr>
-            </a:pPr>
-            <a:r>
-              <a:t>Part 3 — ClinicCare-Lite</a:t>
-            </a:r>
-          </a:p>
-        </p:txBody>
-      </p:sp>
-      <p:sp>
-        <p:nvSpPr>
-          <p:cNvPr id="6" name="TextBox 5"/>
+            <a:pPr algn="l">
+              <a:lnSpc>
+                <a:spcPct val="112000"/>
+              </a:lnSpc>
+              <a:spcAft>
+                <a:spcPts val="600"/>
+              </a:spcAft>
+              <a:buNone/>
+            </a:pPr>
+            <a:r>
+              <a:rPr sz="900" b="0" i="0">
+                <a:solidFill>
+                  <a:srgbClr val="5C6C7E"/>
+                </a:solidFill>
+                <a:latin typeface="Segoe UI"/>
+              </a:rPr>
+              <a:t>CS 112  ·  Cohort A — Team 3</a:t>
+            </a:r>
+          </a:p>
+        </p:txBody>
+      </p:sp>
+      <p:sp>
+        <p:nvSpPr>
+          <p:cNvPr id="8" name="TextBox 7"/>
           <p:cNvSpPr txBox="1"/>
           <p:nvPr/>
         </p:nvSpPr>
         <p:spPr>
           <a:xfrm>
-            <a:off x="640080" y="1280160"/>
-            <a:ext cx="10972800" cy="5120640"/>
+            <a:off x="10820095" y="6382512"/>
+            <a:ext cx="822960" cy="274320"/>
           </a:xfrm>
           <a:prstGeom prst="rect">
             <a:avLst/>
@@ -3801,81 +4260,317 @@
           <a:noFill/>
         </p:spPr>
         <p:txBody>
-          <a:bodyPr wrap="square" anchor="t">
+          <a:bodyPr wrap="square" anchor="t" lIns="0" rIns="0" tIns="0" bIns="0">
             <a:spAutoFit/>
           </a:bodyPr>
           <a:lstStyle/>
           <a:p>
-            <a:pPr>
+            <a:pPr algn="r">
+              <a:lnSpc>
+                <a:spcPct val="112000"/>
+              </a:lnSpc>
+              <a:spcAft>
+                <a:spcPts val="600"/>
+              </a:spcAft>
+              <a:buNone/>
+            </a:pPr>
+            <a:r>
+              <a:rPr sz="900" b="1" i="0">
+                <a:solidFill>
+                  <a:srgbClr val="5C6C7E"/>
+                </a:solidFill>
+                <a:latin typeface="Segoe UI"/>
+              </a:rPr>
+              <a:t>11</a:t>
+            </a:r>
+          </a:p>
+        </p:txBody>
+      </p:sp>
+      <p:sp>
+        <p:nvSpPr>
+          <p:cNvPr id="9" name="TextBox 8"/>
+          <p:cNvSpPr txBox="1"/>
+          <p:nvPr/>
+        </p:nvSpPr>
+        <p:spPr>
+          <a:xfrm>
+            <a:off x="822960" y="1874519"/>
+            <a:ext cx="10515600" cy="1645920"/>
+          </a:xfrm>
+          <a:prstGeom prst="rect">
+            <a:avLst/>
+          </a:prstGeom>
+          <a:noFill/>
+        </p:spPr>
+        <p:txBody>
+          <a:bodyPr wrap="square" anchor="t" lIns="0" rIns="0" tIns="0" bIns="0">
+            <a:spAutoFit/>
+          </a:bodyPr>
+          <a:lstStyle/>
+          <a:p>
+            <a:pPr algn="l">
+              <a:lnSpc>
+                <a:spcPct val="114000"/>
+              </a:lnSpc>
               <a:spcAft>
                 <a:spcPts val="700"/>
               </a:spcAft>
-              <a:defRPr sz="1500" i="0">
-                <a:solidFill>
-                  <a:srgbClr val="1C2733"/>
-                </a:solidFill>
-              </a:defRPr>
-            </a:pPr>
-            <a:r>
+              <a:buNone/>
+            </a:pPr>
+            <a:r>
+              <a:rPr sz="1450" b="0" i="0">
+                <a:solidFill>
+                  <a:srgbClr val="1B2A38"/>
+                </a:solidFill>
+                <a:latin typeface="Segoe UI"/>
+              </a:rPr>
               <a:t>Secure Flask clinic administration &amp; communication. Roles: clinician · patient.</a:t>
             </a:r>
           </a:p>
           <a:p>
-            <a:pPr>
+            <a:pPr algn="l">
+              <a:lnSpc>
+                <a:spcPct val="114000"/>
+              </a:lnSpc>
               <a:spcAft>
                 <a:spcPts val="700"/>
               </a:spcAft>
-              <a:defRPr sz="1700"/>
-            </a:pPr>
-            <a:r>
-              <a:t>- 8-digit IDs (clinician …0000, patient …2022–2028), password complexity, bcrypt</a:t>
-            </a:r>
-          </a:p>
-          <a:p>
-            <a:pPr>
+              <a:buNone/>
+            </a:pPr>
+            <a:r>
+              <a:rPr sz="1500" b="1" i="0">
+                <a:solidFill>
+                  <a:srgbClr val="15B8A6"/>
+                </a:solidFill>
+                <a:latin typeface="Segoe UI"/>
+              </a:rPr>
+              <a:t>▸  </a:t>
+            </a:r>
+            <a:r>
+              <a:rPr sz="1500" b="0" i="0">
+                <a:solidFill>
+                  <a:srgbClr val="1B2A38"/>
+                </a:solidFill>
+                <a:latin typeface="Segoe UI"/>
+              </a:rPr>
+              <a:t>8-digit IDs (clinician …0000, patient …2022–2028), password complexity, bcrypt</a:t>
+            </a:r>
+          </a:p>
+          <a:p>
+            <a:pPr algn="l">
+              <a:lnSpc>
+                <a:spcPct val="114000"/>
+              </a:lnSpc>
               <a:spcAft>
                 <a:spcPts val="700"/>
               </a:spcAft>
-              <a:defRPr sz="1700"/>
-            </a:pPr>
-            <a:r>
-              <a:t>- Sessions + login_required / role_required; 403 on cross-role access</a:t>
-            </a:r>
-          </a:p>
-          <a:p>
-            <a:pPr>
+              <a:buNone/>
+            </a:pPr>
+            <a:r>
+              <a:rPr sz="1500" b="1" i="0">
+                <a:solidFill>
+                  <a:srgbClr val="15B8A6"/>
+                </a:solidFill>
+                <a:latin typeface="Segoe UI"/>
+              </a:rPr>
+              <a:t>▸  </a:t>
+            </a:r>
+            <a:r>
+              <a:rPr sz="1500" b="0" i="0">
+                <a:solidFill>
+                  <a:srgbClr val="1B2A38"/>
+                </a:solidFill>
+                <a:latin typeface="Segoe UI"/>
+              </a:rPr>
+              <a:t>Sessions + login_required / role_required; 403 on cross-role access</a:t>
+            </a:r>
+          </a:p>
+          <a:p>
+            <a:pPr algn="l">
+              <a:lnSpc>
+                <a:spcPct val="114000"/>
+              </a:lnSpc>
               <a:spcAft>
                 <a:spcPts val="700"/>
               </a:spcAft>
-              <a:defRPr sz="1700"/>
-            </a:pPr>
-            <a:r>
-              <a:t>- Health task -&gt; file submission -&gt; structural check -&gt; categorical review -&gt; notify</a:t>
-            </a:r>
-          </a:p>
-          <a:p>
-            <a:pPr>
+              <a:buNone/>
+            </a:pPr>
+            <a:r>
+              <a:rPr sz="1500" b="1" i="0">
+                <a:solidFill>
+                  <a:srgbClr val="15B8A6"/>
+                </a:solidFill>
+                <a:latin typeface="Segoe UI"/>
+              </a:rPr>
+              <a:t>▸  </a:t>
+            </a:r>
+            <a:r>
+              <a:rPr sz="1500" b="0" i="0">
+                <a:solidFill>
+                  <a:srgbClr val="1B2A38"/>
+                </a:solidFill>
+                <a:latin typeface="Segoe UI"/>
+              </a:rPr>
+              <a:t>Health task → file submission → structural check → categorical review → notify</a:t>
+            </a:r>
+          </a:p>
+          <a:p>
+            <a:pPr algn="l">
+              <a:lnSpc>
+                <a:spcPct val="114000"/>
+              </a:lnSpc>
               <a:spcAft>
                 <a:spcPts val="700"/>
               </a:spcAft>
-              <a:defRPr sz="1700"/>
-            </a:pPr>
-            <a:r>
-              <a:t>- Appointments, reminders, announcements, secure messaging, analytics</a:t>
-            </a:r>
-          </a:p>
-          <a:p>
-            <a:pPr>
-              <a:spcAft>
-                <a:spcPts val="700"/>
-              </a:spcAft>
-              <a:defRPr sz="1500" i="0">
-                <a:solidFill>
-                  <a:srgbClr val="0D9488"/>
-                </a:solidFill>
-              </a:defRPr>
-            </a:pPr>
-            <a:r>
+              <a:buNone/>
+            </a:pPr>
+            <a:r>
+              <a:rPr sz="1500" b="1" i="0">
+                <a:solidFill>
+                  <a:srgbClr val="15B8A6"/>
+                </a:solidFill>
+                <a:latin typeface="Segoe UI"/>
+              </a:rPr>
+              <a:t>▸  </a:t>
+            </a:r>
+            <a:r>
+              <a:rPr sz="1500" b="0" i="0">
+                <a:solidFill>
+                  <a:srgbClr val="1B2A38"/>
+                </a:solidFill>
+                <a:latin typeface="Segoe UI"/>
+              </a:rPr>
+              <a:t>Appointments, reminders, announcements, secure messaging, analytics</a:t>
+            </a:r>
+          </a:p>
+        </p:txBody>
+      </p:sp>
+      <p:sp>
+        <p:nvSpPr>
+          <p:cNvPr id="10" name="Rectangle 9"/>
+          <p:cNvSpPr/>
+          <p:nvPr/>
+        </p:nvSpPr>
+        <p:spPr>
+          <a:xfrm>
+            <a:off x="822960" y="3630168"/>
+            <a:ext cx="10515600" cy="585216"/>
+          </a:xfrm>
+          <a:prstGeom prst="rect">
+            <a:avLst/>
+          </a:prstGeom>
+          <a:solidFill>
+            <a:srgbClr val="ECF2F8"/>
+          </a:solidFill>
+          <a:ln>
+            <a:noFill/>
+          </a:ln>
+          <a:effectLst/>
+        </p:spPr>
+        <p:style>
+          <a:lnRef idx="1">
+            <a:schemeClr val="accent1"/>
+          </a:lnRef>
+          <a:fillRef idx="3">
+            <a:schemeClr val="accent1"/>
+          </a:fillRef>
+          <a:effectRef idx="2">
+            <a:schemeClr val="accent1"/>
+          </a:effectRef>
+          <a:fontRef idx="minor">
+            <a:schemeClr val="lt1"/>
+          </a:fontRef>
+        </p:style>
+        <p:txBody>
+          <a:bodyPr rtlCol="0" anchor="ctr"/>
+          <a:lstStyle/>
+          <a:p>
+            <a:pPr algn="ctr"/>
+          </a:p>
+        </p:txBody>
+      </p:sp>
+      <p:sp>
+        <p:nvSpPr>
+          <p:cNvPr id="11" name="Rectangle 10"/>
+          <p:cNvSpPr/>
+          <p:nvPr/>
+        </p:nvSpPr>
+        <p:spPr>
+          <a:xfrm>
+            <a:off x="822960" y="3630168"/>
+            <a:ext cx="64008" cy="585216"/>
+          </a:xfrm>
+          <a:prstGeom prst="rect">
+            <a:avLst/>
+          </a:prstGeom>
+          <a:solidFill>
+            <a:srgbClr val="15B8A6"/>
+          </a:solidFill>
+          <a:ln>
+            <a:noFill/>
+          </a:ln>
+          <a:effectLst/>
+        </p:spPr>
+        <p:style>
+          <a:lnRef idx="1">
+            <a:schemeClr val="accent1"/>
+          </a:lnRef>
+          <a:fillRef idx="3">
+            <a:schemeClr val="accent1"/>
+          </a:fillRef>
+          <a:effectRef idx="2">
+            <a:schemeClr val="accent1"/>
+          </a:effectRef>
+          <a:fontRef idx="minor">
+            <a:schemeClr val="lt1"/>
+          </a:fontRef>
+        </p:style>
+        <p:txBody>
+          <a:bodyPr rtlCol="0" anchor="ctr"/>
+          <a:lstStyle/>
+          <a:p>
+            <a:pPr algn="ctr"/>
+          </a:p>
+        </p:txBody>
+      </p:sp>
+      <p:sp>
+        <p:nvSpPr>
+          <p:cNvPr id="12" name="TextBox 11"/>
+          <p:cNvSpPr txBox="1"/>
+          <p:nvPr/>
+        </p:nvSpPr>
+        <p:spPr>
+          <a:xfrm>
+            <a:off x="1078992" y="3630168"/>
+            <a:ext cx="10058400" cy="585216"/>
+          </a:xfrm>
+          <a:prstGeom prst="rect">
+            <a:avLst/>
+          </a:prstGeom>
+          <a:noFill/>
+        </p:spPr>
+        <p:txBody>
+          <a:bodyPr wrap="square" anchor="ctr" lIns="0" rIns="0" tIns="0" bIns="0">
+            <a:spAutoFit/>
+          </a:bodyPr>
+          <a:lstStyle/>
+          <a:p>
+            <a:pPr algn="l">
+              <a:lnSpc>
+                <a:spcPct val="115000"/>
+              </a:lnSpc>
+              <a:spcAft>
+                <a:spcPts val="600"/>
+              </a:spcAft>
+              <a:buNone/>
+            </a:pPr>
+            <a:r>
+              <a:rPr sz="1350" b="1" i="0">
+                <a:solidFill>
+                  <a:srgbClr val="0E2942"/>
+                </a:solidFill>
+                <a:latin typeface="Segoe UI"/>
+              </a:rPr>
               <a:t>Administrative &amp; communication only — never diagnoses, scores, or recommends treatment.</a:t>
             </a:r>
           </a:p>
@@ -3952,13 +4647,13 @@
         <p:spPr>
           <a:xfrm>
             <a:off x="0" y="0"/>
-            <a:ext cx="12191695" cy="960120"/>
+            <a:ext cx="146304" cy="6858000"/>
           </a:xfrm>
           <a:prstGeom prst="rect">
             <a:avLst/>
           </a:prstGeom>
           <a:solidFill>
-            <a:srgbClr val="F1F5FB"/>
+            <a:srgbClr val="15B8A6"/>
           </a:solidFill>
           <a:ln>
             <a:noFill/>
@@ -3989,20 +4684,106 @@
       </p:sp>
       <p:sp>
         <p:nvSpPr>
-          <p:cNvPr id="4" name="Rectangle 3"/>
+          <p:cNvPr id="4" name="TextBox 3"/>
+          <p:cNvSpPr txBox="1"/>
+          <p:nvPr/>
+        </p:nvSpPr>
+        <p:spPr>
+          <a:xfrm>
+            <a:off x="822960" y="475488"/>
+            <a:ext cx="10515600" cy="274320"/>
+          </a:xfrm>
+          <a:prstGeom prst="rect">
+            <a:avLst/>
+          </a:prstGeom>
+          <a:noFill/>
+        </p:spPr>
+        <p:txBody>
+          <a:bodyPr wrap="square" anchor="t" lIns="0" rIns="0" tIns="0" bIns="0">
+            <a:spAutoFit/>
+          </a:bodyPr>
+          <a:lstStyle/>
+          <a:p>
+            <a:pPr algn="l">
+              <a:lnSpc>
+                <a:spcPct val="112000"/>
+              </a:lnSpc>
+              <a:spcAft>
+                <a:spcPts val="600"/>
+              </a:spcAft>
+              <a:buNone/>
+            </a:pPr>
+            <a:r>
+              <a:rPr sz="1100" b="1" i="0">
+                <a:solidFill>
+                  <a:srgbClr val="15B8A6"/>
+                </a:solidFill>
+                <a:latin typeface="Segoe UI"/>
+              </a:rPr>
+              <a:t>PART 3  ·  CLINICCARE-LITE</a:t>
+            </a:r>
+          </a:p>
+        </p:txBody>
+      </p:sp>
+      <p:sp>
+        <p:nvSpPr>
+          <p:cNvPr id="5" name="TextBox 4"/>
+          <p:cNvSpPr txBox="1"/>
+          <p:nvPr/>
+        </p:nvSpPr>
+        <p:spPr>
+          <a:xfrm>
+            <a:off x="822960" y="786384"/>
+            <a:ext cx="10515600" cy="822960"/>
+          </a:xfrm>
+          <a:prstGeom prst="rect">
+            <a:avLst/>
+          </a:prstGeom>
+          <a:noFill/>
+        </p:spPr>
+        <p:txBody>
+          <a:bodyPr wrap="square" anchor="t" lIns="0" rIns="0" tIns="0" bIns="0">
+            <a:spAutoFit/>
+          </a:bodyPr>
+          <a:lstStyle/>
+          <a:p>
+            <a:pPr algn="l">
+              <a:lnSpc>
+                <a:spcPct val="100000"/>
+              </a:lnSpc>
+              <a:spcAft>
+                <a:spcPts val="600"/>
+              </a:spcAft>
+              <a:buNone/>
+            </a:pPr>
+            <a:r>
+              <a:rPr sz="2700" b="1" i="0">
+                <a:solidFill>
+                  <a:srgbClr val="0E2942"/>
+                </a:solidFill>
+                <a:latin typeface="Segoe UI Semibold"/>
+              </a:rPr>
+              <a:t>ClinicCare-Lite — privacy by design</a:t>
+            </a:r>
+          </a:p>
+        </p:txBody>
+      </p:sp>
+      <p:sp>
+        <p:nvSpPr>
+          <p:cNvPr id="6" name="Rectangle 5"/>
           <p:cNvSpPr/>
           <p:nvPr/>
         </p:nvSpPr>
         <p:spPr>
           <a:xfrm>
-            <a:off x="0" y="960120"/>
-            <a:ext cx="12191695" cy="45720"/>
+            <a:off x="822960" y="1463040"/>
+            <a:ext cx="1234440" cy="54864"/>
           </a:xfrm>
           <a:prstGeom prst="rect">
             <a:avLst/>
           </a:prstGeom>
           <a:solidFill>
-            <a:srgbClr val="2563EB"/>
+            <a:srgbClr val="F59E0B"/>
           </a:solidFill>
           <a:ln>
             <a:noFill/>
@@ -4033,14 +4814,14 @@
       </p:sp>
       <p:sp>
         <p:nvSpPr>
-          <p:cNvPr id="5" name="TextBox 4"/>
+          <p:cNvPr id="7" name="TextBox 6"/>
           <p:cNvSpPr txBox="1"/>
           <p:nvPr/>
         </p:nvSpPr>
         <p:spPr>
           <a:xfrm>
-            <a:off x="640080" y="164592"/>
-            <a:ext cx="10972800" cy="685800"/>
+            <a:off x="822960" y="6382512"/>
+            <a:ext cx="7315200" cy="274320"/>
           </a:xfrm>
           <a:prstGeom prst="rect">
             <a:avLst/>
@@ -4048,34 +4829,42 @@
           <a:noFill/>
         </p:spPr>
         <p:txBody>
-          <a:bodyPr wrap="none">
+          <a:bodyPr wrap="square" anchor="t" lIns="0" rIns="0" tIns="0" bIns="0">
             <a:spAutoFit/>
           </a:bodyPr>
           <a:lstStyle/>
           <a:p>
-            <a:pPr>
-              <a:defRPr sz="2600" b="1">
-                <a:solidFill>
-                  <a:srgbClr val="1C2733"/>
-                </a:solidFill>
-              </a:defRPr>
-            </a:pPr>
-            <a:r>
-              <a:t>ClinicCare-Lite — privacy by design</a:t>
-            </a:r>
-          </a:p>
-        </p:txBody>
-      </p:sp>
-      <p:sp>
-        <p:nvSpPr>
-          <p:cNvPr id="6" name="TextBox 5"/>
+            <a:pPr algn="l">
+              <a:lnSpc>
+                <a:spcPct val="112000"/>
+              </a:lnSpc>
+              <a:spcAft>
+                <a:spcPts val="600"/>
+              </a:spcAft>
+              <a:buNone/>
+            </a:pPr>
+            <a:r>
+              <a:rPr sz="900" b="0" i="0">
+                <a:solidFill>
+                  <a:srgbClr val="5C6C7E"/>
+                </a:solidFill>
+                <a:latin typeface="Segoe UI"/>
+              </a:rPr>
+              <a:t>CS 112  ·  Cohort A — Team 3</a:t>
+            </a:r>
+          </a:p>
+        </p:txBody>
+      </p:sp>
+      <p:sp>
+        <p:nvSpPr>
+          <p:cNvPr id="8" name="TextBox 7"/>
           <p:cNvSpPr txBox="1"/>
           <p:nvPr/>
         </p:nvSpPr>
         <p:spPr>
           <a:xfrm>
-            <a:off x="640080" y="1280160"/>
-            <a:ext cx="10972800" cy="5120640"/>
+            <a:off x="10820095" y="6382512"/>
+            <a:ext cx="822960" cy="274320"/>
           </a:xfrm>
           <a:prstGeom prst="rect">
             <a:avLst/>
@@ -4083,74 +4872,225 @@
           <a:noFill/>
         </p:spPr>
         <p:txBody>
-          <a:bodyPr wrap="square" anchor="t">
+          <a:bodyPr wrap="square" anchor="t" lIns="0" rIns="0" tIns="0" bIns="0">
             <a:spAutoFit/>
           </a:bodyPr>
           <a:lstStyle/>
           <a:p>
-            <a:pPr>
+            <a:pPr algn="r">
+              <a:lnSpc>
+                <a:spcPct val="112000"/>
+              </a:lnSpc>
+              <a:spcAft>
+                <a:spcPts val="600"/>
+              </a:spcAft>
+              <a:buNone/>
+            </a:pPr>
+            <a:r>
+              <a:rPr sz="900" b="1" i="0">
+                <a:solidFill>
+                  <a:srgbClr val="5C6C7E"/>
+                </a:solidFill>
+                <a:latin typeface="Segoe UI"/>
+              </a:rPr>
+              <a:t>12</a:t>
+            </a:r>
+          </a:p>
+        </p:txBody>
+      </p:sp>
+      <p:sp>
+        <p:nvSpPr>
+          <p:cNvPr id="9" name="TextBox 8"/>
+          <p:cNvSpPr txBox="1"/>
+          <p:nvPr/>
+        </p:nvSpPr>
+        <p:spPr>
+          <a:xfrm>
+            <a:off x="822960" y="2331720"/>
+            <a:ext cx="10515600" cy="1956816"/>
+          </a:xfrm>
+          <a:prstGeom prst="rect">
+            <a:avLst/>
+          </a:prstGeom>
+          <a:noFill/>
+        </p:spPr>
+        <p:txBody>
+          <a:bodyPr wrap="square" anchor="t" lIns="0" rIns="0" tIns="0" bIns="0">
+            <a:spAutoFit/>
+          </a:bodyPr>
+          <a:lstStyle/>
+          <a:p>
+            <a:pPr algn="l">
+              <a:lnSpc>
+                <a:spcPct val="114000"/>
+              </a:lnSpc>
               <a:spcAft>
                 <a:spcPts val="700"/>
               </a:spcAft>
-              <a:defRPr sz="1700"/>
-            </a:pPr>
-            <a:r>
-              <a:t>- Patient sees only their own tasks, submissions, messages, engagement, analytics</a:t>
-            </a:r>
-          </a:p>
-          <a:p>
-            <a:pPr>
+              <a:buNone/>
+            </a:pPr>
+            <a:r>
+              <a:rPr sz="1500" b="1" i="0">
+                <a:solidFill>
+                  <a:srgbClr val="15B8A6"/>
+                </a:solidFill>
+                <a:latin typeface="Segoe UI"/>
+              </a:rPr>
+              <a:t>▸  </a:t>
+            </a:r>
+            <a:r>
+              <a:rPr sz="1500" b="0" i="0">
+                <a:solidFill>
+                  <a:srgbClr val="1B2A38"/>
+                </a:solidFill>
+                <a:latin typeface="Segoe UI"/>
+              </a:rPr>
+              <a:t>Patient sees only their own tasks, submissions, messages, engagement, analytics</a:t>
+            </a:r>
+          </a:p>
+          <a:p>
+            <a:pPr algn="l">
+              <a:lnSpc>
+                <a:spcPct val="114000"/>
+              </a:lnSpc>
               <a:spcAft>
                 <a:spcPts val="700"/>
               </a:spcAft>
-              <a:defRPr sz="1700"/>
-            </a:pPr>
-            <a:r>
-              <a:t>- message.thread() returns messages only where you're a participant</a:t>
-            </a:r>
-          </a:p>
-          <a:p>
-            <a:pPr>
+              <a:buNone/>
+            </a:pPr>
+            <a:r>
+              <a:rPr sz="1500" b="1" i="0">
+                <a:solidFill>
+                  <a:srgbClr val="15B8A6"/>
+                </a:solidFill>
+                <a:latin typeface="Segoe UI"/>
+              </a:rPr>
+              <a:t>▸  </a:t>
+            </a:r>
+            <a:r>
+              <a:rPr sz="1500" b="0" i="0">
+                <a:solidFill>
+                  <a:srgbClr val="1B2A38"/>
+                </a:solidFill>
+                <a:latin typeface="Segoe UI"/>
+              </a:rPr>
+              <a:t>message.thread() returns messages only where you're a participant</a:t>
+            </a:r>
+          </a:p>
+          <a:p>
+            <a:pPr algn="l">
+              <a:lnSpc>
+                <a:spcPct val="114000"/>
+              </a:lnSpc>
               <a:spcAft>
                 <a:spcPts val="700"/>
               </a:spcAft>
-              <a:defRPr sz="1700"/>
-            </a:pPr>
-            <a:r>
-              <a:t>- Engagement tracker is private — no leaderboard, no rank_patients (asserted by a test)</a:t>
-            </a:r>
-          </a:p>
-          <a:p>
-            <a:pPr>
+              <a:buNone/>
+            </a:pPr>
+            <a:r>
+              <a:rPr sz="1500" b="1" i="0">
+                <a:solidFill>
+                  <a:srgbClr val="15B8A6"/>
+                </a:solidFill>
+                <a:latin typeface="Segoe UI"/>
+              </a:rPr>
+              <a:t>▸  </a:t>
+            </a:r>
+            <a:r>
+              <a:rPr sz="1500" b="0" i="0">
+                <a:solidFill>
+                  <a:srgbClr val="1B2A38"/>
+                </a:solidFill>
+                <a:latin typeface="Segoe UI"/>
+              </a:rPr>
+              <a:t>Engagement tracker is private — no leaderboard, no rank_patients (asserted by a test)</a:t>
+            </a:r>
+          </a:p>
+          <a:p>
+            <a:pPr algn="l">
+              <a:lnSpc>
+                <a:spcPct val="114000"/>
+              </a:lnSpc>
               <a:spcAft>
                 <a:spcPts val="700"/>
               </a:spcAft>
-              <a:defRPr sz="1700"/>
-            </a:pPr>
-            <a:r>
-              <a:t>- Clinician review/download gated by shares_clinic(clinician, patient)</a:t>
-            </a:r>
-          </a:p>
-          <a:p>
-            <a:pPr>
+              <a:buNone/>
+            </a:pPr>
+            <a:r>
+              <a:rPr sz="1500" b="1" i="0">
+                <a:solidFill>
+                  <a:srgbClr val="15B8A6"/>
+                </a:solidFill>
+                <a:latin typeface="Segoe UI"/>
+              </a:rPr>
+              <a:t>▸  </a:t>
+            </a:r>
+            <a:r>
+              <a:rPr sz="1500" b="0" i="0">
+                <a:solidFill>
+                  <a:srgbClr val="1B2A38"/>
+                </a:solidFill>
+                <a:latin typeface="Segoe UI"/>
+              </a:rPr>
+              <a:t>Clinician review/download gated by shares_clinic(clinician, patient)</a:t>
+            </a:r>
+          </a:p>
+          <a:p>
+            <a:pPr algn="l">
+              <a:lnSpc>
+                <a:spcPct val="114000"/>
+              </a:lnSpc>
               <a:spcAft>
                 <a:spcPts val="700"/>
               </a:spcAft>
-              <a:defRPr sz="1700"/>
-            </a:pPr>
-            <a:r>
-              <a:t>- File handling: extension allow-list, 2 MB cap, path-traversal blocked</a:t>
-            </a:r>
-          </a:p>
-          <a:p>
-            <a:pPr>
+              <a:buNone/>
+            </a:pPr>
+            <a:r>
+              <a:rPr sz="1500" b="1" i="0">
+                <a:solidFill>
+                  <a:srgbClr val="15B8A6"/>
+                </a:solidFill>
+                <a:latin typeface="Segoe UI"/>
+              </a:rPr>
+              <a:t>▸  </a:t>
+            </a:r>
+            <a:r>
+              <a:rPr sz="1500" b="0" i="0">
+                <a:solidFill>
+                  <a:srgbClr val="1B2A38"/>
+                </a:solidFill>
+                <a:latin typeface="Segoe UI"/>
+              </a:rPr>
+              <a:t>File handling: extension allow-list, 2 MB cap, path-traversal blocked</a:t>
+            </a:r>
+          </a:p>
+          <a:p>
+            <a:pPr algn="l">
+              <a:lnSpc>
+                <a:spcPct val="114000"/>
+              </a:lnSpc>
               <a:spcAft>
                 <a:spcPts val="700"/>
               </a:spcAft>
-              <a:defRPr sz="1700"/>
-            </a:pPr>
-            <a:r>
-              <a:t>- Structural completeness check: "the 'date' column is missing" — never "your reading is high"</a:t>
+              <a:buNone/>
+            </a:pPr>
+            <a:r>
+              <a:rPr sz="1500" b="1" i="0">
+                <a:solidFill>
+                  <a:srgbClr val="15B8A6"/>
+                </a:solidFill>
+                <a:latin typeface="Segoe UI"/>
+              </a:rPr>
+              <a:t>▸  </a:t>
+            </a:r>
+            <a:r>
+              <a:rPr sz="1500" b="0" i="0">
+                <a:solidFill>
+                  <a:srgbClr val="1B2A38"/>
+                </a:solidFill>
+                <a:latin typeface="Segoe UI"/>
+              </a:rPr>
+              <a:t>Structural completeness check: "the 'date' column is missing" — never "your reading is high"</a:t>
             </a:r>
           </a:p>
         </p:txBody>
@@ -4226,13 +5166,13 @@
         <p:spPr>
           <a:xfrm>
             <a:off x="0" y="0"/>
-            <a:ext cx="12191695" cy="960120"/>
+            <a:ext cx="146304" cy="6858000"/>
           </a:xfrm>
           <a:prstGeom prst="rect">
             <a:avLst/>
           </a:prstGeom>
           <a:solidFill>
-            <a:srgbClr val="F1F5FB"/>
+            <a:srgbClr val="15B8A6"/>
           </a:solidFill>
           <a:ln>
             <a:noFill/>
@@ -4263,20 +5203,106 @@
       </p:sp>
       <p:sp>
         <p:nvSpPr>
-          <p:cNvPr id="4" name="Rectangle 3"/>
+          <p:cNvPr id="4" name="TextBox 3"/>
+          <p:cNvSpPr txBox="1"/>
+          <p:nvPr/>
+        </p:nvSpPr>
+        <p:spPr>
+          <a:xfrm>
+            <a:off x="822960" y="475488"/>
+            <a:ext cx="10515600" cy="274320"/>
+          </a:xfrm>
+          <a:prstGeom prst="rect">
+            <a:avLst/>
+          </a:prstGeom>
+          <a:noFill/>
+        </p:spPr>
+        <p:txBody>
+          <a:bodyPr wrap="square" anchor="t" lIns="0" rIns="0" tIns="0" bIns="0">
+            <a:spAutoFit/>
+          </a:bodyPr>
+          <a:lstStyle/>
+          <a:p>
+            <a:pPr algn="l">
+              <a:lnSpc>
+                <a:spcPct val="112000"/>
+              </a:lnSpc>
+              <a:spcAft>
+                <a:spcPts val="600"/>
+              </a:spcAft>
+              <a:buNone/>
+            </a:pPr>
+            <a:r>
+              <a:rPr sz="1100" b="1" i="0">
+                <a:solidFill>
+                  <a:srgbClr val="15B8A6"/>
+                </a:solidFill>
+                <a:latin typeface="Segoe UI"/>
+              </a:rPr>
+              <a:t>WRAP-UP</a:t>
+            </a:r>
+          </a:p>
+        </p:txBody>
+      </p:sp>
+      <p:sp>
+        <p:nvSpPr>
+          <p:cNvPr id="5" name="TextBox 4"/>
+          <p:cNvSpPr txBox="1"/>
+          <p:nvPr/>
+        </p:nvSpPr>
+        <p:spPr>
+          <a:xfrm>
+            <a:off x="822960" y="786384"/>
+            <a:ext cx="10515600" cy="822960"/>
+          </a:xfrm>
+          <a:prstGeom prst="rect">
+            <a:avLst/>
+          </a:prstGeom>
+          <a:noFill/>
+        </p:spPr>
+        <p:txBody>
+          <a:bodyPr wrap="square" anchor="t" lIns="0" rIns="0" tIns="0" bIns="0">
+            <a:spAutoFit/>
+          </a:bodyPr>
+          <a:lstStyle/>
+          <a:p>
+            <a:pPr algn="l">
+              <a:lnSpc>
+                <a:spcPct val="100000"/>
+              </a:lnSpc>
+              <a:spcAft>
+                <a:spcPts val="600"/>
+              </a:spcAft>
+              <a:buNone/>
+            </a:pPr>
+            <a:r>
+              <a:rPr sz="2700" b="1" i="0">
+                <a:solidFill>
+                  <a:srgbClr val="0E2942"/>
+                </a:solidFill>
+                <a:latin typeface="Segoe UI Semibold"/>
+              </a:rPr>
+              <a:t>Testing</a:t>
+            </a:r>
+          </a:p>
+        </p:txBody>
+      </p:sp>
+      <p:sp>
+        <p:nvSpPr>
+          <p:cNvPr id="6" name="Rectangle 5"/>
           <p:cNvSpPr/>
           <p:nvPr/>
         </p:nvSpPr>
         <p:spPr>
           <a:xfrm>
-            <a:off x="0" y="960120"/>
-            <a:ext cx="12191695" cy="45720"/>
+            <a:off x="822960" y="1463040"/>
+            <a:ext cx="1234440" cy="54864"/>
           </a:xfrm>
           <a:prstGeom prst="rect">
             <a:avLst/>
           </a:prstGeom>
           <a:solidFill>
-            <a:srgbClr val="2563EB"/>
+            <a:srgbClr val="F59E0B"/>
           </a:solidFill>
           <a:ln>
             <a:noFill/>
@@ -4307,14 +5333,14 @@
       </p:sp>
       <p:sp>
         <p:nvSpPr>
-          <p:cNvPr id="5" name="TextBox 4"/>
+          <p:cNvPr id="7" name="TextBox 6"/>
           <p:cNvSpPr txBox="1"/>
           <p:nvPr/>
         </p:nvSpPr>
         <p:spPr>
           <a:xfrm>
-            <a:off x="640080" y="164592"/>
-            <a:ext cx="10972800" cy="685800"/>
+            <a:off x="822960" y="6382512"/>
+            <a:ext cx="7315200" cy="274320"/>
           </a:xfrm>
           <a:prstGeom prst="rect">
             <a:avLst/>
@@ -4322,34 +5348,42 @@
           <a:noFill/>
         </p:spPr>
         <p:txBody>
-          <a:bodyPr wrap="none">
+          <a:bodyPr wrap="square" anchor="t" lIns="0" rIns="0" tIns="0" bIns="0">
             <a:spAutoFit/>
           </a:bodyPr>
           <a:lstStyle/>
           <a:p>
-            <a:pPr>
-              <a:defRPr sz="2600" b="1">
-                <a:solidFill>
-                  <a:srgbClr val="1C2733"/>
-                </a:solidFill>
-              </a:defRPr>
-            </a:pPr>
-            <a:r>
-              <a:t>Testing</a:t>
-            </a:r>
-          </a:p>
-        </p:txBody>
-      </p:sp>
-      <p:sp>
-        <p:nvSpPr>
-          <p:cNvPr id="6" name="TextBox 5"/>
+            <a:pPr algn="l">
+              <a:lnSpc>
+                <a:spcPct val="112000"/>
+              </a:lnSpc>
+              <a:spcAft>
+                <a:spcPts val="600"/>
+              </a:spcAft>
+              <a:buNone/>
+            </a:pPr>
+            <a:r>
+              <a:rPr sz="900" b="0" i="0">
+                <a:solidFill>
+                  <a:srgbClr val="5C6C7E"/>
+                </a:solidFill>
+                <a:latin typeface="Segoe UI"/>
+              </a:rPr>
+              <a:t>CS 112  ·  Cohort A — Team 3</a:t>
+            </a:r>
+          </a:p>
+        </p:txBody>
+      </p:sp>
+      <p:sp>
+        <p:nvSpPr>
+          <p:cNvPr id="8" name="TextBox 7"/>
           <p:cNvSpPr txBox="1"/>
           <p:nvPr/>
         </p:nvSpPr>
         <p:spPr>
           <a:xfrm>
-            <a:off x="640080" y="1280160"/>
-            <a:ext cx="10972800" cy="5120640"/>
+            <a:off x="10820095" y="6382512"/>
+            <a:ext cx="822960" cy="274320"/>
           </a:xfrm>
           <a:prstGeom prst="rect">
             <a:avLst/>
@@ -4357,83 +5391,43 @@
           <a:noFill/>
         </p:spPr>
         <p:txBody>
-          <a:bodyPr wrap="square" anchor="t">
+          <a:bodyPr wrap="square" anchor="t" lIns="0" rIns="0" tIns="0" bIns="0">
             <a:spAutoFit/>
           </a:bodyPr>
           <a:lstStyle/>
           <a:p>
-            <a:pPr>
-              <a:spcAft>
-                <a:spcPts val="700"/>
-              </a:spcAft>
-              <a:defRPr sz="1500" i="0">
-                <a:solidFill>
-                  <a:srgbClr val="1C2733"/>
-                </a:solidFill>
-              </a:defRPr>
-            </a:pPr>
-            <a:r>
-              <a:t>Plus a 57-case manual test plan executed by &gt;= 2 members.</a:t>
-            </a:r>
-          </a:p>
-          <a:p>
-            <a:pPr>
-              <a:spcAft>
-                <a:spcPts val="700"/>
-              </a:spcAft>
-              <a:defRPr sz="1500" i="0">
-                <a:solidFill>
-                  <a:srgbClr val="1C2733"/>
-                </a:solidFill>
-              </a:defRPr>
-            </a:pPr>
-            <a:r>
-              <a:t>5 defects found &amp; fixed (all with regression tests): JSON truncation,</a:t>
-            </a:r>
-          </a:p>
-          <a:p>
-            <a:pPr>
-              <a:spcAft>
-                <a:spcPts val="700"/>
-              </a:spcAft>
-              <a:defRPr sz="1500" i="0">
-                <a:solidFill>
-                  <a:srgbClr val="1C2733"/>
-                </a:solidFill>
-              </a:defRPr>
-            </a:pPr>
-            <a:r>
-              <a:t>name-keyed graph, work-order-&gt;outage propagation, cross-technician updates,</a:t>
-            </a:r>
-          </a:p>
-          <a:p>
-            <a:pPr>
-              <a:spcAft>
-                <a:spcPts val="700"/>
-              </a:spcAft>
-              <a:defRPr sz="1500" i="0">
-                <a:solidFill>
-                  <a:srgbClr val="1C2733"/>
-                </a:solidFill>
-              </a:defRPr>
-            </a:pPr>
-            <a:r>
-              <a:t>missing template filter.</a:t>
+            <a:pPr algn="r">
+              <a:lnSpc>
+                <a:spcPct val="112000"/>
+              </a:lnSpc>
+              <a:spcAft>
+                <a:spcPts val="600"/>
+              </a:spcAft>
+              <a:buNone/>
+            </a:pPr>
+            <a:r>
+              <a:rPr sz="900" b="1" i="0">
+                <a:solidFill>
+                  <a:srgbClr val="5C6C7E"/>
+                </a:solidFill>
+                <a:latin typeface="Segoe UI"/>
+              </a:rPr>
+              <a:t>13</a:t>
             </a:r>
           </a:p>
         </p:txBody>
       </p:sp>
       <p:graphicFrame>
         <p:nvGraphicFramePr>
-          <p:cNvPr id="7" name="Table 6"/>
+          <p:cNvPr id="9" name="Table 8"/>
           <p:cNvGraphicFramePr>
             <a:graphicFrameLocks noGrp="1"/>
           </p:cNvGraphicFramePr>
           <p:nvPr/>
         </p:nvGraphicFramePr>
         <p:xfrm>
-          <a:off x="640080" y="4023360"/>
-          <a:ext cx="10972800" cy="1463040"/>
+          <a:off x="822960" y="1874519"/>
+          <a:ext cx="10515600" cy="1609344"/>
         </p:xfrm>
         <a:graphic>
           <a:graphicData uri="http://schemas.openxmlformats.org/drawingml/2006/table">
@@ -4442,31 +5436,33 @@
                 <a:tableStyleId>{5C22544A-7EE6-4342-B048-85BDC9FD1C3A}</a:tableStyleId>
               </a:tblPr>
               <a:tblGrid>
-                <a:gridCol w="3657600"/>
-                <a:gridCol w="3657600"/>
-                <a:gridCol w="3657600"/>
+                <a:gridCol w="3505200"/>
+                <a:gridCol w="3505200"/>
+                <a:gridCol w="3505200"/>
               </a:tblGrid>
-              <a:tr h="365760">
+              <a:tr h="402336">
                 <a:tc>
                   <a:txBody>
                     <a:bodyPr/>
                     <a:lstStyle/>
                     <a:p>
                       <a:pPr>
-                        <a:defRPr sz="1200" b="1">
+                        <a:buNone/>
+                      </a:pPr>
+                      <a:r>
+                        <a:rPr sz="1200" b="1">
                           <a:solidFill>
                             <a:srgbClr val="FFFFFF"/>
                           </a:solidFill>
-                        </a:defRPr>
-                      </a:pPr>
-                      <a:r>
+                          <a:latin typeface="Segoe UI"/>
+                        </a:rPr>
                         <a:t>Suite</a:t>
                       </a:r>
                     </a:p>
                   </a:txBody>
-                  <a:tcPr>
+                  <a:tcPr marL="128016" marR="128016" marT="36576" marB="36576" anchor="ctr">
                     <a:solidFill>
-                      <a:srgbClr val="2563EB"/>
+                      <a:srgbClr val="0E2942"/>
                     </a:solidFill>
                   </a:tcPr>
                 </a:tc>
@@ -4476,20 +5472,22 @@
                     <a:lstStyle/>
                     <a:p>
                       <a:pPr>
-                        <a:defRPr sz="1200" b="1">
+                        <a:buNone/>
+                      </a:pPr>
+                      <a:r>
+                        <a:rPr sz="1200" b="1">
                           <a:solidFill>
                             <a:srgbClr val="FFFFFF"/>
                           </a:solidFill>
-                        </a:defRPr>
-                      </a:pPr>
-                      <a:r>
+                          <a:latin typeface="Segoe UI"/>
+                        </a:rPr>
                         <a:t>Tests</a:t>
                       </a:r>
                     </a:p>
                   </a:txBody>
-                  <a:tcPr>
+                  <a:tcPr marL="128016" marR="128016" marT="36576" marB="36576" anchor="ctr">
                     <a:solidFill>
-                      <a:srgbClr val="2563EB"/>
+                      <a:srgbClr val="0E2942"/>
                     </a:solidFill>
                   </a:tcPr>
                 </a:tc>
@@ -4499,39 +5497,47 @@
                     <a:lstStyle/>
                     <a:p>
                       <a:pPr>
-                        <a:defRPr sz="1200" b="1">
+                        <a:buNone/>
+                      </a:pPr>
+                      <a:r>
+                        <a:rPr sz="1200" b="1">
                           <a:solidFill>
                             <a:srgbClr val="FFFFFF"/>
                           </a:solidFill>
-                        </a:defRPr>
-                      </a:pPr>
-                      <a:r>
+                          <a:latin typeface="Segoe UI"/>
+                        </a:rPr>
                         <a:t>Result</a:t>
                       </a:r>
                     </a:p>
                   </a:txBody>
-                  <a:tcPr>
+                  <a:tcPr marL="128016" marR="128016" marT="36576" marB="36576" anchor="ctr">
                     <a:solidFill>
-                      <a:srgbClr val="2563EB"/>
+                      <a:srgbClr val="0E2942"/>
                     </a:solidFill>
                   </a:tcPr>
                 </a:tc>
               </a:tr>
-              <a:tr h="365760">
+              <a:tr h="402336">
                 <a:tc>
                   <a:txBody>
                     <a:bodyPr/>
                     <a:lstStyle/>
                     <a:p>
                       <a:pPr>
-                        <a:defRPr sz="1200" b="0"/>
+                        <a:buNone/>
                       </a:pPr>
                       <a:r>
+                        <a:rPr sz="1150" b="0">
+                          <a:solidFill>
+                            <a:srgbClr val="1B2A38"/>
+                          </a:solidFill>
+                          <a:latin typeface="Segoe UI"/>
+                        </a:rPr>
                         <a:t>GridCare-Lite</a:t>
                       </a:r>
                     </a:p>
                   </a:txBody>
-                  <a:tcPr>
+                  <a:tcPr marL="128016" marR="128016" marT="36576" marB="36576" anchor="ctr">
                     <a:solidFill>
                       <a:srgbClr val="FFFFFF"/>
                     </a:solidFill>
@@ -4543,14 +5549,20 @@
                     <a:lstStyle/>
                     <a:p>
                       <a:pPr>
-                        <a:defRPr sz="1200" b="0"/>
+                        <a:buNone/>
                       </a:pPr>
                       <a:r>
+                        <a:rPr sz="1150" b="0">
+                          <a:solidFill>
+                            <a:srgbClr val="1B2A38"/>
+                          </a:solidFill>
+                          <a:latin typeface="Segoe UI"/>
+                        </a:rPr>
                         <a:t>24</a:t>
                       </a:r>
                     </a:p>
                   </a:txBody>
-                  <a:tcPr>
+                  <a:tcPr marL="128016" marR="128016" marT="36576" marB="36576" anchor="ctr">
                     <a:solidFill>
                       <a:srgbClr val="FFFFFF"/>
                     </a:solidFill>
@@ -4562,37 +5574,49 @@
                     <a:lstStyle/>
                     <a:p>
                       <a:pPr>
-                        <a:defRPr sz="1200" b="0"/>
+                        <a:buNone/>
                       </a:pPr>
                       <a:r>
+                        <a:rPr sz="1150" b="0">
+                          <a:solidFill>
+                            <a:srgbClr val="1B2A38"/>
+                          </a:solidFill>
+                          <a:latin typeface="Segoe UI"/>
+                        </a:rPr>
                         <a:t>all pass</a:t>
                       </a:r>
                     </a:p>
                   </a:txBody>
-                  <a:tcPr>
+                  <a:tcPr marL="128016" marR="128016" marT="36576" marB="36576" anchor="ctr">
                     <a:solidFill>
                       <a:srgbClr val="FFFFFF"/>
                     </a:solidFill>
                   </a:tcPr>
                 </a:tc>
               </a:tr>
-              <a:tr h="365760">
+              <a:tr h="402336">
                 <a:tc>
                   <a:txBody>
                     <a:bodyPr/>
                     <a:lstStyle/>
                     <a:p>
                       <a:pPr>
-                        <a:defRPr sz="1200" b="0"/>
+                        <a:buNone/>
                       </a:pPr>
                       <a:r>
+                        <a:rPr sz="1150" b="0">
+                          <a:solidFill>
+                            <a:srgbClr val="1B2A38"/>
+                          </a:solidFill>
+                          <a:latin typeface="Segoe UI"/>
+                        </a:rPr>
                         <a:t>ClinicCare-Lite</a:t>
                       </a:r>
                     </a:p>
                   </a:txBody>
-                  <a:tcPr>
+                  <a:tcPr marL="128016" marR="128016" marT="36576" marB="36576" anchor="ctr">
                     <a:solidFill>
-                      <a:srgbClr val="F1F5FB"/>
+                      <a:srgbClr val="ECF2F8"/>
                     </a:solidFill>
                   </a:tcPr>
                 </a:tc>
@@ -4602,16 +5626,22 @@
                     <a:lstStyle/>
                     <a:p>
                       <a:pPr>
-                        <a:defRPr sz="1200" b="0"/>
+                        <a:buNone/>
                       </a:pPr>
                       <a:r>
+                        <a:rPr sz="1150" b="0">
+                          <a:solidFill>
+                            <a:srgbClr val="1B2A38"/>
+                          </a:solidFill>
+                          <a:latin typeface="Segoe UI"/>
+                        </a:rPr>
                         <a:t>28</a:t>
                       </a:r>
                     </a:p>
                   </a:txBody>
-                  <a:tcPr>
+                  <a:tcPr marL="128016" marR="128016" marT="36576" marB="36576" anchor="ctr">
                     <a:solidFill>
-                      <a:srgbClr val="F1F5FB"/>
+                      <a:srgbClr val="ECF2F8"/>
                     </a:solidFill>
                   </a:tcPr>
                 </a:tc>
@@ -4621,35 +5651,47 @@
                     <a:lstStyle/>
                     <a:p>
                       <a:pPr>
-                        <a:defRPr sz="1200" b="0"/>
+                        <a:buNone/>
                       </a:pPr>
                       <a:r>
+                        <a:rPr sz="1150" b="0">
+                          <a:solidFill>
+                            <a:srgbClr val="1B2A38"/>
+                          </a:solidFill>
+                          <a:latin typeface="Segoe UI"/>
+                        </a:rPr>
                         <a:t>all pass</a:t>
                       </a:r>
                     </a:p>
                   </a:txBody>
-                  <a:tcPr>
+                  <a:tcPr marL="128016" marR="128016" marT="36576" marB="36576" anchor="ctr">
                     <a:solidFill>
-                      <a:srgbClr val="F1F5FB"/>
+                      <a:srgbClr val="ECF2F8"/>
                     </a:solidFill>
                   </a:tcPr>
                 </a:tc>
               </a:tr>
-              <a:tr h="365760">
+              <a:tr h="402336">
                 <a:tc>
                   <a:txBody>
                     <a:bodyPr/>
                     <a:lstStyle/>
                     <a:p>
                       <a:pPr>
-                        <a:defRPr sz="1200" b="0"/>
+                        <a:buNone/>
                       </a:pPr>
                       <a:r>
+                        <a:rPr sz="1150" b="1">
+                          <a:solidFill>
+                            <a:srgbClr val="1B2A38"/>
+                          </a:solidFill>
+                          <a:latin typeface="Segoe UI"/>
+                        </a:rPr>
                         <a:t>Total automated</a:t>
                       </a:r>
                     </a:p>
                   </a:txBody>
-                  <a:tcPr>
+                  <a:tcPr marL="128016" marR="128016" marT="36576" marB="36576" anchor="ctr">
                     <a:solidFill>
                       <a:srgbClr val="FFFFFF"/>
                     </a:solidFill>
@@ -4661,14 +5703,20 @@
                     <a:lstStyle/>
                     <a:p>
                       <a:pPr>
-                        <a:defRPr sz="1200" b="0"/>
+                        <a:buNone/>
                       </a:pPr>
                       <a:r>
+                        <a:rPr sz="1150" b="1">
+                          <a:solidFill>
+                            <a:srgbClr val="1B2A38"/>
+                          </a:solidFill>
+                          <a:latin typeface="Segoe UI"/>
+                        </a:rPr>
                         <a:t>52</a:t>
                       </a:r>
                     </a:p>
                   </a:txBody>
-                  <a:tcPr>
+                  <a:tcPr marL="128016" marR="128016" marT="36576" marB="36576" anchor="ctr">
                     <a:solidFill>
                       <a:srgbClr val="FFFFFF"/>
                     </a:solidFill>
@@ -4680,14 +5728,20 @@
                     <a:lstStyle/>
                     <a:p>
                       <a:pPr>
-                        <a:defRPr sz="1200" b="0"/>
+                        <a:buNone/>
                       </a:pPr>
                       <a:r>
+                        <a:rPr sz="1150" b="1">
+                          <a:solidFill>
+                            <a:srgbClr val="1B2A38"/>
+                          </a:solidFill>
+                          <a:latin typeface="Segoe UI"/>
+                        </a:rPr>
                         <a:t>green on main</a:t>
                       </a:r>
                     </a:p>
                   </a:txBody>
-                  <a:tcPr>
+                  <a:tcPr marL="128016" marR="128016" marT="36576" marB="36576" anchor="ctr">
                     <a:solidFill>
                       <a:srgbClr val="FFFFFF"/>
                     </a:solidFill>
@@ -4698,6 +5752,109 @@
           </a:graphicData>
         </a:graphic>
       </p:graphicFrame>
+      <p:sp>
+        <p:nvSpPr>
+          <p:cNvPr id="10" name="TextBox 9"/>
+          <p:cNvSpPr txBox="1"/>
+          <p:nvPr/>
+        </p:nvSpPr>
+        <p:spPr>
+          <a:xfrm>
+            <a:off x="822960" y="3666744"/>
+            <a:ext cx="10515600" cy="1335024"/>
+          </a:xfrm>
+          <a:prstGeom prst="rect">
+            <a:avLst/>
+          </a:prstGeom>
+          <a:noFill/>
+        </p:spPr>
+        <p:txBody>
+          <a:bodyPr wrap="square" anchor="t" lIns="0" rIns="0" tIns="0" bIns="0">
+            <a:spAutoFit/>
+          </a:bodyPr>
+          <a:lstStyle/>
+          <a:p>
+            <a:pPr algn="l">
+              <a:lnSpc>
+                <a:spcPct val="114000"/>
+              </a:lnSpc>
+              <a:spcAft>
+                <a:spcPts val="700"/>
+              </a:spcAft>
+              <a:buNone/>
+            </a:pPr>
+            <a:r>
+              <a:rPr sz="1450" b="0" i="0">
+                <a:solidFill>
+                  <a:srgbClr val="1B2A38"/>
+                </a:solidFill>
+                <a:latin typeface="Segoe UI"/>
+              </a:rPr>
+              <a:t>Plus a 57-case manual test plan executed by ≥ 2 members.</a:t>
+            </a:r>
+          </a:p>
+          <a:p>
+            <a:pPr algn="l">
+              <a:lnSpc>
+                <a:spcPct val="114000"/>
+              </a:lnSpc>
+              <a:spcAft>
+                <a:spcPts val="700"/>
+              </a:spcAft>
+              <a:buNone/>
+            </a:pPr>
+            <a:r>
+              <a:rPr sz="1450" b="0" i="0">
+                <a:solidFill>
+                  <a:srgbClr val="1B2A38"/>
+                </a:solidFill>
+                <a:latin typeface="Segoe UI"/>
+              </a:rPr>
+              <a:t>5 defects found &amp; fixed (all with regression tests): JSON truncation,</a:t>
+            </a:r>
+          </a:p>
+          <a:p>
+            <a:pPr algn="l">
+              <a:lnSpc>
+                <a:spcPct val="114000"/>
+              </a:lnSpc>
+              <a:spcAft>
+                <a:spcPts val="700"/>
+              </a:spcAft>
+              <a:buNone/>
+            </a:pPr>
+            <a:r>
+              <a:rPr sz="1450" b="0" i="0">
+                <a:solidFill>
+                  <a:srgbClr val="1B2A38"/>
+                </a:solidFill>
+                <a:latin typeface="Segoe UI"/>
+              </a:rPr>
+              <a:t>name-keyed graph, work-order→outage propagation, cross-technician updates,</a:t>
+            </a:r>
+          </a:p>
+          <a:p>
+            <a:pPr algn="l">
+              <a:lnSpc>
+                <a:spcPct val="114000"/>
+              </a:lnSpc>
+              <a:spcAft>
+                <a:spcPts val="700"/>
+              </a:spcAft>
+              <a:buNone/>
+            </a:pPr>
+            <a:r>
+              <a:rPr sz="1450" b="0" i="0">
+                <a:solidFill>
+                  <a:srgbClr val="1B2A38"/>
+                </a:solidFill>
+                <a:latin typeface="Segoe UI"/>
+              </a:rPr>
+              <a:t>missing template filter.</a:t>
+            </a:r>
+          </a:p>
+        </p:txBody>
+      </p:sp>
     </p:spTree>
   </p:cSld>
   <p:clrMapOvr>
@@ -4769,13 +5926,13 @@
         <p:spPr>
           <a:xfrm>
             <a:off x="0" y="0"/>
-            <a:ext cx="12191695" cy="960120"/>
+            <a:ext cx="146304" cy="6858000"/>
           </a:xfrm>
           <a:prstGeom prst="rect">
             <a:avLst/>
           </a:prstGeom>
           <a:solidFill>
-            <a:srgbClr val="F1F5FB"/>
+            <a:srgbClr val="15B8A6"/>
           </a:solidFill>
           <a:ln>
             <a:noFill/>
@@ -4806,20 +5963,106 @@
       </p:sp>
       <p:sp>
         <p:nvSpPr>
-          <p:cNvPr id="4" name="Rectangle 3"/>
+          <p:cNvPr id="4" name="TextBox 3"/>
+          <p:cNvSpPr txBox="1"/>
+          <p:nvPr/>
+        </p:nvSpPr>
+        <p:spPr>
+          <a:xfrm>
+            <a:off x="822960" y="475488"/>
+            <a:ext cx="10515600" cy="274320"/>
+          </a:xfrm>
+          <a:prstGeom prst="rect">
+            <a:avLst/>
+          </a:prstGeom>
+          <a:noFill/>
+        </p:spPr>
+        <p:txBody>
+          <a:bodyPr wrap="square" anchor="t" lIns="0" rIns="0" tIns="0" bIns="0">
+            <a:spAutoFit/>
+          </a:bodyPr>
+          <a:lstStyle/>
+          <a:p>
+            <a:pPr algn="l">
+              <a:lnSpc>
+                <a:spcPct val="112000"/>
+              </a:lnSpc>
+              <a:spcAft>
+                <a:spcPts val="600"/>
+              </a:spcAft>
+              <a:buNone/>
+            </a:pPr>
+            <a:r>
+              <a:rPr sz="1100" b="1" i="0">
+                <a:solidFill>
+                  <a:srgbClr val="15B8A6"/>
+                </a:solidFill>
+                <a:latin typeface="Segoe UI"/>
+              </a:rPr>
+              <a:t>WRAP-UP</a:t>
+            </a:r>
+          </a:p>
+        </p:txBody>
+      </p:sp>
+      <p:sp>
+        <p:nvSpPr>
+          <p:cNvPr id="5" name="TextBox 4"/>
+          <p:cNvSpPr txBox="1"/>
+          <p:nvPr/>
+        </p:nvSpPr>
+        <p:spPr>
+          <a:xfrm>
+            <a:off x="822960" y="786384"/>
+            <a:ext cx="10515600" cy="822960"/>
+          </a:xfrm>
+          <a:prstGeom prst="rect">
+            <a:avLst/>
+          </a:prstGeom>
+          <a:noFill/>
+        </p:spPr>
+        <p:txBody>
+          <a:bodyPr wrap="square" anchor="t" lIns="0" rIns="0" tIns="0" bIns="0">
+            <a:spAutoFit/>
+          </a:bodyPr>
+          <a:lstStyle/>
+          <a:p>
+            <a:pPr algn="l">
+              <a:lnSpc>
+                <a:spcPct val="100000"/>
+              </a:lnSpc>
+              <a:spcAft>
+                <a:spcPts val="600"/>
+              </a:spcAft>
+              <a:buNone/>
+            </a:pPr>
+            <a:r>
+              <a:rPr sz="2700" b="1" i="0">
+                <a:solidFill>
+                  <a:srgbClr val="0E2942"/>
+                </a:solidFill>
+                <a:latin typeface="Segoe UI Semibold"/>
+              </a:rPr>
+              <a:t>What we learned</a:t>
+            </a:r>
+          </a:p>
+        </p:txBody>
+      </p:sp>
+      <p:sp>
+        <p:nvSpPr>
+          <p:cNvPr id="6" name="Rectangle 5"/>
           <p:cNvSpPr/>
           <p:nvPr/>
         </p:nvSpPr>
         <p:spPr>
           <a:xfrm>
-            <a:off x="0" y="960120"/>
-            <a:ext cx="12191695" cy="45720"/>
+            <a:off x="822960" y="1463040"/>
+            <a:ext cx="1234440" cy="54864"/>
           </a:xfrm>
           <a:prstGeom prst="rect">
             <a:avLst/>
           </a:prstGeom>
           <a:solidFill>
-            <a:srgbClr val="2563EB"/>
+            <a:srgbClr val="F59E0B"/>
           </a:solidFill>
           <a:ln>
             <a:noFill/>
@@ -4850,14 +6093,14 @@
       </p:sp>
       <p:sp>
         <p:nvSpPr>
-          <p:cNvPr id="5" name="TextBox 4"/>
+          <p:cNvPr id="7" name="TextBox 6"/>
           <p:cNvSpPr txBox="1"/>
           <p:nvPr/>
         </p:nvSpPr>
         <p:spPr>
           <a:xfrm>
-            <a:off x="640080" y="164592"/>
-            <a:ext cx="10972800" cy="685800"/>
+            <a:off x="822960" y="6382512"/>
+            <a:ext cx="7315200" cy="274320"/>
           </a:xfrm>
           <a:prstGeom prst="rect">
             <a:avLst/>
@@ -4865,34 +6108,42 @@
           <a:noFill/>
         </p:spPr>
         <p:txBody>
-          <a:bodyPr wrap="none">
+          <a:bodyPr wrap="square" anchor="t" lIns="0" rIns="0" tIns="0" bIns="0">
             <a:spAutoFit/>
           </a:bodyPr>
           <a:lstStyle/>
           <a:p>
-            <a:pPr>
-              <a:defRPr sz="2600" b="1">
-                <a:solidFill>
-                  <a:srgbClr val="1C2733"/>
-                </a:solidFill>
-              </a:defRPr>
-            </a:pPr>
-            <a:r>
-              <a:t>What we learned</a:t>
-            </a:r>
-          </a:p>
-        </p:txBody>
-      </p:sp>
-      <p:sp>
-        <p:nvSpPr>
-          <p:cNvPr id="6" name="TextBox 5"/>
+            <a:pPr algn="l">
+              <a:lnSpc>
+                <a:spcPct val="112000"/>
+              </a:lnSpc>
+              <a:spcAft>
+                <a:spcPts val="600"/>
+              </a:spcAft>
+              <a:buNone/>
+            </a:pPr>
+            <a:r>
+              <a:rPr sz="900" b="0" i="0">
+                <a:solidFill>
+                  <a:srgbClr val="5C6C7E"/>
+                </a:solidFill>
+                <a:latin typeface="Segoe UI"/>
+              </a:rPr>
+              <a:t>CS 112  ·  Cohort A — Team 3</a:t>
+            </a:r>
+          </a:p>
+        </p:txBody>
+      </p:sp>
+      <p:sp>
+        <p:nvSpPr>
+          <p:cNvPr id="8" name="TextBox 7"/>
           <p:cNvSpPr txBox="1"/>
           <p:nvPr/>
         </p:nvSpPr>
         <p:spPr>
           <a:xfrm>
-            <a:off x="640080" y="1280160"/>
-            <a:ext cx="10972800" cy="5120640"/>
+            <a:off x="10820095" y="6382512"/>
+            <a:ext cx="822960" cy="274320"/>
           </a:xfrm>
           <a:prstGeom prst="rect">
             <a:avLst/>
@@ -4900,63 +6151,196 @@
           <a:noFill/>
         </p:spPr>
         <p:txBody>
-          <a:bodyPr wrap="square" anchor="t">
+          <a:bodyPr wrap="square" anchor="t" lIns="0" rIns="0" tIns="0" bIns="0">
             <a:spAutoFit/>
           </a:bodyPr>
           <a:lstStyle/>
           <a:p>
-            <a:pPr>
+            <a:pPr algn="r">
+              <a:lnSpc>
+                <a:spcPct val="112000"/>
+              </a:lnSpc>
+              <a:spcAft>
+                <a:spcPts val="600"/>
+              </a:spcAft>
+              <a:buNone/>
+            </a:pPr>
+            <a:r>
+              <a:rPr sz="900" b="1" i="0">
+                <a:solidFill>
+                  <a:srgbClr val="5C6C7E"/>
+                </a:solidFill>
+                <a:latin typeface="Segoe UI"/>
+              </a:rPr>
+              <a:t>14</a:t>
+            </a:r>
+          </a:p>
+        </p:txBody>
+      </p:sp>
+      <p:sp>
+        <p:nvSpPr>
+          <p:cNvPr id="9" name="TextBox 8"/>
+          <p:cNvSpPr txBox="1"/>
+          <p:nvPr/>
+        </p:nvSpPr>
+        <p:spPr>
+          <a:xfrm>
+            <a:off x="822960" y="2331720"/>
+            <a:ext cx="10515600" cy="1645920"/>
+          </a:xfrm>
+          <a:prstGeom prst="rect">
+            <a:avLst/>
+          </a:prstGeom>
+          <a:noFill/>
+        </p:spPr>
+        <p:txBody>
+          <a:bodyPr wrap="square" anchor="t" lIns="0" rIns="0" tIns="0" bIns="0">
+            <a:spAutoFit/>
+          </a:bodyPr>
+          <a:lstStyle/>
+          <a:p>
+            <a:pPr algn="l">
+              <a:lnSpc>
+                <a:spcPct val="114000"/>
+              </a:lnSpc>
               <a:spcAft>
                 <a:spcPts val="700"/>
               </a:spcAft>
-              <a:defRPr sz="1700"/>
-            </a:pPr>
-            <a:r>
-              <a:t>- Enforce rules in a service layer, not the UI</a:t>
-            </a:r>
-          </a:p>
-          <a:p>
-            <a:pPr>
+              <a:buNone/>
+            </a:pPr>
+            <a:r>
+              <a:rPr sz="1500" b="1" i="0">
+                <a:solidFill>
+                  <a:srgbClr val="15B8A6"/>
+                </a:solidFill>
+                <a:latin typeface="Segoe UI"/>
+              </a:rPr>
+              <a:t>▸  </a:t>
+            </a:r>
+            <a:r>
+              <a:rPr sz="1500" b="0" i="0">
+                <a:solidFill>
+                  <a:srgbClr val="1B2A38"/>
+                </a:solidFill>
+                <a:latin typeface="Segoe UI"/>
+              </a:rPr>
+              <a:t>Enforce rules in a service layer, not the UI</a:t>
+            </a:r>
+          </a:p>
+          <a:p>
+            <a:pPr algn="l">
+              <a:lnSpc>
+                <a:spcPct val="114000"/>
+              </a:lnSpc>
               <a:spcAft>
                 <a:spcPts val="700"/>
               </a:spcAft>
-              <a:defRPr sz="1700"/>
-            </a:pPr>
-            <a:r>
-              <a:t>- Write the regression test the moment you find the bug</a:t>
-            </a:r>
-          </a:p>
-          <a:p>
-            <a:pPr>
+              <a:buNone/>
+            </a:pPr>
+            <a:r>
+              <a:rPr sz="1500" b="1" i="0">
+                <a:solidFill>
+                  <a:srgbClr val="15B8A6"/>
+                </a:solidFill>
+                <a:latin typeface="Segoe UI"/>
+              </a:rPr>
+              <a:t>▸  </a:t>
+            </a:r>
+            <a:r>
+              <a:rPr sz="1500" b="0" i="0">
+                <a:solidFill>
+                  <a:srgbClr val="1B2A38"/>
+                </a:solidFill>
+                <a:latin typeface="Segoe UI"/>
+              </a:rPr>
+              <a:t>Write the regression test the moment you find the bug</a:t>
+            </a:r>
+          </a:p>
+          <a:p>
+            <a:pPr algn="l">
+              <a:lnSpc>
+                <a:spcPct val="114000"/>
+              </a:lnSpc>
               <a:spcAft>
                 <a:spcPts val="700"/>
               </a:spcAft>
-              <a:defRPr sz="1700"/>
-            </a:pPr>
-            <a:r>
-              <a:t>- Treat "clean" data as untrusted anyway</a:t>
-            </a:r>
-          </a:p>
-          <a:p>
-            <a:pPr>
+              <a:buNone/>
+            </a:pPr>
+            <a:r>
+              <a:rPr sz="1500" b="1" i="0">
+                <a:solidFill>
+                  <a:srgbClr val="15B8A6"/>
+                </a:solidFill>
+                <a:latin typeface="Segoe UI"/>
+              </a:rPr>
+              <a:t>▸  </a:t>
+            </a:r>
+            <a:r>
+              <a:rPr sz="1500" b="0" i="0">
+                <a:solidFill>
+                  <a:srgbClr val="1B2A38"/>
+                </a:solidFill>
+                <a:latin typeface="Segoe UI"/>
+              </a:rPr>
+              <a:t>Treat "clean" data as untrusted anyway</a:t>
+            </a:r>
+          </a:p>
+          <a:p>
+            <a:pPr algn="l">
+              <a:lnSpc>
+                <a:spcPct val="114000"/>
+              </a:lnSpc>
               <a:spcAft>
                 <a:spcPts val="700"/>
               </a:spcAft>
-              <a:defRPr sz="1700"/>
-            </a:pPr>
-            <a:r>
-              <a:t>- Our first N-1 hypothesis was wrong — we kept the finding and explained it</a:t>
-            </a:r>
-          </a:p>
-          <a:p>
-            <a:pPr>
+              <a:buNone/>
+            </a:pPr>
+            <a:r>
+              <a:rPr sz="1500" b="1" i="0">
+                <a:solidFill>
+                  <a:srgbClr val="15B8A6"/>
+                </a:solidFill>
+                <a:latin typeface="Segoe UI"/>
+              </a:rPr>
+              <a:t>▸  </a:t>
+            </a:r>
+            <a:r>
+              <a:rPr sz="1500" b="0" i="0">
+                <a:solidFill>
+                  <a:srgbClr val="1B2A38"/>
+                </a:solidFill>
+                <a:latin typeface="Segoe UI"/>
+              </a:rPr>
+              <a:t>Our first N-1 hypothesis was wrong — we kept the finding and explained it</a:t>
+            </a:r>
+          </a:p>
+          <a:p>
+            <a:pPr algn="l">
+              <a:lnSpc>
+                <a:spcPct val="114000"/>
+              </a:lnSpc>
               <a:spcAft>
                 <a:spcPts val="700"/>
               </a:spcAft>
-              <a:defRPr sz="1700"/>
-            </a:pPr>
-            <a:r>
-              <a:t>- Staying non-diagnostic takes active restraint — the "obvious" feature is the forbidden one</a:t>
+              <a:buNone/>
+            </a:pPr>
+            <a:r>
+              <a:rPr sz="1500" b="1" i="0">
+                <a:solidFill>
+                  <a:srgbClr val="15B8A6"/>
+                </a:solidFill>
+                <a:latin typeface="Segoe UI"/>
+              </a:rPr>
+              <a:t>▸  </a:t>
+            </a:r>
+            <a:r>
+              <a:rPr sz="1500" b="0" i="0">
+                <a:solidFill>
+                  <a:srgbClr val="1B2A38"/>
+                </a:solidFill>
+                <a:latin typeface="Segoe UI"/>
+              </a:rPr>
+              <a:t>Staying non-diagnostic takes active restraint — the "obvious" feature is the forbidden one</a:t>
             </a:r>
           </a:p>
         </p:txBody>
@@ -5032,13 +6416,13 @@
         <p:spPr>
           <a:xfrm>
             <a:off x="0" y="0"/>
-            <a:ext cx="12191695" cy="960120"/>
+            <a:ext cx="146304" cy="6858000"/>
           </a:xfrm>
           <a:prstGeom prst="rect">
             <a:avLst/>
           </a:prstGeom>
           <a:solidFill>
-            <a:srgbClr val="F1F5FB"/>
+            <a:srgbClr val="15B8A6"/>
           </a:solidFill>
           <a:ln>
             <a:noFill/>
@@ -5069,20 +6453,106 @@
       </p:sp>
       <p:sp>
         <p:nvSpPr>
-          <p:cNvPr id="4" name="Rectangle 3"/>
+          <p:cNvPr id="4" name="TextBox 3"/>
+          <p:cNvSpPr txBox="1"/>
+          <p:nvPr/>
+        </p:nvSpPr>
+        <p:spPr>
+          <a:xfrm>
+            <a:off x="822960" y="475488"/>
+            <a:ext cx="10515600" cy="274320"/>
+          </a:xfrm>
+          <a:prstGeom prst="rect">
+            <a:avLst/>
+          </a:prstGeom>
+          <a:noFill/>
+        </p:spPr>
+        <p:txBody>
+          <a:bodyPr wrap="square" anchor="t" lIns="0" rIns="0" tIns="0" bIns="0">
+            <a:spAutoFit/>
+          </a:bodyPr>
+          <a:lstStyle/>
+          <a:p>
+            <a:pPr algn="l">
+              <a:lnSpc>
+                <a:spcPct val="112000"/>
+              </a:lnSpc>
+              <a:spcAft>
+                <a:spcPts val="600"/>
+              </a:spcAft>
+              <a:buNone/>
+            </a:pPr>
+            <a:r>
+              <a:rPr sz="1100" b="1" i="0">
+                <a:solidFill>
+                  <a:srgbClr val="15B8A6"/>
+                </a:solidFill>
+                <a:latin typeface="Segoe UI"/>
+              </a:rPr>
+              <a:t>WRAP-UP</a:t>
+            </a:r>
+          </a:p>
+        </p:txBody>
+      </p:sp>
+      <p:sp>
+        <p:nvSpPr>
+          <p:cNvPr id="5" name="TextBox 4"/>
+          <p:cNvSpPr txBox="1"/>
+          <p:nvPr/>
+        </p:nvSpPr>
+        <p:spPr>
+          <a:xfrm>
+            <a:off x="822960" y="786384"/>
+            <a:ext cx="10515600" cy="822960"/>
+          </a:xfrm>
+          <a:prstGeom prst="rect">
+            <a:avLst/>
+          </a:prstGeom>
+          <a:noFill/>
+        </p:spPr>
+        <p:txBody>
+          <a:bodyPr wrap="square" anchor="t" lIns="0" rIns="0" tIns="0" bIns="0">
+            <a:spAutoFit/>
+          </a:bodyPr>
+          <a:lstStyle/>
+          <a:p>
+            <a:pPr algn="l">
+              <a:lnSpc>
+                <a:spcPct val="100000"/>
+              </a:lnSpc>
+              <a:spcAft>
+                <a:spcPts val="600"/>
+              </a:spcAft>
+              <a:buNone/>
+            </a:pPr>
+            <a:r>
+              <a:rPr sz="2700" b="1" i="0">
+                <a:solidFill>
+                  <a:srgbClr val="0E2942"/>
+                </a:solidFill>
+                <a:latin typeface="Segoe UI Semibold"/>
+              </a:rPr>
+              <a:t>Live demo</a:t>
+            </a:r>
+          </a:p>
+        </p:txBody>
+      </p:sp>
+      <p:sp>
+        <p:nvSpPr>
+          <p:cNvPr id="6" name="Rectangle 5"/>
           <p:cNvSpPr/>
           <p:nvPr/>
         </p:nvSpPr>
         <p:spPr>
           <a:xfrm>
-            <a:off x="0" y="960120"/>
-            <a:ext cx="12191695" cy="45720"/>
+            <a:off x="822960" y="1463040"/>
+            <a:ext cx="1234440" cy="54864"/>
           </a:xfrm>
           <a:prstGeom prst="rect">
             <a:avLst/>
           </a:prstGeom>
           <a:solidFill>
-            <a:srgbClr val="2563EB"/>
+            <a:srgbClr val="F59E0B"/>
           </a:solidFill>
           <a:ln>
             <a:noFill/>
@@ -5113,14 +6583,14 @@
       </p:sp>
       <p:sp>
         <p:nvSpPr>
-          <p:cNvPr id="5" name="TextBox 4"/>
+          <p:cNvPr id="7" name="TextBox 6"/>
           <p:cNvSpPr txBox="1"/>
           <p:nvPr/>
         </p:nvSpPr>
         <p:spPr>
           <a:xfrm>
-            <a:off x="640080" y="164592"/>
-            <a:ext cx="10972800" cy="685800"/>
+            <a:off x="822960" y="6382512"/>
+            <a:ext cx="7315200" cy="274320"/>
           </a:xfrm>
           <a:prstGeom prst="rect">
             <a:avLst/>
@@ -5128,34 +6598,42 @@
           <a:noFill/>
         </p:spPr>
         <p:txBody>
-          <a:bodyPr wrap="none">
+          <a:bodyPr wrap="square" anchor="t" lIns="0" rIns="0" tIns="0" bIns="0">
             <a:spAutoFit/>
           </a:bodyPr>
           <a:lstStyle/>
           <a:p>
-            <a:pPr>
-              <a:defRPr sz="2600" b="1">
-                <a:solidFill>
-                  <a:srgbClr val="1C2733"/>
-                </a:solidFill>
-              </a:defRPr>
-            </a:pPr>
-            <a:r>
-              <a:t>Live demo</a:t>
-            </a:r>
-          </a:p>
-        </p:txBody>
-      </p:sp>
-      <p:sp>
-        <p:nvSpPr>
-          <p:cNvPr id="6" name="TextBox 5"/>
+            <a:pPr algn="l">
+              <a:lnSpc>
+                <a:spcPct val="112000"/>
+              </a:lnSpc>
+              <a:spcAft>
+                <a:spcPts val="600"/>
+              </a:spcAft>
+              <a:buNone/>
+            </a:pPr>
+            <a:r>
+              <a:rPr sz="900" b="0" i="0">
+                <a:solidFill>
+                  <a:srgbClr val="5C6C7E"/>
+                </a:solidFill>
+                <a:latin typeface="Segoe UI"/>
+              </a:rPr>
+              <a:t>CS 112  ·  Cohort A — Team 3</a:t>
+            </a:r>
+          </a:p>
+        </p:txBody>
+      </p:sp>
+      <p:sp>
+        <p:nvSpPr>
+          <p:cNvPr id="8" name="TextBox 7"/>
           <p:cNvSpPr txBox="1"/>
           <p:nvPr/>
         </p:nvSpPr>
         <p:spPr>
           <a:xfrm>
-            <a:off x="640080" y="1280160"/>
-            <a:ext cx="10972800" cy="5120640"/>
+            <a:off x="10820095" y="6382512"/>
+            <a:ext cx="822960" cy="274320"/>
           </a:xfrm>
           <a:prstGeom prst="rect">
             <a:avLst/>
@@ -5163,71 +6641,178 @@
           <a:noFill/>
         </p:spPr>
         <p:txBody>
-          <a:bodyPr wrap="square" anchor="t">
+          <a:bodyPr wrap="square" anchor="t" lIns="0" rIns="0" tIns="0" bIns="0">
             <a:spAutoFit/>
           </a:bodyPr>
           <a:lstStyle/>
           <a:p>
-            <a:pPr>
+            <a:pPr algn="r">
+              <a:lnSpc>
+                <a:spcPct val="112000"/>
+              </a:lnSpc>
+              <a:spcAft>
+                <a:spcPts val="600"/>
+              </a:spcAft>
+              <a:buNone/>
+            </a:pPr>
+            <a:r>
+              <a:rPr sz="900" b="1" i="0">
+                <a:solidFill>
+                  <a:srgbClr val="5C6C7E"/>
+                </a:solidFill>
+                <a:latin typeface="Segoe UI"/>
+              </a:rPr>
+              <a:t>15</a:t>
+            </a:r>
+          </a:p>
+        </p:txBody>
+      </p:sp>
+      <p:sp>
+        <p:nvSpPr>
+          <p:cNvPr id="9" name="TextBox 8"/>
+          <p:cNvSpPr txBox="1"/>
+          <p:nvPr/>
+        </p:nvSpPr>
+        <p:spPr>
+          <a:xfrm>
+            <a:off x="822960" y="2331720"/>
+            <a:ext cx="10515600" cy="1645920"/>
+          </a:xfrm>
+          <a:prstGeom prst="rect">
+            <a:avLst/>
+          </a:prstGeom>
+          <a:noFill/>
+        </p:spPr>
+        <p:txBody>
+          <a:bodyPr wrap="square" anchor="t" lIns="0" rIns="0" tIns="0" bIns="0">
+            <a:spAutoFit/>
+          </a:bodyPr>
+          <a:lstStyle/>
+          <a:p>
+            <a:pPr algn="l">
+              <a:lnSpc>
+                <a:spcPct val="114000"/>
+              </a:lnSpc>
               <a:spcAft>
                 <a:spcPts val="700"/>
               </a:spcAft>
-              <a:defRPr sz="1600"/>
-            </a:pPr>
-            <a:r>
+              <a:buNone/>
+            </a:pPr>
+            <a:r>
+              <a:rPr sz="1500" b="1" i="0">
+                <a:solidFill>
+                  <a:srgbClr val="2F6FED"/>
+                </a:solidFill>
+                <a:latin typeface="Segoe UI"/>
+              </a:rPr>
+              <a:t>1.  </a:t>
+            </a:r>
+            <a:r>
+              <a:rPr sz="1500" b="0" i="0">
+                <a:solidFill>
+                  <a:srgbClr val="1B2A38"/>
+                </a:solidFill>
+                <a:latin typeface="Segoe UI"/>
+              </a:rPr>
               <a:t>grid-analysis: interactive map + N-1 chart + Streamlit dashboard</a:t>
             </a:r>
           </a:p>
           <a:p>
-            <a:pPr>
+            <a:pPr algn="l">
+              <a:lnSpc>
+                <a:spcPct val="114000"/>
+              </a:lnSpc>
               <a:spcAft>
                 <a:spcPts val="700"/>
               </a:spcAft>
-              <a:defRPr sz="1600"/>
-            </a:pPr>
-            <a:r>
-              <a:t>GridCare-Lite: engineer -&gt; admin -&gt; technician -&gt; resolved; then a role-access rejection</a:t>
-            </a:r>
-          </a:p>
-          <a:p>
-            <a:pPr>
+              <a:buNone/>
+            </a:pPr>
+            <a:r>
+              <a:rPr sz="1500" b="1" i="0">
+                <a:solidFill>
+                  <a:srgbClr val="2F6FED"/>
+                </a:solidFill>
+                <a:latin typeface="Segoe UI"/>
+              </a:rPr>
+              <a:t>2.  </a:t>
+            </a:r>
+            <a:r>
+              <a:rPr sz="1500" b="0" i="0">
+                <a:solidFill>
+                  <a:srgbClr val="1B2A38"/>
+                </a:solidFill>
+                <a:latin typeface="Segoe UI"/>
+              </a:rPr>
+              <a:t>GridCare-Lite: engineer → admin → technician → resolved; then a role-access rejection</a:t>
+            </a:r>
+          </a:p>
+          <a:p>
+            <a:pPr algn="l">
+              <a:lnSpc>
+                <a:spcPct val="114000"/>
+              </a:lnSpc>
               <a:spcAft>
                 <a:spcPts val="700"/>
               </a:spcAft>
-              <a:defRPr sz="1600"/>
-            </a:pPr>
-            <a:r>
-              <a:t>ClinicCare-Lite: clinician assigns task -&gt; patient submits (with a completeness flag) -&gt;</a:t>
-            </a:r>
-          </a:p>
-          <a:p>
-            <a:pPr>
+              <a:buNone/>
+            </a:pPr>
+            <a:r>
+              <a:rPr sz="1500" b="1" i="0">
+                <a:solidFill>
+                  <a:srgbClr val="2F6FED"/>
+                </a:solidFill>
+                <a:latin typeface="Segoe UI"/>
+              </a:rPr>
+              <a:t>3.  </a:t>
+            </a:r>
+            <a:r>
+              <a:rPr sz="1500" b="0" i="0">
+                <a:solidFill>
+                  <a:srgbClr val="1B2A38"/>
+                </a:solidFill>
+                <a:latin typeface="Segoe UI"/>
+              </a:rPr>
+              <a:t>ClinicCare-Lite: clinician assigns task → patient submits (with a completeness flag) →</a:t>
+            </a:r>
+          </a:p>
+          <a:p>
+            <a:pPr algn="l">
+              <a:lnSpc>
+                <a:spcPct val="114000"/>
+              </a:lnSpc>
               <a:spcAft>
                 <a:spcPts val="700"/>
               </a:spcAft>
-              <a:defRPr sz="1500" i="0">
-                <a:solidFill>
-                  <a:srgbClr val="1C2733"/>
-                </a:solidFill>
-              </a:defRPr>
-            </a:pPr>
-            <a:r>
-              <a:t>clinician reviews -&gt; patient sees outcome -&gt; private engagement view -&gt;</a:t>
-            </a:r>
-          </a:p>
-          <a:p>
-            <a:pPr>
+              <a:buNone/>
+            </a:pPr>
+            <a:r>
+              <a:rPr sz="1450" b="0" i="0">
+                <a:solidFill>
+                  <a:srgbClr val="1B2A38"/>
+                </a:solidFill>
+                <a:latin typeface="Segoe UI"/>
+              </a:rPr>
+              <a:t>clinician reviews → patient sees outcome → private engagement view →</a:t>
+            </a:r>
+          </a:p>
+          <a:p>
+            <a:pPr algn="l">
+              <a:lnSpc>
+                <a:spcPct val="114000"/>
+              </a:lnSpc>
               <a:spcAft>
                 <a:spcPts val="700"/>
               </a:spcAft>
-              <a:defRPr sz="1500" i="0">
-                <a:solidFill>
-                  <a:srgbClr val="1C2733"/>
-                </a:solidFill>
-              </a:defRPr>
-            </a:pPr>
-            <a:r>
-              <a:t>a cross-patient access attempt -&gt; 403</a:t>
+              <a:buNone/>
+            </a:pPr>
+            <a:r>
+              <a:rPr sz="1450" b="0" i="0">
+                <a:solidFill>
+                  <a:srgbClr val="1B2A38"/>
+                </a:solidFill>
+                <a:latin typeface="Segoe UI"/>
+              </a:rPr>
+              <a:t>a cross-patient access attempt → 403</a:t>
             </a:r>
           </a:p>
         </p:txBody>
@@ -5303,13 +6888,13 @@
         <p:spPr>
           <a:xfrm>
             <a:off x="0" y="0"/>
-            <a:ext cx="12191695" cy="960120"/>
+            <a:ext cx="146304" cy="6858000"/>
           </a:xfrm>
           <a:prstGeom prst="rect">
             <a:avLst/>
           </a:prstGeom>
           <a:solidFill>
-            <a:srgbClr val="F1F5FB"/>
+            <a:srgbClr val="15B8A6"/>
           </a:solidFill>
           <a:ln>
             <a:noFill/>
@@ -5340,20 +6925,106 @@
       </p:sp>
       <p:sp>
         <p:nvSpPr>
-          <p:cNvPr id="4" name="Rectangle 3"/>
+          <p:cNvPr id="4" name="TextBox 3"/>
+          <p:cNvSpPr txBox="1"/>
+          <p:nvPr/>
+        </p:nvSpPr>
+        <p:spPr>
+          <a:xfrm>
+            <a:off x="822960" y="475488"/>
+            <a:ext cx="10515600" cy="274320"/>
+          </a:xfrm>
+          <a:prstGeom prst="rect">
+            <a:avLst/>
+          </a:prstGeom>
+          <a:noFill/>
+        </p:spPr>
+        <p:txBody>
+          <a:bodyPr wrap="square" anchor="t" lIns="0" rIns="0" tIns="0" bIns="0">
+            <a:spAutoFit/>
+          </a:bodyPr>
+          <a:lstStyle/>
+          <a:p>
+            <a:pPr algn="l">
+              <a:lnSpc>
+                <a:spcPct val="112000"/>
+              </a:lnSpc>
+              <a:spcAft>
+                <a:spcPts val="600"/>
+              </a:spcAft>
+              <a:buNone/>
+            </a:pPr>
+            <a:r>
+              <a:rPr sz="1100" b="1" i="0">
+                <a:solidFill>
+                  <a:srgbClr val="15B8A6"/>
+                </a:solidFill>
+                <a:latin typeface="Segoe UI"/>
+              </a:rPr>
+              <a:t>WRAP-UP</a:t>
+            </a:r>
+          </a:p>
+        </p:txBody>
+      </p:sp>
+      <p:sp>
+        <p:nvSpPr>
+          <p:cNvPr id="5" name="TextBox 4"/>
+          <p:cNvSpPr txBox="1"/>
+          <p:nvPr/>
+        </p:nvSpPr>
+        <p:spPr>
+          <a:xfrm>
+            <a:off x="822960" y="786384"/>
+            <a:ext cx="10515600" cy="822960"/>
+          </a:xfrm>
+          <a:prstGeom prst="rect">
+            <a:avLst/>
+          </a:prstGeom>
+          <a:noFill/>
+        </p:spPr>
+        <p:txBody>
+          <a:bodyPr wrap="square" anchor="t" lIns="0" rIns="0" tIns="0" bIns="0">
+            <a:spAutoFit/>
+          </a:bodyPr>
+          <a:lstStyle/>
+          <a:p>
+            <a:pPr algn="l">
+              <a:lnSpc>
+                <a:spcPct val="100000"/>
+              </a:lnSpc>
+              <a:spcAft>
+                <a:spcPts val="600"/>
+              </a:spcAft>
+              <a:buNone/>
+            </a:pPr>
+            <a:r>
+              <a:rPr sz="2700" b="1" i="0">
+                <a:solidFill>
+                  <a:srgbClr val="0E2942"/>
+                </a:solidFill>
+                <a:latin typeface="Segoe UI Semibold"/>
+              </a:rPr>
+              <a:t>Future work</a:t>
+            </a:r>
+          </a:p>
+        </p:txBody>
+      </p:sp>
+      <p:sp>
+        <p:nvSpPr>
+          <p:cNvPr id="6" name="Rectangle 5"/>
           <p:cNvSpPr/>
           <p:nvPr/>
         </p:nvSpPr>
         <p:spPr>
           <a:xfrm>
-            <a:off x="0" y="960120"/>
-            <a:ext cx="12191695" cy="45720"/>
+            <a:off x="822960" y="1463040"/>
+            <a:ext cx="1234440" cy="54864"/>
           </a:xfrm>
           <a:prstGeom prst="rect">
             <a:avLst/>
           </a:prstGeom>
           <a:solidFill>
-            <a:srgbClr val="2563EB"/>
+            <a:srgbClr val="F59E0B"/>
           </a:solidFill>
           <a:ln>
             <a:noFill/>
@@ -5384,14 +7055,14 @@
       </p:sp>
       <p:sp>
         <p:nvSpPr>
-          <p:cNvPr id="5" name="TextBox 4"/>
+          <p:cNvPr id="7" name="TextBox 6"/>
           <p:cNvSpPr txBox="1"/>
           <p:nvPr/>
         </p:nvSpPr>
         <p:spPr>
           <a:xfrm>
-            <a:off x="640080" y="164592"/>
-            <a:ext cx="10972800" cy="685800"/>
+            <a:off x="822960" y="6382512"/>
+            <a:ext cx="7315200" cy="274320"/>
           </a:xfrm>
           <a:prstGeom prst="rect">
             <a:avLst/>
@@ -5399,34 +7070,42 @@
           <a:noFill/>
         </p:spPr>
         <p:txBody>
-          <a:bodyPr wrap="none">
+          <a:bodyPr wrap="square" anchor="t" lIns="0" rIns="0" tIns="0" bIns="0">
             <a:spAutoFit/>
           </a:bodyPr>
           <a:lstStyle/>
           <a:p>
-            <a:pPr>
-              <a:defRPr sz="2600" b="1">
-                <a:solidFill>
-                  <a:srgbClr val="1C2733"/>
-                </a:solidFill>
-              </a:defRPr>
-            </a:pPr>
-            <a:r>
-              <a:t>Future work</a:t>
-            </a:r>
-          </a:p>
-        </p:txBody>
-      </p:sp>
-      <p:sp>
-        <p:nvSpPr>
-          <p:cNvPr id="6" name="TextBox 5"/>
+            <a:pPr algn="l">
+              <a:lnSpc>
+                <a:spcPct val="112000"/>
+              </a:lnSpc>
+              <a:spcAft>
+                <a:spcPts val="600"/>
+              </a:spcAft>
+              <a:buNone/>
+            </a:pPr>
+            <a:r>
+              <a:rPr sz="900" b="0" i="0">
+                <a:solidFill>
+                  <a:srgbClr val="5C6C7E"/>
+                </a:solidFill>
+                <a:latin typeface="Segoe UI"/>
+              </a:rPr>
+              <a:t>CS 112  ·  Cohort A — Team 3</a:t>
+            </a:r>
+          </a:p>
+        </p:txBody>
+      </p:sp>
+      <p:sp>
+        <p:nvSpPr>
+          <p:cNvPr id="8" name="TextBox 7"/>
           <p:cNvSpPr txBox="1"/>
           <p:nvPr/>
         </p:nvSpPr>
         <p:spPr>
           <a:xfrm>
-            <a:off x="640080" y="1280160"/>
-            <a:ext cx="10972800" cy="5120640"/>
+            <a:off x="10820095" y="6382512"/>
+            <a:ext cx="822960" cy="274320"/>
           </a:xfrm>
           <a:prstGeom prst="rect">
             <a:avLst/>
@@ -5434,41 +7113,138 @@
           <a:noFill/>
         </p:spPr>
         <p:txBody>
-          <a:bodyPr wrap="square" anchor="t">
+          <a:bodyPr wrap="square" anchor="t" lIns="0" rIns="0" tIns="0" bIns="0">
             <a:spAutoFit/>
           </a:bodyPr>
           <a:lstStyle/>
           <a:p>
-            <a:pPr>
+            <a:pPr algn="r">
+              <a:lnSpc>
+                <a:spcPct val="112000"/>
+              </a:lnSpc>
+              <a:spcAft>
+                <a:spcPts val="600"/>
+              </a:spcAft>
+              <a:buNone/>
+            </a:pPr>
+            <a:r>
+              <a:rPr sz="900" b="1" i="0">
+                <a:solidFill>
+                  <a:srgbClr val="5C6C7E"/>
+                </a:solidFill>
+                <a:latin typeface="Segoe UI"/>
+              </a:rPr>
+              <a:t>16</a:t>
+            </a:r>
+          </a:p>
+        </p:txBody>
+      </p:sp>
+      <p:sp>
+        <p:nvSpPr>
+          <p:cNvPr id="9" name="TextBox 8"/>
+          <p:cNvSpPr txBox="1"/>
+          <p:nvPr/>
+        </p:nvSpPr>
+        <p:spPr>
+          <a:xfrm>
+            <a:off x="822960" y="2331720"/>
+            <a:ext cx="10515600" cy="1335024"/>
+          </a:xfrm>
+          <a:prstGeom prst="rect">
+            <a:avLst/>
+          </a:prstGeom>
+          <a:noFill/>
+        </p:spPr>
+        <p:txBody>
+          <a:bodyPr wrap="square" anchor="t" lIns="0" rIns="0" tIns="0" bIns="0">
+            <a:spAutoFit/>
+          </a:bodyPr>
+          <a:lstStyle/>
+          <a:p>
+            <a:pPr algn="l">
+              <a:lnSpc>
+                <a:spcPct val="114000"/>
+              </a:lnSpc>
               <a:spcAft>
                 <a:spcPts val="700"/>
               </a:spcAft>
-              <a:defRPr sz="1700"/>
-            </a:pPr>
-            <a:r>
-              <a:t>- grid-analysis: real load/outage time-series; capacity-weighted contingency; animated grid growth</a:t>
-            </a:r>
-          </a:p>
-          <a:p>
-            <a:pPr>
+              <a:buNone/>
+            </a:pPr>
+            <a:r>
+              <a:rPr sz="1500" b="1" i="0">
+                <a:solidFill>
+                  <a:srgbClr val="15B8A6"/>
+                </a:solidFill>
+                <a:latin typeface="Segoe UI"/>
+              </a:rPr>
+              <a:t>▸  </a:t>
+            </a:r>
+            <a:r>
+              <a:rPr sz="1500" b="0" i="0">
+                <a:solidFill>
+                  <a:srgbClr val="1B2A38"/>
+                </a:solidFill>
+                <a:latin typeface="Segoe UI"/>
+              </a:rPr>
+              <a:t>grid-analysis: real load/outage time-series; capacity-weighted contingency; animated grid growth</a:t>
+            </a:r>
+          </a:p>
+          <a:p>
+            <a:pPr algn="l">
+              <a:lnSpc>
+                <a:spcPct val="114000"/>
+              </a:lnSpc>
               <a:spcAft>
                 <a:spcPts val="700"/>
               </a:spcAft>
-              <a:defRPr sz="1700"/>
-            </a:pPr>
-            <a:r>
-              <a:t>- GridCare-Lite: multi-user server backend, SLA timers, crew scheduling</a:t>
-            </a:r>
-          </a:p>
-          <a:p>
-            <a:pPr>
+              <a:buNone/>
+            </a:pPr>
+            <a:r>
+              <a:rPr sz="1500" b="1" i="0">
+                <a:solidFill>
+                  <a:srgbClr val="15B8A6"/>
+                </a:solidFill>
+                <a:latin typeface="Segoe UI"/>
+              </a:rPr>
+              <a:t>▸  </a:t>
+            </a:r>
+            <a:r>
+              <a:rPr sz="1500" b="0" i="0">
+                <a:solidFill>
+                  <a:srgbClr val="1B2A38"/>
+                </a:solidFill>
+                <a:latin typeface="Segoe UI"/>
+              </a:rPr>
+              <a:t>GridCare-Lite: multi-user server backend, SLA timers, crew scheduling</a:t>
+            </a:r>
+          </a:p>
+          <a:p>
+            <a:pPr algn="l">
+              <a:lnSpc>
+                <a:spcPct val="114000"/>
+              </a:lnSpc>
               <a:spcAft>
                 <a:spcPts val="700"/>
               </a:spcAft>
-              <a:defRPr sz="1700"/>
-            </a:pPr>
-            <a:r>
-              <a:t>- ClinicCare-Lite: patient self-scheduling, WebSocket messaging, real database, deployment hardening (CSRF, rate limiting)</a:t>
+              <a:buNone/>
+            </a:pPr>
+            <a:r>
+              <a:rPr sz="1500" b="1" i="0">
+                <a:solidFill>
+                  <a:srgbClr val="15B8A6"/>
+                </a:solidFill>
+                <a:latin typeface="Segoe UI"/>
+              </a:rPr>
+              <a:t>▸  </a:t>
+            </a:r>
+            <a:r>
+              <a:rPr sz="1500" b="0" i="0">
+                <a:solidFill>
+                  <a:srgbClr val="1B2A38"/>
+                </a:solidFill>
+                <a:latin typeface="Segoe UI"/>
+              </a:rPr>
+              <a:t>ClinicCare-Lite: patient self-scheduling, WebSocket messaging, real database, deployment hardening (CSRF, rate limiting)</a:t>
             </a:r>
           </a:p>
         </p:txBody>
@@ -5506,7 +7282,7 @@
             <a:avLst/>
           </a:prstGeom>
           <a:solidFill>
-            <a:srgbClr val="FFFFFF"/>
+            <a:srgbClr val="0E2942"/>
           </a:solidFill>
           <a:ln>
             <a:noFill/>
@@ -5544,13 +7320,13 @@
         <p:spPr>
           <a:xfrm>
             <a:off x="0" y="0"/>
-            <a:ext cx="12191695" cy="960120"/>
+            <a:ext cx="12191695" cy="164592"/>
           </a:xfrm>
           <a:prstGeom prst="rect">
             <a:avLst/>
           </a:prstGeom>
           <a:solidFill>
-            <a:srgbClr val="F1F5FB"/>
+            <a:srgbClr val="15B8A6"/>
           </a:solidFill>
           <a:ln>
             <a:noFill/>
@@ -5581,20 +7357,63 @@
       </p:sp>
       <p:sp>
         <p:nvSpPr>
-          <p:cNvPr id="4" name="Rectangle 3"/>
+          <p:cNvPr id="4" name="TextBox 3"/>
+          <p:cNvSpPr txBox="1"/>
+          <p:nvPr/>
+        </p:nvSpPr>
+        <p:spPr>
+          <a:xfrm>
+            <a:off x="822960" y="2468880"/>
+            <a:ext cx="10515600" cy="1097280"/>
+          </a:xfrm>
+          <a:prstGeom prst="rect">
+            <a:avLst/>
+          </a:prstGeom>
+          <a:noFill/>
+        </p:spPr>
+        <p:txBody>
+          <a:bodyPr wrap="square" anchor="t" lIns="0" rIns="0" tIns="0" bIns="0">
+            <a:spAutoFit/>
+          </a:bodyPr>
+          <a:lstStyle/>
+          <a:p>
+            <a:pPr algn="l">
+              <a:lnSpc>
+                <a:spcPct val="112000"/>
+              </a:lnSpc>
+              <a:spcAft>
+                <a:spcPts val="600"/>
+              </a:spcAft>
+              <a:buNone/>
+            </a:pPr>
+            <a:r>
+              <a:rPr sz="4600" b="1" i="0">
+                <a:solidFill>
+                  <a:srgbClr val="FFFFFF"/>
+                </a:solidFill>
+                <a:latin typeface="Segoe UI Semibold"/>
+              </a:rPr>
+              <a:t>Thank you</a:t>
+            </a:r>
+          </a:p>
+        </p:txBody>
+      </p:sp>
+      <p:sp>
+        <p:nvSpPr>
+          <p:cNvPr id="5" name="Rectangle 4"/>
           <p:cNvSpPr/>
           <p:nvPr/>
         </p:nvSpPr>
         <p:spPr>
           <a:xfrm>
-            <a:off x="0" y="960120"/>
-            <a:ext cx="12191695" cy="45720"/>
+            <a:off x="822960" y="3611880"/>
+            <a:ext cx="2194560" cy="82296"/>
           </a:xfrm>
           <a:prstGeom prst="rect">
             <a:avLst/>
           </a:prstGeom>
           <a:solidFill>
-            <a:srgbClr val="2563EB"/>
+            <a:srgbClr val="15B8A6"/>
           </a:solidFill>
           <a:ln>
             <a:noFill/>
@@ -5625,14 +7444,14 @@
       </p:sp>
       <p:sp>
         <p:nvSpPr>
-          <p:cNvPr id="5" name="TextBox 4"/>
+          <p:cNvPr id="6" name="TextBox 5"/>
           <p:cNvSpPr txBox="1"/>
           <p:nvPr/>
         </p:nvSpPr>
         <p:spPr>
           <a:xfrm>
-            <a:off x="640080" y="164592"/>
-            <a:ext cx="10972800" cy="685800"/>
+            <a:off x="822960" y="3977639"/>
+            <a:ext cx="10515600" cy="1828800"/>
           </a:xfrm>
           <a:prstGeom prst="rect">
             <a:avLst/>
@@ -5640,87 +7459,67 @@
           <a:noFill/>
         </p:spPr>
         <p:txBody>
-          <a:bodyPr wrap="none">
+          <a:bodyPr wrap="square" anchor="t" lIns="0" rIns="0" tIns="0" bIns="0">
             <a:spAutoFit/>
           </a:bodyPr>
           <a:lstStyle/>
           <a:p>
-            <a:pPr>
-              <a:defRPr sz="2600" b="1">
-                <a:solidFill>
-                  <a:srgbClr val="1C2733"/>
-                </a:solidFill>
-              </a:defRPr>
-            </a:pPr>
-            <a:r>
-              <a:t>Thank you</a:t>
-            </a:r>
-          </a:p>
-        </p:txBody>
-      </p:sp>
-      <p:sp>
-        <p:nvSpPr>
-          <p:cNvPr id="6" name="TextBox 5"/>
-          <p:cNvSpPr txBox="1"/>
-          <p:nvPr/>
-        </p:nvSpPr>
-        <p:spPr>
-          <a:xfrm>
-            <a:off x="640080" y="1280160"/>
-            <a:ext cx="10972800" cy="5120640"/>
-          </a:xfrm>
-          <a:prstGeom prst="rect">
-            <a:avLst/>
-          </a:prstGeom>
-          <a:noFill/>
-        </p:spPr>
-        <p:txBody>
-          <a:bodyPr wrap="square" anchor="t">
-            <a:spAutoFit/>
-          </a:bodyPr>
-          <a:lstStyle/>
-          <a:p>
-            <a:pPr>
-              <a:spcAft>
-                <a:spcPts val="700"/>
-              </a:spcAft>
-              <a:defRPr sz="1500" i="0">
-                <a:solidFill>
-                  <a:srgbClr val="0D9488"/>
-                </a:solidFill>
-              </a:defRPr>
-            </a:pPr>
-            <a:r>
+            <a:pPr algn="l">
+              <a:lnSpc>
+                <a:spcPct val="135000"/>
+              </a:lnSpc>
+              <a:spcAft>
+                <a:spcPts val="600"/>
+              </a:spcAft>
+              <a:buNone/>
+            </a:pPr>
+            <a:r>
+              <a:rPr sz="1700" b="0" i="0">
+                <a:solidFill>
+                  <a:srgbClr val="B9CADA"/>
+                </a:solidFill>
+                <a:latin typeface="Segoe UI"/>
+              </a:rPr>
               <a:t>Cohort A · Team 3</a:t>
             </a:r>
           </a:p>
           <a:p>
-            <a:pPr>
-              <a:spcAft>
-                <a:spcPts val="700"/>
-              </a:spcAft>
-              <a:defRPr sz="1500" i="0">
-                <a:solidFill>
-                  <a:srgbClr val="1C2733"/>
-                </a:solidFill>
-              </a:defRPr>
-            </a:pPr>
-            <a:r>
+            <a:pPr algn="l">
+              <a:lnSpc>
+                <a:spcPct val="135000"/>
+              </a:lnSpc>
+              <a:spcAft>
+                <a:spcPts val="600"/>
+              </a:spcAft>
+              <a:buNone/>
+            </a:pPr>
+            <a:r>
+              <a:rPr sz="1700" b="0" i="0">
+                <a:solidFill>
+                  <a:srgbClr val="B9CADA"/>
+                </a:solidFill>
+                <a:latin typeface="Segoe UI"/>
+              </a:rPr>
               <a:t>Questions?</a:t>
             </a:r>
           </a:p>
           <a:p>
-            <a:pPr>
-              <a:spcAft>
-                <a:spcPts val="700"/>
-              </a:spcAft>
-              <a:defRPr sz="1500" i="0">
-                <a:solidFill>
-                  <a:srgbClr val="1C2733"/>
-                </a:solidFill>
-              </a:defRPr>
-            </a:pPr>
-            <a:r>
+            <a:pPr algn="l">
+              <a:lnSpc>
+                <a:spcPct val="135000"/>
+              </a:lnSpc>
+              <a:spcAft>
+                <a:spcPts val="600"/>
+              </a:spcAft>
+              <a:buNone/>
+            </a:pPr>
+            <a:r>
+              <a:rPr sz="1700" b="0" i="0">
+                <a:solidFill>
+                  <a:srgbClr val="15B8A6"/>
+                </a:solidFill>
+                <a:latin typeface="Segoe UI"/>
+              </a:rPr>
               <a:t>github.com/Nana-Kojo801/cs-final-project</a:t>
             </a:r>
           </a:p>
@@ -5797,13 +7596,13 @@
         <p:spPr>
           <a:xfrm>
             <a:off x="0" y="0"/>
-            <a:ext cx="12191695" cy="960120"/>
+            <a:ext cx="146304" cy="6858000"/>
           </a:xfrm>
           <a:prstGeom prst="rect">
             <a:avLst/>
           </a:prstGeom>
           <a:solidFill>
-            <a:srgbClr val="F1F5FB"/>
+            <a:srgbClr val="15B8A6"/>
           </a:solidFill>
           <a:ln>
             <a:noFill/>
@@ -5834,20 +7633,106 @@
       </p:sp>
       <p:sp>
         <p:nvSpPr>
-          <p:cNvPr id="4" name="Rectangle 3"/>
+          <p:cNvPr id="4" name="TextBox 3"/>
+          <p:cNvSpPr txBox="1"/>
+          <p:nvPr/>
+        </p:nvSpPr>
+        <p:spPr>
+          <a:xfrm>
+            <a:off x="822960" y="475488"/>
+            <a:ext cx="10515600" cy="274320"/>
+          </a:xfrm>
+          <a:prstGeom prst="rect">
+            <a:avLst/>
+          </a:prstGeom>
+          <a:noFill/>
+        </p:spPr>
+        <p:txBody>
+          <a:bodyPr wrap="square" anchor="t" lIns="0" rIns="0" tIns="0" bIns="0">
+            <a:spAutoFit/>
+          </a:bodyPr>
+          <a:lstStyle/>
+          <a:p>
+            <a:pPr algn="l">
+              <a:lnSpc>
+                <a:spcPct val="112000"/>
+              </a:lnSpc>
+              <a:spcAft>
+                <a:spcPts val="600"/>
+              </a:spcAft>
+              <a:buNone/>
+            </a:pPr>
+            <a:r>
+              <a:rPr sz="1100" b="1" i="0">
+                <a:solidFill>
+                  <a:srgbClr val="15B8A6"/>
+                </a:solidFill>
+                <a:latin typeface="Segoe UI"/>
+              </a:rPr>
+              <a:t>OVERVIEW</a:t>
+            </a:r>
+          </a:p>
+        </p:txBody>
+      </p:sp>
+      <p:sp>
+        <p:nvSpPr>
+          <p:cNvPr id="5" name="TextBox 4"/>
+          <p:cNvSpPr txBox="1"/>
+          <p:nvPr/>
+        </p:nvSpPr>
+        <p:spPr>
+          <a:xfrm>
+            <a:off x="822960" y="786384"/>
+            <a:ext cx="10515600" cy="822960"/>
+          </a:xfrm>
+          <a:prstGeom prst="rect">
+            <a:avLst/>
+          </a:prstGeom>
+          <a:noFill/>
+        </p:spPr>
+        <p:txBody>
+          <a:bodyPr wrap="square" anchor="t" lIns="0" rIns="0" tIns="0" bIns="0">
+            <a:spAutoFit/>
+          </a:bodyPr>
+          <a:lstStyle/>
+          <a:p>
+            <a:pPr algn="l">
+              <a:lnSpc>
+                <a:spcPct val="100000"/>
+              </a:lnSpc>
+              <a:spcAft>
+                <a:spcPts val="600"/>
+              </a:spcAft>
+              <a:buNone/>
+            </a:pPr>
+            <a:r>
+              <a:rPr sz="2700" b="1" i="0">
+                <a:solidFill>
+                  <a:srgbClr val="0E2942"/>
+                </a:solidFill>
+                <a:latin typeface="Segoe UI Semibold"/>
+              </a:rPr>
+              <a:t>The problem</a:t>
+            </a:r>
+          </a:p>
+        </p:txBody>
+      </p:sp>
+      <p:sp>
+        <p:nvSpPr>
+          <p:cNvPr id="6" name="Rectangle 5"/>
           <p:cNvSpPr/>
           <p:nvPr/>
         </p:nvSpPr>
         <p:spPr>
           <a:xfrm>
-            <a:off x="0" y="960120"/>
-            <a:ext cx="12191695" cy="45720"/>
+            <a:off x="822960" y="1463040"/>
+            <a:ext cx="1234440" cy="54864"/>
           </a:xfrm>
           <a:prstGeom prst="rect">
             <a:avLst/>
           </a:prstGeom>
           <a:solidFill>
-            <a:srgbClr val="2563EB"/>
+            <a:srgbClr val="F59E0B"/>
           </a:solidFill>
           <a:ln>
             <a:noFill/>
@@ -5878,14 +7763,14 @@
       </p:sp>
       <p:sp>
         <p:nvSpPr>
-          <p:cNvPr id="5" name="TextBox 4"/>
+          <p:cNvPr id="7" name="TextBox 6"/>
           <p:cNvSpPr txBox="1"/>
           <p:nvPr/>
         </p:nvSpPr>
         <p:spPr>
           <a:xfrm>
-            <a:off x="640080" y="164592"/>
-            <a:ext cx="10972800" cy="685800"/>
+            <a:off x="822960" y="6382512"/>
+            <a:ext cx="7315200" cy="274320"/>
           </a:xfrm>
           <a:prstGeom prst="rect">
             <a:avLst/>
@@ -5893,34 +7778,42 @@
           <a:noFill/>
         </p:spPr>
         <p:txBody>
-          <a:bodyPr wrap="none">
+          <a:bodyPr wrap="square" anchor="t" lIns="0" rIns="0" tIns="0" bIns="0">
             <a:spAutoFit/>
           </a:bodyPr>
           <a:lstStyle/>
           <a:p>
-            <a:pPr>
-              <a:defRPr sz="2600" b="1">
-                <a:solidFill>
-                  <a:srgbClr val="1C2733"/>
-                </a:solidFill>
-              </a:defRPr>
-            </a:pPr>
-            <a:r>
-              <a:t>The problem</a:t>
-            </a:r>
-          </a:p>
-        </p:txBody>
-      </p:sp>
-      <p:sp>
-        <p:nvSpPr>
-          <p:cNvPr id="6" name="TextBox 5"/>
+            <a:pPr algn="l">
+              <a:lnSpc>
+                <a:spcPct val="112000"/>
+              </a:lnSpc>
+              <a:spcAft>
+                <a:spcPts val="600"/>
+              </a:spcAft>
+              <a:buNone/>
+            </a:pPr>
+            <a:r>
+              <a:rPr sz="900" b="0" i="0">
+                <a:solidFill>
+                  <a:srgbClr val="5C6C7E"/>
+                </a:solidFill>
+                <a:latin typeface="Segoe UI"/>
+              </a:rPr>
+              <a:t>CS 112  ·  Cohort A — Team 3</a:t>
+            </a:r>
+          </a:p>
+        </p:txBody>
+      </p:sp>
+      <p:sp>
+        <p:nvSpPr>
+          <p:cNvPr id="8" name="TextBox 7"/>
           <p:cNvSpPr txBox="1"/>
           <p:nvPr/>
         </p:nvSpPr>
         <p:spPr>
           <a:xfrm>
-            <a:off x="640080" y="1280160"/>
-            <a:ext cx="10972800" cy="5120640"/>
+            <a:off x="10820095" y="6382512"/>
+            <a:ext cx="822960" cy="274320"/>
           </a:xfrm>
           <a:prstGeom prst="rect">
             <a:avLst/>
@@ -5928,63 +7821,196 @@
           <a:noFill/>
         </p:spPr>
         <p:txBody>
-          <a:bodyPr wrap="square" anchor="t">
+          <a:bodyPr wrap="square" anchor="t" lIns="0" rIns="0" tIns="0" bIns="0">
             <a:spAutoFit/>
           </a:bodyPr>
           <a:lstStyle/>
           <a:p>
-            <a:pPr>
+            <a:pPr algn="r">
+              <a:lnSpc>
+                <a:spcPct val="112000"/>
+              </a:lnSpc>
+              <a:spcAft>
+                <a:spcPts val="600"/>
+              </a:spcAft>
+              <a:buNone/>
+            </a:pPr>
+            <a:r>
+              <a:rPr sz="900" b="1" i="0">
+                <a:solidFill>
+                  <a:srgbClr val="5C6C7E"/>
+                </a:solidFill>
+                <a:latin typeface="Segoe UI"/>
+              </a:rPr>
+              <a:t>2</a:t>
+            </a:r>
+          </a:p>
+        </p:txBody>
+      </p:sp>
+      <p:sp>
+        <p:nvSpPr>
+          <p:cNvPr id="9" name="TextBox 8"/>
+          <p:cNvSpPr txBox="1"/>
+          <p:nvPr/>
+        </p:nvSpPr>
+        <p:spPr>
+          <a:xfrm>
+            <a:off x="822960" y="2331720"/>
+            <a:ext cx="10515600" cy="1645920"/>
+          </a:xfrm>
+          <a:prstGeom prst="rect">
+            <a:avLst/>
+          </a:prstGeom>
+          <a:noFill/>
+        </p:spPr>
+        <p:txBody>
+          <a:bodyPr wrap="square" anchor="t" lIns="0" rIns="0" tIns="0" bIns="0">
+            <a:spAutoFit/>
+          </a:bodyPr>
+          <a:lstStyle/>
+          <a:p>
+            <a:pPr algn="l">
+              <a:lnSpc>
+                <a:spcPct val="114000"/>
+              </a:lnSpc>
               <a:spcAft>
                 <a:spcPts val="700"/>
               </a:spcAft>
-              <a:defRPr sz="1700"/>
-            </a:pPr>
-            <a:r>
-              <a:t>- No clean public dataset of substation-level grid topology for Ghana</a:t>
-            </a:r>
-          </a:p>
-          <a:p>
-            <a:pPr>
+              <a:buNone/>
+            </a:pPr>
+            <a:r>
+              <a:rPr sz="1500" b="1" i="0">
+                <a:solidFill>
+                  <a:srgbClr val="15B8A6"/>
+                </a:solidFill>
+                <a:latin typeface="Segoe UI"/>
+              </a:rPr>
+              <a:t>▸  </a:t>
+            </a:r>
+            <a:r>
+              <a:rPr sz="1500" b="0" i="0">
+                <a:solidFill>
+                  <a:srgbClr val="1B2A38"/>
+                </a:solidFill>
+                <a:latin typeface="Segoe UI"/>
+              </a:rPr>
+              <a:t>No clean public dataset of substation-level grid topology for Ghana</a:t>
+            </a:r>
+          </a:p>
+          <a:p>
+            <a:pPr algn="l">
+              <a:lnSpc>
+                <a:spcPct val="114000"/>
+              </a:lnSpc>
               <a:spcAft>
                 <a:spcPts val="700"/>
               </a:spcAft>
-              <a:defRPr sz="1700"/>
-            </a:pPr>
-            <a:r>
-              <a:t>- Real patient data can't be used in coursework</a:t>
-            </a:r>
-          </a:p>
-          <a:p>
-            <a:pPr>
+              <a:buNone/>
+            </a:pPr>
+            <a:r>
+              <a:rPr sz="1500" b="1" i="0">
+                <a:solidFill>
+                  <a:srgbClr val="15B8A6"/>
+                </a:solidFill>
+                <a:latin typeface="Segoe UI"/>
+              </a:rPr>
+              <a:t>▸  </a:t>
+            </a:r>
+            <a:r>
+              <a:rPr sz="1500" b="0" i="0">
+                <a:solidFill>
+                  <a:srgbClr val="1B2A38"/>
+                </a:solidFill>
+                <a:latin typeface="Segoe UI"/>
+              </a:rPr>
+              <a:t>Real patient data can't be used in coursework</a:t>
+            </a:r>
+          </a:p>
+          <a:p>
+            <a:pPr algn="l">
+              <a:lnSpc>
+                <a:spcPct val="114000"/>
+              </a:lnSpc>
               <a:spcAft>
                 <a:spcPts val="700"/>
               </a:spcAft>
-              <a:defRPr sz="1700"/>
-            </a:pPr>
-            <a:r>
-              <a:t>- Solution: a seeded synthetic dataset (random.seed(42)) + fictional demo accounts</a:t>
-            </a:r>
-          </a:p>
-          <a:p>
-            <a:pPr lvl="1">
+              <a:buNone/>
+            </a:pPr>
+            <a:r>
+              <a:rPr sz="1500" b="1" i="0">
+                <a:solidFill>
+                  <a:srgbClr val="15B8A6"/>
+                </a:solidFill>
+                <a:latin typeface="Segoe UI"/>
+              </a:rPr>
+              <a:t>▸  </a:t>
+            </a:r>
+            <a:r>
+              <a:rPr sz="1500" b="0" i="0">
+                <a:solidFill>
+                  <a:srgbClr val="1B2A38"/>
+                </a:solidFill>
+                <a:latin typeface="Segoe UI"/>
+              </a:rPr>
+              <a:t>Solution: a seeded synthetic dataset (random.seed(42)) + fictional demo accounts</a:t>
+            </a:r>
+          </a:p>
+          <a:p>
+            <a:pPr algn="l" lvl="1">
+              <a:lnSpc>
+                <a:spcPct val="114000"/>
+              </a:lnSpc>
               <a:spcAft>
                 <a:spcPts val="700"/>
               </a:spcAft>
-              <a:defRPr sz="1400"/>
-            </a:pPr>
-            <a:r>
-              <a:t>  - Every result reproducible, nothing confidential exposed</a:t>
-            </a:r>
-          </a:p>
-          <a:p>
-            <a:pPr lvl="1">
+              <a:buNone/>
+            </a:pPr>
+            <a:r>
+              <a:rPr sz="1300" b="1" i="0">
+                <a:solidFill>
+                  <a:srgbClr val="B9CADA"/>
+                </a:solidFill>
+                <a:latin typeface="Segoe UI"/>
+              </a:rPr>
+              <a:t>–  </a:t>
+            </a:r>
+            <a:r>
+              <a:rPr sz="1300" b="0" i="0">
+                <a:solidFill>
+                  <a:srgbClr val="5C6C7E"/>
+                </a:solidFill>
+                <a:latin typeface="Segoe UI"/>
+              </a:rPr>
+              <a:t>Every result reproducible, nothing confidential exposed</a:t>
+            </a:r>
+          </a:p>
+          <a:p>
+            <a:pPr algn="l" lvl="1">
+              <a:lnSpc>
+                <a:spcPct val="114000"/>
+              </a:lnSpc>
               <a:spcAft>
                 <a:spcPts val="700"/>
               </a:spcAft>
-              <a:defRPr sz="1400"/>
-            </a:pPr>
-            <a:r>
-              <a:t>  - Still exercises the full lifecycle: data -&gt; analysis -&gt; design -&gt; build -&gt; test -&gt; document</a:t>
+              <a:buNone/>
+            </a:pPr>
+            <a:r>
+              <a:rPr sz="1300" b="1" i="0">
+                <a:solidFill>
+                  <a:srgbClr val="B9CADA"/>
+                </a:solidFill>
+                <a:latin typeface="Segoe UI"/>
+              </a:rPr>
+              <a:t>–  </a:t>
+            </a:r>
+            <a:r>
+              <a:rPr sz="1300" b="0" i="0">
+                <a:solidFill>
+                  <a:srgbClr val="5C6C7E"/>
+                </a:solidFill>
+                <a:latin typeface="Segoe UI"/>
+              </a:rPr>
+              <a:t>Still exercises the full lifecycle: data → analysis → design → build → test → document</a:t>
             </a:r>
           </a:p>
         </p:txBody>
@@ -6060,13 +8086,13 @@
         <p:spPr>
           <a:xfrm>
             <a:off x="0" y="0"/>
-            <a:ext cx="12191695" cy="960120"/>
+            <a:ext cx="146304" cy="6858000"/>
           </a:xfrm>
           <a:prstGeom prst="rect">
             <a:avLst/>
           </a:prstGeom>
           <a:solidFill>
-            <a:srgbClr val="F1F5FB"/>
+            <a:srgbClr val="15B8A6"/>
           </a:solidFill>
           <a:ln>
             <a:noFill/>
@@ -6097,20 +8123,106 @@
       </p:sp>
       <p:sp>
         <p:nvSpPr>
-          <p:cNvPr id="4" name="Rectangle 3"/>
+          <p:cNvPr id="4" name="TextBox 3"/>
+          <p:cNvSpPr txBox="1"/>
+          <p:nvPr/>
+        </p:nvSpPr>
+        <p:spPr>
+          <a:xfrm>
+            <a:off x="822960" y="475488"/>
+            <a:ext cx="10515600" cy="274320"/>
+          </a:xfrm>
+          <a:prstGeom prst="rect">
+            <a:avLst/>
+          </a:prstGeom>
+          <a:noFill/>
+        </p:spPr>
+        <p:txBody>
+          <a:bodyPr wrap="square" anchor="t" lIns="0" rIns="0" tIns="0" bIns="0">
+            <a:spAutoFit/>
+          </a:bodyPr>
+          <a:lstStyle/>
+          <a:p>
+            <a:pPr algn="l">
+              <a:lnSpc>
+                <a:spcPct val="112000"/>
+              </a:lnSpc>
+              <a:spcAft>
+                <a:spcPts val="600"/>
+              </a:spcAft>
+              <a:buNone/>
+            </a:pPr>
+            <a:r>
+              <a:rPr sz="1100" b="1" i="0">
+                <a:solidFill>
+                  <a:srgbClr val="15B8A6"/>
+                </a:solidFill>
+                <a:latin typeface="Segoe UI"/>
+              </a:rPr>
+              <a:t>OVERVIEW</a:t>
+            </a:r>
+          </a:p>
+        </p:txBody>
+      </p:sp>
+      <p:sp>
+        <p:nvSpPr>
+          <p:cNvPr id="5" name="TextBox 4"/>
+          <p:cNvSpPr txBox="1"/>
+          <p:nvPr/>
+        </p:nvSpPr>
+        <p:spPr>
+          <a:xfrm>
+            <a:off x="822960" y="786384"/>
+            <a:ext cx="10515600" cy="822960"/>
+          </a:xfrm>
+          <a:prstGeom prst="rect">
+            <a:avLst/>
+          </a:prstGeom>
+          <a:noFill/>
+        </p:spPr>
+        <p:txBody>
+          <a:bodyPr wrap="square" anchor="t" lIns="0" rIns="0" tIns="0" bIns="0">
+            <a:spAutoFit/>
+          </a:bodyPr>
+          <a:lstStyle/>
+          <a:p>
+            <a:pPr algn="l">
+              <a:lnSpc>
+                <a:spcPct val="100000"/>
+              </a:lnSpc>
+              <a:spcAft>
+                <a:spcPts val="600"/>
+              </a:spcAft>
+              <a:buNone/>
+            </a:pPr>
+            <a:r>
+              <a:rPr sz="2700" b="1" i="0">
+                <a:solidFill>
+                  <a:srgbClr val="0E2942"/>
+                </a:solidFill>
+                <a:latin typeface="Segoe UI Semibold"/>
+              </a:rPr>
+              <a:t>Three components</a:t>
+            </a:r>
+          </a:p>
+        </p:txBody>
+      </p:sp>
+      <p:sp>
+        <p:nvSpPr>
+          <p:cNvPr id="6" name="Rectangle 5"/>
           <p:cNvSpPr/>
           <p:nvPr/>
         </p:nvSpPr>
         <p:spPr>
           <a:xfrm>
-            <a:off x="0" y="960120"/>
-            <a:ext cx="12191695" cy="45720"/>
+            <a:off x="822960" y="1463040"/>
+            <a:ext cx="1234440" cy="54864"/>
           </a:xfrm>
           <a:prstGeom prst="rect">
             <a:avLst/>
           </a:prstGeom>
           <a:solidFill>
-            <a:srgbClr val="2563EB"/>
+            <a:srgbClr val="F59E0B"/>
           </a:solidFill>
           <a:ln>
             <a:noFill/>
@@ -6141,14 +8253,14 @@
       </p:sp>
       <p:sp>
         <p:nvSpPr>
-          <p:cNvPr id="5" name="TextBox 4"/>
+          <p:cNvPr id="7" name="TextBox 6"/>
           <p:cNvSpPr txBox="1"/>
           <p:nvPr/>
         </p:nvSpPr>
         <p:spPr>
           <a:xfrm>
-            <a:off x="640080" y="164592"/>
-            <a:ext cx="10972800" cy="685800"/>
+            <a:off x="822960" y="6382512"/>
+            <a:ext cx="7315200" cy="274320"/>
           </a:xfrm>
           <a:prstGeom prst="rect">
             <a:avLst/>
@@ -6156,34 +8268,42 @@
           <a:noFill/>
         </p:spPr>
         <p:txBody>
-          <a:bodyPr wrap="none">
+          <a:bodyPr wrap="square" anchor="t" lIns="0" rIns="0" tIns="0" bIns="0">
             <a:spAutoFit/>
           </a:bodyPr>
           <a:lstStyle/>
           <a:p>
-            <a:pPr>
-              <a:defRPr sz="2600" b="1">
-                <a:solidFill>
-                  <a:srgbClr val="1C2733"/>
-                </a:solidFill>
-              </a:defRPr>
-            </a:pPr>
-            <a:r>
-              <a:t>Three components</a:t>
-            </a:r>
-          </a:p>
-        </p:txBody>
-      </p:sp>
-      <p:sp>
-        <p:nvSpPr>
-          <p:cNvPr id="6" name="TextBox 5"/>
+            <a:pPr algn="l">
+              <a:lnSpc>
+                <a:spcPct val="112000"/>
+              </a:lnSpc>
+              <a:spcAft>
+                <a:spcPts val="600"/>
+              </a:spcAft>
+              <a:buNone/>
+            </a:pPr>
+            <a:r>
+              <a:rPr sz="900" b="0" i="0">
+                <a:solidFill>
+                  <a:srgbClr val="5C6C7E"/>
+                </a:solidFill>
+                <a:latin typeface="Segoe UI"/>
+              </a:rPr>
+              <a:t>CS 112  ·  Cohort A — Team 3</a:t>
+            </a:r>
+          </a:p>
+        </p:txBody>
+      </p:sp>
+      <p:sp>
+        <p:nvSpPr>
+          <p:cNvPr id="8" name="TextBox 7"/>
           <p:cNvSpPr txBox="1"/>
           <p:nvPr/>
         </p:nvSpPr>
         <p:spPr>
           <a:xfrm>
-            <a:off x="640080" y="1280160"/>
-            <a:ext cx="10972800" cy="5120640"/>
+            <a:off x="10820095" y="6382512"/>
+            <a:ext cx="822960" cy="274320"/>
           </a:xfrm>
           <a:prstGeom prst="rect">
             <a:avLst/>
@@ -6191,38 +8311,43 @@
           <a:noFill/>
         </p:spPr>
         <p:txBody>
-          <a:bodyPr wrap="square" anchor="t">
+          <a:bodyPr wrap="square" anchor="t" lIns="0" rIns="0" tIns="0" bIns="0">
             <a:spAutoFit/>
           </a:bodyPr>
           <a:lstStyle/>
           <a:p>
-            <a:pPr>
-              <a:spcAft>
-                <a:spcPts val="700"/>
-              </a:spcAft>
-              <a:defRPr sz="1500" i="0">
-                <a:solidFill>
-                  <a:srgbClr val="1C2733"/>
-                </a:solidFill>
-              </a:defRPr>
-            </a:pPr>
-            <a:r>
-              <a:t>Shared: bcrypt auth, role-based access control, state machines, automated tests, markdown reports.</a:t>
+            <a:pPr algn="r">
+              <a:lnSpc>
+                <a:spcPct val="112000"/>
+              </a:lnSpc>
+              <a:spcAft>
+                <a:spcPts val="600"/>
+              </a:spcAft>
+              <a:buNone/>
+            </a:pPr>
+            <a:r>
+              <a:rPr sz="900" b="1" i="0">
+                <a:solidFill>
+                  <a:srgbClr val="5C6C7E"/>
+                </a:solidFill>
+                <a:latin typeface="Segoe UI"/>
+              </a:rPr>
+              <a:t>3</a:t>
             </a:r>
           </a:p>
         </p:txBody>
       </p:sp>
       <p:graphicFrame>
         <p:nvGraphicFramePr>
-          <p:cNvPr id="7" name="Table 6"/>
+          <p:cNvPr id="9" name="Table 8"/>
           <p:cNvGraphicFramePr>
             <a:graphicFrameLocks noGrp="1"/>
           </p:cNvGraphicFramePr>
           <p:nvPr/>
         </p:nvGraphicFramePr>
         <p:xfrm>
-          <a:off x="640080" y="4023360"/>
-          <a:ext cx="10972800" cy="1463040"/>
+          <a:off x="822960" y="1874519"/>
+          <a:ext cx="10515600" cy="1609344"/>
         </p:xfrm>
         <a:graphic>
           <a:graphicData uri="http://schemas.openxmlformats.org/drawingml/2006/table">
@@ -6231,29 +8356,34 @@
                 <a:tableStyleId>{5C22544A-7EE6-4342-B048-85BDC9FD1C3A}</a:tableStyleId>
               </a:tblPr>
               <a:tblGrid>
-                <a:gridCol w="2743200"/>
-                <a:gridCol w="2743200"/>
-                <a:gridCol w="2743200"/>
-                <a:gridCol w="2743200"/>
+                <a:gridCol w="2628900"/>
+                <a:gridCol w="2628900"/>
+                <a:gridCol w="2628900"/>
+                <a:gridCol w="2628900"/>
               </a:tblGrid>
-              <a:tr h="365760">
+              <a:tr h="402336">
                 <a:tc>
                   <a:txBody>
                     <a:bodyPr/>
                     <a:lstStyle/>
                     <a:p>
                       <a:pPr>
-                        <a:defRPr sz="1200" b="1">
+                        <a:buNone/>
+                      </a:pPr>
+                      <a:r>
+                        <a:rPr sz="1200" b="1">
                           <a:solidFill>
                             <a:srgbClr val="FFFFFF"/>
                           </a:solidFill>
-                        </a:defRPr>
-                      </a:pPr>
+                          <a:latin typeface="Segoe UI"/>
+                        </a:rPr>
+                        <a:t/>
+                      </a:r>
                     </a:p>
                   </a:txBody>
-                  <a:tcPr>
+                  <a:tcPr marL="128016" marR="128016" marT="36576" marB="36576" anchor="ctr">
                     <a:solidFill>
-                      <a:srgbClr val="2563EB"/>
+                      <a:srgbClr val="0E2942"/>
                     </a:solidFill>
                   </a:tcPr>
                 </a:tc>
@@ -6263,20 +8393,22 @@
                     <a:lstStyle/>
                     <a:p>
                       <a:pPr>
-                        <a:defRPr sz="1200" b="1">
+                        <a:buNone/>
+                      </a:pPr>
+                      <a:r>
+                        <a:rPr sz="1200" b="1">
                           <a:solidFill>
                             <a:srgbClr val="FFFFFF"/>
                           </a:solidFill>
-                        </a:defRPr>
-                      </a:pPr>
-                      <a:r>
+                          <a:latin typeface="Segoe UI"/>
+                        </a:rPr>
                         <a:t>grid-analysis</a:t>
                       </a:r>
                     </a:p>
                   </a:txBody>
-                  <a:tcPr>
+                  <a:tcPr marL="128016" marR="128016" marT="36576" marB="36576" anchor="ctr">
                     <a:solidFill>
-                      <a:srgbClr val="2563EB"/>
+                      <a:srgbClr val="0E2942"/>
                     </a:solidFill>
                   </a:tcPr>
                 </a:tc>
@@ -6286,20 +8418,22 @@
                     <a:lstStyle/>
                     <a:p>
                       <a:pPr>
-                        <a:defRPr sz="1200" b="1">
+                        <a:buNone/>
+                      </a:pPr>
+                      <a:r>
+                        <a:rPr sz="1200" b="1">
                           <a:solidFill>
                             <a:srgbClr val="FFFFFF"/>
                           </a:solidFill>
-                        </a:defRPr>
-                      </a:pPr>
-                      <a:r>
+                          <a:latin typeface="Segoe UI"/>
+                        </a:rPr>
                         <a:t>GridCare-Lite</a:t>
                       </a:r>
                     </a:p>
                   </a:txBody>
-                  <a:tcPr>
+                  <a:tcPr marL="128016" marR="128016" marT="36576" marB="36576" anchor="ctr">
                     <a:solidFill>
-                      <a:srgbClr val="2563EB"/>
+                      <a:srgbClr val="0E2942"/>
                     </a:solidFill>
                   </a:tcPr>
                 </a:tc>
@@ -6309,39 +8443,47 @@
                     <a:lstStyle/>
                     <a:p>
                       <a:pPr>
-                        <a:defRPr sz="1200" b="1">
+                        <a:buNone/>
+                      </a:pPr>
+                      <a:r>
+                        <a:rPr sz="1200" b="1">
                           <a:solidFill>
                             <a:srgbClr val="FFFFFF"/>
                           </a:solidFill>
-                        </a:defRPr>
-                      </a:pPr>
-                      <a:r>
+                          <a:latin typeface="Segoe UI"/>
+                        </a:rPr>
                         <a:t>ClinicCare-Lite</a:t>
                       </a:r>
                     </a:p>
                   </a:txBody>
-                  <a:tcPr>
+                  <a:tcPr marL="128016" marR="128016" marT="36576" marB="36576" anchor="ctr">
                     <a:solidFill>
-                      <a:srgbClr val="2563EB"/>
+                      <a:srgbClr val="0E2942"/>
                     </a:solidFill>
                   </a:tcPr>
                 </a:tc>
               </a:tr>
-              <a:tr h="365760">
+              <a:tr h="402336">
                 <a:tc>
                   <a:txBody>
                     <a:bodyPr/>
                     <a:lstStyle/>
                     <a:p>
                       <a:pPr>
-                        <a:defRPr sz="1200" b="0"/>
+                        <a:buNone/>
                       </a:pPr>
                       <a:r>
+                        <a:rPr sz="1150" b="0">
+                          <a:solidFill>
+                            <a:srgbClr val="1B2A38"/>
+                          </a:solidFill>
+                          <a:latin typeface="Segoe UI"/>
+                        </a:rPr>
                         <a:t>Focus</a:t>
                       </a:r>
                     </a:p>
                   </a:txBody>
-                  <a:tcPr>
+                  <a:tcPr marL="128016" marR="128016" marT="36576" marB="36576" anchor="ctr">
                     <a:solidFill>
                       <a:srgbClr val="FFFFFF"/>
                     </a:solidFill>
@@ -6353,14 +8495,20 @@
                     <a:lstStyle/>
                     <a:p>
                       <a:pPr>
-                        <a:defRPr sz="1200" b="0"/>
+                        <a:buNone/>
                       </a:pPr>
                       <a:r>
+                        <a:rPr sz="1150" b="0">
+                          <a:solidFill>
+                            <a:srgbClr val="1B2A38"/>
+                          </a:solidFill>
+                          <a:latin typeface="Segoe UI"/>
+                        </a:rPr>
                         <a:t>Data science + network science</a:t>
                       </a:r>
                     </a:p>
                   </a:txBody>
-                  <a:tcPr>
+                  <a:tcPr marL="128016" marR="128016" marT="36576" marB="36576" anchor="ctr">
                     <a:solidFill>
                       <a:srgbClr val="FFFFFF"/>
                     </a:solidFill>
@@ -6372,14 +8520,20 @@
                     <a:lstStyle/>
                     <a:p>
                       <a:pPr>
-                        <a:defRPr sz="1200" b="0"/>
+                        <a:buNone/>
                       </a:pPr>
                       <a:r>
+                        <a:rPr sz="1150" b="0">
+                          <a:solidFill>
+                            <a:srgbClr val="1B2A38"/>
+                          </a:solidFill>
+                          <a:latin typeface="Segoe UI"/>
+                        </a:rPr>
                         <a:t>Software eng. + DB</a:t>
                       </a:r>
                     </a:p>
                   </a:txBody>
-                  <a:tcPr>
+                  <a:tcPr marL="128016" marR="128016" marT="36576" marB="36576" anchor="ctr">
                     <a:solidFill>
                       <a:srgbClr val="FFFFFF"/>
                     </a:solidFill>
@@ -6391,37 +8545,49 @@
                     <a:lstStyle/>
                     <a:p>
                       <a:pPr>
-                        <a:defRPr sz="1200" b="0"/>
+                        <a:buNone/>
                       </a:pPr>
                       <a:r>
+                        <a:rPr sz="1150" b="0">
+                          <a:solidFill>
+                            <a:srgbClr val="1B2A38"/>
+                          </a:solidFill>
+                          <a:latin typeface="Segoe UI"/>
+                        </a:rPr>
                         <a:t>Secure web app + privacy</a:t>
                       </a:r>
                     </a:p>
                   </a:txBody>
-                  <a:tcPr>
+                  <a:tcPr marL="128016" marR="128016" marT="36576" marB="36576" anchor="ctr">
                     <a:solidFill>
                       <a:srgbClr val="FFFFFF"/>
                     </a:solidFill>
                   </a:tcPr>
                 </a:tc>
               </a:tr>
-              <a:tr h="365760">
+              <a:tr h="402336">
                 <a:tc>
                   <a:txBody>
                     <a:bodyPr/>
                     <a:lstStyle/>
                     <a:p>
                       <a:pPr>
-                        <a:defRPr sz="1200" b="0"/>
+                        <a:buNone/>
                       </a:pPr>
                       <a:r>
+                        <a:rPr sz="1150" b="0">
+                          <a:solidFill>
+                            <a:srgbClr val="1B2A38"/>
+                          </a:solidFill>
+                          <a:latin typeface="Segoe UI"/>
+                        </a:rPr>
                         <a:t>Stack</a:t>
                       </a:r>
                     </a:p>
                   </a:txBody>
-                  <a:tcPr>
+                  <a:tcPr marL="128016" marR="128016" marT="36576" marB="36576" anchor="ctr">
                     <a:solidFill>
-                      <a:srgbClr val="F1F5FB"/>
+                      <a:srgbClr val="ECF2F8"/>
                     </a:solidFill>
                   </a:tcPr>
                 </a:tc>
@@ -6431,16 +8597,22 @@
                     <a:lstStyle/>
                     <a:p>
                       <a:pPr>
-                        <a:defRPr sz="1200" b="0"/>
+                        <a:buNone/>
                       </a:pPr>
                       <a:r>
+                        <a:rPr sz="1150" b="0">
+                          <a:solidFill>
+                            <a:srgbClr val="1B2A38"/>
+                          </a:solidFill>
+                          <a:latin typeface="Segoe UI"/>
+                        </a:rPr>
                         <a:t>pandas, NetworkX, Folium, Plotly, Streamlit</a:t>
                       </a:r>
                     </a:p>
                   </a:txBody>
-                  <a:tcPr>
+                  <a:tcPr marL="128016" marR="128016" marT="36576" marB="36576" anchor="ctr">
                     <a:solidFill>
-                      <a:srgbClr val="F1F5FB"/>
+                      <a:srgbClr val="ECF2F8"/>
                     </a:solidFill>
                   </a:tcPr>
                 </a:tc>
@@ -6450,16 +8622,22 @@
                     <a:lstStyle/>
                     <a:p>
                       <a:pPr>
-                        <a:defRPr sz="1200" b="0"/>
+                        <a:buNone/>
                       </a:pPr>
                       <a:r>
+                        <a:rPr sz="1150" b="0">
+                          <a:solidFill>
+                            <a:srgbClr val="1B2A38"/>
+                          </a:solidFill>
+                          <a:latin typeface="Segoe UI"/>
+                        </a:rPr>
                         <a:t>Tkinter + SQLite</a:t>
                       </a:r>
                     </a:p>
                   </a:txBody>
-                  <a:tcPr>
+                  <a:tcPr marL="128016" marR="128016" marT="36576" marB="36576" anchor="ctr">
                     <a:solidFill>
-                      <a:srgbClr val="F1F5FB"/>
+                      <a:srgbClr val="ECF2F8"/>
                     </a:solidFill>
                   </a:tcPr>
                 </a:tc>
@@ -6469,35 +8647,47 @@
                     <a:lstStyle/>
                     <a:p>
                       <a:pPr>
-                        <a:defRPr sz="1200" b="0"/>
+                        <a:buNone/>
                       </a:pPr>
                       <a:r>
+                        <a:rPr sz="1150" b="0">
+                          <a:solidFill>
+                            <a:srgbClr val="1B2A38"/>
+                          </a:solidFill>
+                          <a:latin typeface="Segoe UI"/>
+                        </a:rPr>
                         <a:t>Flask + JSON</a:t>
                       </a:r>
                     </a:p>
                   </a:txBody>
-                  <a:tcPr>
+                  <a:tcPr marL="128016" marR="128016" marT="36576" marB="36576" anchor="ctr">
                     <a:solidFill>
-                      <a:srgbClr val="F1F5FB"/>
+                      <a:srgbClr val="ECF2F8"/>
                     </a:solidFill>
                   </a:tcPr>
                 </a:tc>
               </a:tr>
-              <a:tr h="365760">
+              <a:tr h="402336">
                 <a:tc>
                   <a:txBody>
                     <a:bodyPr/>
                     <a:lstStyle/>
                     <a:p>
                       <a:pPr>
-                        <a:defRPr sz="1200" b="0"/>
+                        <a:buNone/>
                       </a:pPr>
                       <a:r>
+                        <a:rPr sz="1150" b="0">
+                          <a:solidFill>
+                            <a:srgbClr val="1B2A38"/>
+                          </a:solidFill>
+                          <a:latin typeface="Segoe UI"/>
+                        </a:rPr>
                         <a:t>Output</a:t>
                       </a:r>
                     </a:p>
                   </a:txBody>
-                  <a:tcPr>
+                  <a:tcPr marL="128016" marR="128016" marT="36576" marB="36576" anchor="ctr">
                     <a:solidFill>
                       <a:srgbClr val="FFFFFF"/>
                     </a:solidFill>
@@ -6509,14 +8699,20 @@
                     <a:lstStyle/>
                     <a:p>
                       <a:pPr>
-                        <a:defRPr sz="1200" b="0"/>
+                        <a:buNone/>
                       </a:pPr>
                       <a:r>
+                        <a:rPr sz="1150" b="0">
+                          <a:solidFill>
+                            <a:srgbClr val="1B2A38"/>
+                          </a:solidFill>
+                          <a:latin typeface="Segoe UI"/>
+                        </a:rPr>
                         <a:t>Reports, charts, interactive map, dashboard</a:t>
                       </a:r>
                     </a:p>
                   </a:txBody>
-                  <a:tcPr>
+                  <a:tcPr marL="128016" marR="128016" marT="36576" marB="36576" anchor="ctr">
                     <a:solidFill>
                       <a:srgbClr val="FFFFFF"/>
                     </a:solidFill>
@@ -6528,14 +8724,20 @@
                     <a:lstStyle/>
                     <a:p>
                       <a:pPr>
-                        <a:defRPr sz="1200" b="0"/>
+                        <a:buNone/>
                       </a:pPr>
                       <a:r>
+                        <a:rPr sz="1150" b="0">
+                          <a:solidFill>
+                            <a:srgbClr val="1B2A38"/>
+                          </a:solidFill>
+                          <a:latin typeface="Segoe UI"/>
+                        </a:rPr>
                         <a:t>Desktop outage-management GUI</a:t>
                       </a:r>
                     </a:p>
                   </a:txBody>
-                  <a:tcPr>
+                  <a:tcPr marL="128016" marR="128016" marT="36576" marB="36576" anchor="ctr">
                     <a:solidFill>
                       <a:srgbClr val="FFFFFF"/>
                     </a:solidFill>
@@ -6547,14 +8749,20 @@
                     <a:lstStyle/>
                     <a:p>
                       <a:pPr>
-                        <a:defRPr sz="1200" b="0"/>
+                        <a:buNone/>
                       </a:pPr>
                       <a:r>
+                        <a:rPr sz="1150" b="0">
+                          <a:solidFill>
+                            <a:srgbClr val="1B2A38"/>
+                          </a:solidFill>
+                          <a:latin typeface="Segoe UI"/>
+                        </a:rPr>
                         <a:t>Clinic admin &amp; comms web app</a:t>
                       </a:r>
                     </a:p>
                   </a:txBody>
-                  <a:tcPr>
+                  <a:tcPr marL="128016" marR="128016" marT="36576" marB="36576" anchor="ctr">
                     <a:solidFill>
                       <a:srgbClr val="FFFFFF"/>
                     </a:solidFill>
@@ -6565,6 +8773,49 @@
           </a:graphicData>
         </a:graphic>
       </p:graphicFrame>
+      <p:sp>
+        <p:nvSpPr>
+          <p:cNvPr id="10" name="TextBox 9"/>
+          <p:cNvSpPr txBox="1"/>
+          <p:nvPr/>
+        </p:nvSpPr>
+        <p:spPr>
+          <a:xfrm>
+            <a:off x="822960" y="3666744"/>
+            <a:ext cx="10515600" cy="402336"/>
+          </a:xfrm>
+          <a:prstGeom prst="rect">
+            <a:avLst/>
+          </a:prstGeom>
+          <a:noFill/>
+        </p:spPr>
+        <p:txBody>
+          <a:bodyPr wrap="square" anchor="t" lIns="0" rIns="0" tIns="0" bIns="0">
+            <a:spAutoFit/>
+          </a:bodyPr>
+          <a:lstStyle/>
+          <a:p>
+            <a:pPr algn="l">
+              <a:lnSpc>
+                <a:spcPct val="114000"/>
+              </a:lnSpc>
+              <a:spcAft>
+                <a:spcPts val="700"/>
+              </a:spcAft>
+              <a:buNone/>
+            </a:pPr>
+            <a:r>
+              <a:rPr sz="1450" b="0" i="0">
+                <a:solidFill>
+                  <a:srgbClr val="1B2A38"/>
+                </a:solidFill>
+                <a:latin typeface="Segoe UI"/>
+              </a:rPr>
+              <a:t>Shared: bcrypt auth, role-based access control, state machines, automated tests, markdown reports.</a:t>
+            </a:r>
+          </a:p>
+        </p:txBody>
+      </p:sp>
     </p:spTree>
   </p:cSld>
   <p:clrMapOvr>
@@ -6636,13 +8887,13 @@
         <p:spPr>
           <a:xfrm>
             <a:off x="0" y="0"/>
-            <a:ext cx="12191695" cy="960120"/>
+            <a:ext cx="146304" cy="6858000"/>
           </a:xfrm>
           <a:prstGeom prst="rect">
             <a:avLst/>
           </a:prstGeom>
           <a:solidFill>
-            <a:srgbClr val="F1F5FB"/>
+            <a:srgbClr val="15B8A6"/>
           </a:solidFill>
           <a:ln>
             <a:noFill/>
@@ -6673,20 +8924,106 @@
       </p:sp>
       <p:sp>
         <p:nvSpPr>
-          <p:cNvPr id="4" name="Rectangle 3"/>
+          <p:cNvPr id="4" name="TextBox 3"/>
+          <p:cNvSpPr txBox="1"/>
+          <p:nvPr/>
+        </p:nvSpPr>
+        <p:spPr>
+          <a:xfrm>
+            <a:off x="822960" y="475488"/>
+            <a:ext cx="10515600" cy="274320"/>
+          </a:xfrm>
+          <a:prstGeom prst="rect">
+            <a:avLst/>
+          </a:prstGeom>
+          <a:noFill/>
+        </p:spPr>
+        <p:txBody>
+          <a:bodyPr wrap="square" anchor="t" lIns="0" rIns="0" tIns="0" bIns="0">
+            <a:spAutoFit/>
+          </a:bodyPr>
+          <a:lstStyle/>
+          <a:p>
+            <a:pPr algn="l">
+              <a:lnSpc>
+                <a:spcPct val="112000"/>
+              </a:lnSpc>
+              <a:spcAft>
+                <a:spcPts val="600"/>
+              </a:spcAft>
+              <a:buNone/>
+            </a:pPr>
+            <a:r>
+              <a:rPr sz="1100" b="1" i="0">
+                <a:solidFill>
+                  <a:srgbClr val="15B8A6"/>
+                </a:solidFill>
+                <a:latin typeface="Segoe UI"/>
+              </a:rPr>
+              <a:t>PART 1  ·  GRID ANALYSIS</a:t>
+            </a:r>
+          </a:p>
+        </p:txBody>
+      </p:sp>
+      <p:sp>
+        <p:nvSpPr>
+          <p:cNvPr id="5" name="TextBox 4"/>
+          <p:cNvSpPr txBox="1"/>
+          <p:nvPr/>
+        </p:nvSpPr>
+        <p:spPr>
+          <a:xfrm>
+            <a:off x="822960" y="786384"/>
+            <a:ext cx="10515600" cy="822960"/>
+          </a:xfrm>
+          <a:prstGeom prst="rect">
+            <a:avLst/>
+          </a:prstGeom>
+          <a:noFill/>
+        </p:spPr>
+        <p:txBody>
+          <a:bodyPr wrap="square" anchor="t" lIns="0" rIns="0" tIns="0" bIns="0">
+            <a:spAutoFit/>
+          </a:bodyPr>
+          <a:lstStyle/>
+          <a:p>
+            <a:pPr algn="l">
+              <a:lnSpc>
+                <a:spcPct val="100000"/>
+              </a:lnSpc>
+              <a:spcAft>
+                <a:spcPts val="600"/>
+              </a:spcAft>
+              <a:buNone/>
+            </a:pPr>
+            <a:r>
+              <a:rPr sz="2700" b="1" i="0">
+                <a:solidFill>
+                  <a:srgbClr val="0E2942"/>
+                </a:solidFill>
+                <a:latin typeface="Segoe UI Semibold"/>
+              </a:rPr>
+              <a:t>The dataset</a:t>
+            </a:r>
+          </a:p>
+        </p:txBody>
+      </p:sp>
+      <p:sp>
+        <p:nvSpPr>
+          <p:cNvPr id="6" name="Rectangle 5"/>
           <p:cNvSpPr/>
           <p:nvPr/>
         </p:nvSpPr>
         <p:spPr>
           <a:xfrm>
-            <a:off x="0" y="960120"/>
-            <a:ext cx="12191695" cy="45720"/>
+            <a:off x="822960" y="1463040"/>
+            <a:ext cx="1234440" cy="54864"/>
           </a:xfrm>
           <a:prstGeom prst="rect">
             <a:avLst/>
           </a:prstGeom>
           <a:solidFill>
-            <a:srgbClr val="2563EB"/>
+            <a:srgbClr val="F59E0B"/>
           </a:solidFill>
           <a:ln>
             <a:noFill/>
@@ -6717,14 +9054,14 @@
       </p:sp>
       <p:sp>
         <p:nvSpPr>
-          <p:cNvPr id="5" name="TextBox 4"/>
+          <p:cNvPr id="7" name="TextBox 6"/>
           <p:cNvSpPr txBox="1"/>
           <p:nvPr/>
         </p:nvSpPr>
         <p:spPr>
           <a:xfrm>
-            <a:off x="640080" y="164592"/>
-            <a:ext cx="10972800" cy="685800"/>
+            <a:off x="822960" y="6382512"/>
+            <a:ext cx="7315200" cy="274320"/>
           </a:xfrm>
           <a:prstGeom prst="rect">
             <a:avLst/>
@@ -6732,34 +9069,42 @@
           <a:noFill/>
         </p:spPr>
         <p:txBody>
-          <a:bodyPr wrap="none">
+          <a:bodyPr wrap="square" anchor="t" lIns="0" rIns="0" tIns="0" bIns="0">
             <a:spAutoFit/>
           </a:bodyPr>
           <a:lstStyle/>
           <a:p>
-            <a:pPr>
-              <a:defRPr sz="2600" b="1">
-                <a:solidFill>
-                  <a:srgbClr val="1C2733"/>
-                </a:solidFill>
-              </a:defRPr>
-            </a:pPr>
-            <a:r>
-              <a:t>Part 1 — The dataset</a:t>
-            </a:r>
-          </a:p>
-        </p:txBody>
-      </p:sp>
-      <p:sp>
-        <p:nvSpPr>
-          <p:cNvPr id="6" name="TextBox 5"/>
+            <a:pPr algn="l">
+              <a:lnSpc>
+                <a:spcPct val="112000"/>
+              </a:lnSpc>
+              <a:spcAft>
+                <a:spcPts val="600"/>
+              </a:spcAft>
+              <a:buNone/>
+            </a:pPr>
+            <a:r>
+              <a:rPr sz="900" b="0" i="0">
+                <a:solidFill>
+                  <a:srgbClr val="5C6C7E"/>
+                </a:solidFill>
+                <a:latin typeface="Segoe UI"/>
+              </a:rPr>
+              <a:t>CS 112  ·  Cohort A — Team 3</a:t>
+            </a:r>
+          </a:p>
+        </p:txBody>
+      </p:sp>
+      <p:sp>
+        <p:nvSpPr>
+          <p:cNvPr id="8" name="TextBox 7"/>
           <p:cNvSpPr txBox="1"/>
           <p:nvPr/>
         </p:nvSpPr>
         <p:spPr>
           <a:xfrm>
-            <a:off x="640080" y="1280160"/>
-            <a:ext cx="10972800" cy="5120640"/>
+            <a:off x="10820095" y="6382512"/>
+            <a:ext cx="822960" cy="274320"/>
           </a:xfrm>
           <a:prstGeom prst="rect">
             <a:avLst/>
@@ -6767,81 +9112,340 @@
           <a:noFill/>
         </p:spPr>
         <p:txBody>
-          <a:bodyPr wrap="square" anchor="t">
+          <a:bodyPr wrap="square" anchor="t" lIns="0" rIns="0" tIns="0" bIns="0">
             <a:spAutoFit/>
           </a:bodyPr>
           <a:lstStyle/>
           <a:p>
-            <a:pPr>
+            <a:pPr algn="r">
+              <a:lnSpc>
+                <a:spcPct val="112000"/>
+              </a:lnSpc>
+              <a:spcAft>
+                <a:spcPts val="600"/>
+              </a:spcAft>
+              <a:buNone/>
+            </a:pPr>
+            <a:r>
+              <a:rPr sz="900" b="1" i="0">
+                <a:solidFill>
+                  <a:srgbClr val="5C6C7E"/>
+                </a:solidFill>
+                <a:latin typeface="Segoe UI"/>
+              </a:rPr>
+              <a:t>4</a:t>
+            </a:r>
+          </a:p>
+        </p:txBody>
+      </p:sp>
+      <p:sp>
+        <p:nvSpPr>
+          <p:cNvPr id="9" name="TextBox 8"/>
+          <p:cNvSpPr txBox="1"/>
+          <p:nvPr/>
+        </p:nvSpPr>
+        <p:spPr>
+          <a:xfrm>
+            <a:off x="822960" y="1874519"/>
+            <a:ext cx="10515600" cy="1335024"/>
+          </a:xfrm>
+          <a:prstGeom prst="rect">
+            <a:avLst/>
+          </a:prstGeom>
+          <a:noFill/>
+        </p:spPr>
+        <p:txBody>
+          <a:bodyPr wrap="square" anchor="t" lIns="0" rIns="0" tIns="0" bIns="0">
+            <a:spAutoFit/>
+          </a:bodyPr>
+          <a:lstStyle/>
+          <a:p>
+            <a:pPr algn="l">
+              <a:lnSpc>
+                <a:spcPct val="114000"/>
+              </a:lnSpc>
               <a:spcAft>
                 <a:spcPts val="700"/>
               </a:spcAft>
-              <a:defRPr sz="1700"/>
-            </a:pPr>
-            <a:r>
-              <a:t>- 10 utilities · 44 substations · 55 lines</a:t>
-            </a:r>
-          </a:p>
-          <a:p>
-            <a:pPr>
+              <a:buNone/>
+            </a:pPr>
+            <a:r>
+              <a:rPr sz="1500" b="1" i="0">
+                <a:solidFill>
+                  <a:srgbClr val="15B8A6"/>
+                </a:solidFill>
+                <a:latin typeface="Segoe UI"/>
+              </a:rPr>
+              <a:t>▸  </a:t>
+            </a:r>
+            <a:r>
+              <a:rPr sz="1500" b="0" i="0">
+                <a:solidFill>
+                  <a:srgbClr val="1B2A38"/>
+                </a:solidFill>
+                <a:latin typeface="Segoe UI"/>
+              </a:rPr>
+              <a:t>10 utilities · 44 substations · 55 lines</a:t>
+            </a:r>
+          </a:p>
+          <a:p>
+            <a:pPr algn="l">
+              <a:lnSpc>
+                <a:spcPct val="114000"/>
+              </a:lnSpc>
               <a:spcAft>
                 <a:spcPts val="700"/>
               </a:spcAft>
-              <a:defRPr sz="1700"/>
-            </a:pPr>
-            <a:r>
-              <a:t>- Real geography + real utility names (ECG, NEDCo, GRIDCo, VRA)</a:t>
-            </a:r>
-          </a:p>
-          <a:p>
-            <a:pPr>
+              <a:buNone/>
+            </a:pPr>
+            <a:r>
+              <a:rPr sz="1500" b="1" i="0">
+                <a:solidFill>
+                  <a:srgbClr val="15B8A6"/>
+                </a:solidFill>
+                <a:latin typeface="Segoe UI"/>
+              </a:rPr>
+              <a:t>▸  </a:t>
+            </a:r>
+            <a:r>
+              <a:rPr sz="1500" b="0" i="0">
+                <a:solidFill>
+                  <a:srgbClr val="1B2A38"/>
+                </a:solidFill>
+                <a:latin typeface="Segoe UI"/>
+              </a:rPr>
+              <a:t>Real geography + real utility names (ECG, NEDCo, GRIDCo, VRA)</a:t>
+            </a:r>
+          </a:p>
+          <a:p>
+            <a:pPr algn="l">
+              <a:lnSpc>
+                <a:spcPct val="114000"/>
+              </a:lnSpc>
               <a:spcAft>
                 <a:spcPts val="700"/>
               </a:spcAft>
-              <a:defRPr sz="1700"/>
-            </a:pPr>
-            <a:r>
-              <a:t>- Synthetic coordinates, capacities, years, connections</a:t>
-            </a:r>
-          </a:p>
-          <a:p>
-            <a:pPr>
+              <a:buNone/>
+            </a:pPr>
+            <a:r>
+              <a:rPr sz="1500" b="1" i="0">
+                <a:solidFill>
+                  <a:srgbClr val="15B8A6"/>
+                </a:solidFill>
+                <a:latin typeface="Segoe UI"/>
+              </a:rPr>
+              <a:t>▸  </a:t>
+            </a:r>
+            <a:r>
+              <a:rPr sz="1500" b="0" i="0">
+                <a:solidFill>
+                  <a:srgbClr val="1B2A38"/>
+                </a:solidFill>
+                <a:latin typeface="Segoe UI"/>
+              </a:rPr>
+              <a:t>Synthetic coordinates, capacities, years, connections</a:t>
+            </a:r>
+          </a:p>
+          <a:p>
+            <a:pPr algn="l">
+              <a:lnSpc>
+                <a:spcPct val="114000"/>
+              </a:lnSpc>
               <a:spcAft>
                 <a:spcPts val="700"/>
               </a:spcAft>
-              <a:defRPr sz="1700"/>
-            </a:pPr>
-            <a:r>
-              <a:t>- WAPP cross-border interconnections (Burkina Faso, Côte d'Ivoire, Togo, Benin)</a:t>
-            </a:r>
-          </a:p>
-          <a:p>
-            <a:pPr>
+              <a:buNone/>
+            </a:pPr>
+            <a:r>
+              <a:rPr sz="1500" b="1" i="0">
+                <a:solidFill>
+                  <a:srgbClr val="15B8A6"/>
+                </a:solidFill>
+                <a:latin typeface="Segoe UI"/>
+              </a:rPr>
+              <a:t>▸  </a:t>
+            </a:r>
+            <a:r>
+              <a:rPr sz="1500" b="0" i="0">
+                <a:solidFill>
+                  <a:srgbClr val="1B2A38"/>
+                </a:solidFill>
+                <a:latin typeface="Segoe UI"/>
+              </a:rPr>
+              <a:t>WAPP cross-border interconnections (Burkina Faso, Côte d'Ivoire, Togo, Benin)</a:t>
+            </a:r>
+          </a:p>
+        </p:txBody>
+      </p:sp>
+      <p:sp>
+        <p:nvSpPr>
+          <p:cNvPr id="10" name="Rectangle 9"/>
+          <p:cNvSpPr/>
+          <p:nvPr/>
+        </p:nvSpPr>
+        <p:spPr>
+          <a:xfrm>
+            <a:off x="822960" y="3319272"/>
+            <a:ext cx="10515600" cy="585216"/>
+          </a:xfrm>
+          <a:prstGeom prst="rect">
+            <a:avLst/>
+          </a:prstGeom>
+          <a:solidFill>
+            <a:srgbClr val="ECF2F8"/>
+          </a:solidFill>
+          <a:ln>
+            <a:noFill/>
+          </a:ln>
+          <a:effectLst/>
+        </p:spPr>
+        <p:style>
+          <a:lnRef idx="1">
+            <a:schemeClr val="accent1"/>
+          </a:lnRef>
+          <a:fillRef idx="3">
+            <a:schemeClr val="accent1"/>
+          </a:fillRef>
+          <a:effectRef idx="2">
+            <a:schemeClr val="accent1"/>
+          </a:effectRef>
+          <a:fontRef idx="minor">
+            <a:schemeClr val="lt1"/>
+          </a:fontRef>
+        </p:style>
+        <p:txBody>
+          <a:bodyPr rtlCol="0" anchor="ctr"/>
+          <a:lstStyle/>
+          <a:p>
+            <a:pPr algn="ctr"/>
+          </a:p>
+        </p:txBody>
+      </p:sp>
+      <p:sp>
+        <p:nvSpPr>
+          <p:cNvPr id="11" name="Rectangle 10"/>
+          <p:cNvSpPr/>
+          <p:nvPr/>
+        </p:nvSpPr>
+        <p:spPr>
+          <a:xfrm>
+            <a:off x="822960" y="3319272"/>
+            <a:ext cx="64008" cy="585216"/>
+          </a:xfrm>
+          <a:prstGeom prst="rect">
+            <a:avLst/>
+          </a:prstGeom>
+          <a:solidFill>
+            <a:srgbClr val="15B8A6"/>
+          </a:solidFill>
+          <a:ln>
+            <a:noFill/>
+          </a:ln>
+          <a:effectLst/>
+        </p:spPr>
+        <p:style>
+          <a:lnRef idx="1">
+            <a:schemeClr val="accent1"/>
+          </a:lnRef>
+          <a:fillRef idx="3">
+            <a:schemeClr val="accent1"/>
+          </a:fillRef>
+          <a:effectRef idx="2">
+            <a:schemeClr val="accent1"/>
+          </a:effectRef>
+          <a:fontRef idx="minor">
+            <a:schemeClr val="lt1"/>
+          </a:fontRef>
+        </p:style>
+        <p:txBody>
+          <a:bodyPr rtlCol="0" anchor="ctr"/>
+          <a:lstStyle/>
+          <a:p>
+            <a:pPr algn="ctr"/>
+          </a:p>
+        </p:txBody>
+      </p:sp>
+      <p:sp>
+        <p:nvSpPr>
+          <p:cNvPr id="12" name="TextBox 11"/>
+          <p:cNvSpPr txBox="1"/>
+          <p:nvPr/>
+        </p:nvSpPr>
+        <p:spPr>
+          <a:xfrm>
+            <a:off x="1078992" y="3319272"/>
+            <a:ext cx="10058400" cy="585216"/>
+          </a:xfrm>
+          <a:prstGeom prst="rect">
+            <a:avLst/>
+          </a:prstGeom>
+          <a:noFill/>
+        </p:spPr>
+        <p:txBody>
+          <a:bodyPr wrap="square" anchor="ctr" lIns="0" rIns="0" tIns="0" bIns="0">
+            <a:spAutoFit/>
+          </a:bodyPr>
+          <a:lstStyle/>
+          <a:p>
+            <a:pPr algn="l">
+              <a:lnSpc>
+                <a:spcPct val="115000"/>
+              </a:lnSpc>
+              <a:spcAft>
+                <a:spcPts val="600"/>
+              </a:spcAft>
+              <a:buNone/>
+            </a:pPr>
+            <a:r>
+              <a:rPr sz="1350" b="1" i="0">
+                <a:solidFill>
+                  <a:srgbClr val="0E2942"/>
+                </a:solidFill>
+                <a:latin typeface="Segoe UI"/>
+              </a:rPr>
+              <a:t>Cleaning (Task 1): 0 missing, 0 duplicates, 0 orphaned foreign keys</a:t>
+            </a:r>
+          </a:p>
+        </p:txBody>
+      </p:sp>
+      <p:sp>
+        <p:nvSpPr>
+          <p:cNvPr id="13" name="TextBox 12"/>
+          <p:cNvSpPr txBox="1"/>
+          <p:nvPr/>
+        </p:nvSpPr>
+        <p:spPr>
+          <a:xfrm>
+            <a:off x="822960" y="4069080"/>
+            <a:ext cx="10515600" cy="402336"/>
+          </a:xfrm>
+          <a:prstGeom prst="rect">
+            <a:avLst/>
+          </a:prstGeom>
+          <a:noFill/>
+        </p:spPr>
+        <p:txBody>
+          <a:bodyPr wrap="square" anchor="t" lIns="0" rIns="0" tIns="0" bIns="0">
+            <a:spAutoFit/>
+          </a:bodyPr>
+          <a:lstStyle/>
+          <a:p>
+            <a:pPr algn="l">
+              <a:lnSpc>
+                <a:spcPct val="114000"/>
+              </a:lnSpc>
               <a:spcAft>
                 <a:spcPts val="700"/>
               </a:spcAft>
-              <a:defRPr sz="1500" i="0">
-                <a:solidFill>
-                  <a:srgbClr val="1C2733"/>
-                </a:solidFill>
-              </a:defRPr>
-            </a:pPr>
-            <a:r>
-              <a:t>Cleaning (Task 1): 0 missing, 0 duplicates, 0 orphaned foreign keys</a:t>
-            </a:r>
-          </a:p>
-          <a:p>
-            <a:pPr>
-              <a:spcAft>
-                <a:spcPts val="700"/>
-              </a:spcAft>
-              <a:defRPr sz="1500" i="0">
-                <a:solidFill>
-                  <a:srgbClr val="1C2733"/>
-                </a:solidFill>
-              </a:defRPr>
-            </a:pPr>
-            <a:r>
+              <a:buNone/>
+            </a:pPr>
+            <a:r>
+              <a:rPr sz="1450" b="0" i="0">
+                <a:solidFill>
+                  <a:srgbClr val="1B2A38"/>
+                </a:solidFill>
+                <a:latin typeface="Segoe UI"/>
+              </a:rPr>
               <a:t>— the validation code is the deliverable, not the empty defect list.</a:t>
             </a:r>
           </a:p>
@@ -6918,13 +9522,13 @@
         <p:spPr>
           <a:xfrm>
             <a:off x="0" y="0"/>
-            <a:ext cx="12191695" cy="960120"/>
+            <a:ext cx="146304" cy="6858000"/>
           </a:xfrm>
           <a:prstGeom prst="rect">
             <a:avLst/>
           </a:prstGeom>
           <a:solidFill>
-            <a:srgbClr val="F1F5FB"/>
+            <a:srgbClr val="15B8A6"/>
           </a:solidFill>
           <a:ln>
             <a:noFill/>
@@ -6955,20 +9559,106 @@
       </p:sp>
       <p:sp>
         <p:nvSpPr>
-          <p:cNvPr id="4" name="Rectangle 3"/>
+          <p:cNvPr id="4" name="TextBox 3"/>
+          <p:cNvSpPr txBox="1"/>
+          <p:nvPr/>
+        </p:nvSpPr>
+        <p:spPr>
+          <a:xfrm>
+            <a:off x="822960" y="475488"/>
+            <a:ext cx="10515600" cy="274320"/>
+          </a:xfrm>
+          <a:prstGeom prst="rect">
+            <a:avLst/>
+          </a:prstGeom>
+          <a:noFill/>
+        </p:spPr>
+        <p:txBody>
+          <a:bodyPr wrap="square" anchor="t" lIns="0" rIns="0" tIns="0" bIns="0">
+            <a:spAutoFit/>
+          </a:bodyPr>
+          <a:lstStyle/>
+          <a:p>
+            <a:pPr algn="l">
+              <a:lnSpc>
+                <a:spcPct val="112000"/>
+              </a:lnSpc>
+              <a:spcAft>
+                <a:spcPts val="600"/>
+              </a:spcAft>
+              <a:buNone/>
+            </a:pPr>
+            <a:r>
+              <a:rPr sz="1100" b="1" i="0">
+                <a:solidFill>
+                  <a:srgbClr val="15B8A6"/>
+                </a:solidFill>
+                <a:latin typeface="Segoe UI"/>
+              </a:rPr>
+              <a:t>PART 1  ·  GRID ANALYSIS</a:t>
+            </a:r>
+          </a:p>
+        </p:txBody>
+      </p:sp>
+      <p:sp>
+        <p:nvSpPr>
+          <p:cNvPr id="5" name="TextBox 4"/>
+          <p:cNvSpPr txBox="1"/>
+          <p:nvPr/>
+        </p:nvSpPr>
+        <p:spPr>
+          <a:xfrm>
+            <a:off x="822960" y="786384"/>
+            <a:ext cx="10515600" cy="822960"/>
+          </a:xfrm>
+          <a:prstGeom prst="rect">
+            <a:avLst/>
+          </a:prstGeom>
+          <a:noFill/>
+        </p:spPr>
+        <p:txBody>
+          <a:bodyPr wrap="square" anchor="t" lIns="0" rIns="0" tIns="0" bIns="0">
+            <a:spAutoFit/>
+          </a:bodyPr>
+          <a:lstStyle/>
+          <a:p>
+            <a:pPr algn="l">
+              <a:lnSpc>
+                <a:spcPct val="100000"/>
+              </a:lnSpc>
+              <a:spcAft>
+                <a:spcPts val="600"/>
+              </a:spcAft>
+              <a:buNone/>
+            </a:pPr>
+            <a:r>
+              <a:rPr sz="2700" b="1" i="0">
+                <a:solidFill>
+                  <a:srgbClr val="0E2942"/>
+                </a:solidFill>
+                <a:latin typeface="Segoe UI Semibold"/>
+              </a:rPr>
+              <a:t>EDA highlights</a:t>
+            </a:r>
+          </a:p>
+        </p:txBody>
+      </p:sp>
+      <p:sp>
+        <p:nvSpPr>
+          <p:cNvPr id="6" name="Rectangle 5"/>
           <p:cNvSpPr/>
           <p:nvPr/>
         </p:nvSpPr>
         <p:spPr>
           <a:xfrm>
-            <a:off x="0" y="960120"/>
-            <a:ext cx="12191695" cy="45720"/>
+            <a:off x="822960" y="1463040"/>
+            <a:ext cx="1234440" cy="54864"/>
           </a:xfrm>
           <a:prstGeom prst="rect">
             <a:avLst/>
           </a:prstGeom>
           <a:solidFill>
-            <a:srgbClr val="2563EB"/>
+            <a:srgbClr val="F59E0B"/>
           </a:solidFill>
           <a:ln>
             <a:noFill/>
@@ -6999,14 +9689,14 @@
       </p:sp>
       <p:sp>
         <p:nvSpPr>
-          <p:cNvPr id="5" name="TextBox 4"/>
+          <p:cNvPr id="7" name="TextBox 6"/>
           <p:cNvSpPr txBox="1"/>
           <p:nvPr/>
         </p:nvSpPr>
         <p:spPr>
           <a:xfrm>
-            <a:off x="640080" y="164592"/>
-            <a:ext cx="10972800" cy="685800"/>
+            <a:off x="822960" y="6382512"/>
+            <a:ext cx="7315200" cy="274320"/>
           </a:xfrm>
           <a:prstGeom prst="rect">
             <a:avLst/>
@@ -7014,34 +9704,42 @@
           <a:noFill/>
         </p:spPr>
         <p:txBody>
-          <a:bodyPr wrap="none">
+          <a:bodyPr wrap="square" anchor="t" lIns="0" rIns="0" tIns="0" bIns="0">
             <a:spAutoFit/>
           </a:bodyPr>
           <a:lstStyle/>
           <a:p>
-            <a:pPr>
-              <a:defRPr sz="2600" b="1">
-                <a:solidFill>
-                  <a:srgbClr val="1C2733"/>
-                </a:solidFill>
-              </a:defRPr>
-            </a:pPr>
-            <a:r>
-              <a:t>EDA highlights</a:t>
-            </a:r>
-          </a:p>
-        </p:txBody>
-      </p:sp>
-      <p:sp>
-        <p:nvSpPr>
-          <p:cNvPr id="6" name="TextBox 5"/>
+            <a:pPr algn="l">
+              <a:lnSpc>
+                <a:spcPct val="112000"/>
+              </a:lnSpc>
+              <a:spcAft>
+                <a:spcPts val="600"/>
+              </a:spcAft>
+              <a:buNone/>
+            </a:pPr>
+            <a:r>
+              <a:rPr sz="900" b="0" i="0">
+                <a:solidFill>
+                  <a:srgbClr val="5C6C7E"/>
+                </a:solidFill>
+                <a:latin typeface="Segoe UI"/>
+              </a:rPr>
+              <a:t>CS 112  ·  Cohort A — Team 3</a:t>
+            </a:r>
+          </a:p>
+        </p:txBody>
+      </p:sp>
+      <p:sp>
+        <p:nvSpPr>
+          <p:cNvPr id="8" name="TextBox 7"/>
           <p:cNvSpPr txBox="1"/>
           <p:nvPr/>
         </p:nvSpPr>
         <p:spPr>
           <a:xfrm>
-            <a:off x="640080" y="1280160"/>
-            <a:ext cx="6766560" cy="5120640"/>
+            <a:off x="10820095" y="6382512"/>
+            <a:ext cx="822960" cy="274320"/>
           </a:xfrm>
           <a:prstGeom prst="rect">
             <a:avLst/>
@@ -7049,70 +9747,247 @@
           <a:noFill/>
         </p:spPr>
         <p:txBody>
-          <a:bodyPr wrap="square" anchor="t">
+          <a:bodyPr wrap="square" anchor="t" lIns="0" rIns="0" tIns="0" bIns="0">
             <a:spAutoFit/>
           </a:bodyPr>
           <a:lstStyle/>
           <a:p>
-            <a:pPr>
+            <a:pPr algn="r">
+              <a:lnSpc>
+                <a:spcPct val="112000"/>
+              </a:lnSpc>
+              <a:spcAft>
+                <a:spcPts val="600"/>
+              </a:spcAft>
+              <a:buNone/>
+            </a:pPr>
+            <a:r>
+              <a:rPr sz="900" b="1" i="0">
+                <a:solidFill>
+                  <a:srgbClr val="5C6C7E"/>
+                </a:solidFill>
+                <a:latin typeface="Segoe UI"/>
+              </a:rPr>
+              <a:t>5</a:t>
+            </a:r>
+          </a:p>
+        </p:txBody>
+      </p:sp>
+      <p:sp>
+        <p:nvSpPr>
+          <p:cNvPr id="9" name="TextBox 8"/>
+          <p:cNvSpPr txBox="1"/>
+          <p:nvPr/>
+        </p:nvSpPr>
+        <p:spPr>
+          <a:xfrm>
+            <a:off x="822960" y="2331720"/>
+            <a:ext cx="6309360" cy="1645920"/>
+          </a:xfrm>
+          <a:prstGeom prst="rect">
+            <a:avLst/>
+          </a:prstGeom>
+          <a:noFill/>
+        </p:spPr>
+        <p:txBody>
+          <a:bodyPr wrap="square" anchor="t" lIns="0" rIns="0" tIns="0" bIns="0">
+            <a:spAutoFit/>
+          </a:bodyPr>
+          <a:lstStyle/>
+          <a:p>
+            <a:pPr algn="l">
+              <a:lnSpc>
+                <a:spcPct val="114000"/>
+              </a:lnSpc>
               <a:spcAft>
                 <a:spcPts val="700"/>
               </a:spcAft>
-              <a:defRPr sz="1700"/>
-            </a:pPr>
-            <a:r>
-              <a:t>- Greater Accra has the most substations (6); Ashanti next (5)</a:t>
-            </a:r>
-          </a:p>
-          <a:p>
-            <a:pPr>
+              <a:buNone/>
+            </a:pPr>
+            <a:r>
+              <a:rPr sz="1500" b="1" i="0">
+                <a:solidFill>
+                  <a:srgbClr val="15B8A6"/>
+                </a:solidFill>
+                <a:latin typeface="Segoe UI"/>
+              </a:rPr>
+              <a:t>▸  </a:t>
+            </a:r>
+            <a:r>
+              <a:rPr sz="1500" b="0" i="0">
+                <a:solidFill>
+                  <a:srgbClr val="1B2A38"/>
+                </a:solidFill>
+                <a:latin typeface="Segoe UI"/>
+              </a:rPr>
+              <a:t>Greater Accra has the most substations (6); Ashanti next (5)</a:t>
+            </a:r>
+          </a:p>
+          <a:p>
+            <a:pPr algn="l">
+              <a:lnSpc>
+                <a:spcPct val="114000"/>
+              </a:lnSpc>
               <a:spcAft>
                 <a:spcPts val="700"/>
               </a:spcAft>
-              <a:defRPr sz="1700"/>
-            </a:pPr>
-            <a:r>
-              <a:t>- 161 kV most common voltage level</a:t>
-            </a:r>
-          </a:p>
-          <a:p>
-            <a:pPr>
+              <a:buNone/>
+            </a:pPr>
+            <a:r>
+              <a:rPr sz="1500" b="1" i="0">
+                <a:solidFill>
+                  <a:srgbClr val="15B8A6"/>
+                </a:solidFill>
+                <a:latin typeface="Segoe UI"/>
+              </a:rPr>
+              <a:t>▸  </a:t>
+            </a:r>
+            <a:r>
+              <a:rPr sz="1500" b="0" i="0">
+                <a:solidFill>
+                  <a:srgbClr val="1B2A38"/>
+                </a:solidFill>
+                <a:latin typeface="Segoe UI"/>
+              </a:rPr>
+              <a:t>161 kV most common voltage level</a:t>
+            </a:r>
+          </a:p>
+          <a:p>
+            <a:pPr algn="l">
+              <a:lnSpc>
+                <a:spcPct val="114000"/>
+              </a:lnSpc>
               <a:spcAft>
                 <a:spcPts val="700"/>
               </a:spcAft>
-              <a:defRPr sz="1700"/>
-            </a:pPr>
-            <a:r>
-              <a:t>- GRIDCo operates 24 / 55 lines — the transmission backbone</a:t>
-            </a:r>
-          </a:p>
-          <a:p>
-            <a:pPr>
+              <a:buNone/>
+            </a:pPr>
+            <a:r>
+              <a:rPr sz="1500" b="1" i="0">
+                <a:solidFill>
+                  <a:srgbClr val="15B8A6"/>
+                </a:solidFill>
+                <a:latin typeface="Segoe UI"/>
+              </a:rPr>
+              <a:t>▸  </a:t>
+            </a:r>
+            <a:r>
+              <a:rPr sz="1500" b="0" i="0">
+                <a:solidFill>
+                  <a:srgbClr val="1B2A38"/>
+                </a:solidFill>
+                <a:latin typeface="Segoe UI"/>
+              </a:rPr>
+              <a:t>GRIDCo operates 24 / 55 lines — the transmission backbone</a:t>
+            </a:r>
+          </a:p>
+          <a:p>
+            <a:pPr algn="l">
+              <a:lnSpc>
+                <a:spcPct val="114000"/>
+              </a:lnSpc>
               <a:spcAft>
                 <a:spcPts val="700"/>
               </a:spcAft>
-              <a:defRPr sz="1700"/>
-            </a:pPr>
-            <a:r>
-              <a:t>- Capacity is right-skewed: median ~ 108 MVA, max 506 MVA</a:t>
-            </a:r>
-          </a:p>
-          <a:p>
-            <a:pPr>
+              <a:buNone/>
+            </a:pPr>
+            <a:r>
+              <a:rPr sz="1500" b="1" i="0">
+                <a:solidFill>
+                  <a:srgbClr val="15B8A6"/>
+                </a:solidFill>
+                <a:latin typeface="Segoe UI"/>
+              </a:rPr>
+              <a:t>▸  </a:t>
+            </a:r>
+            <a:r>
+              <a:rPr sz="1500" b="0" i="0">
+                <a:solidFill>
+                  <a:srgbClr val="1B2A38"/>
+                </a:solidFill>
+                <a:latin typeface="Segoe UI"/>
+              </a:rPr>
+              <a:t>Capacity is right-skewed: median ≈ 108 MVA, max 506 MVA</a:t>
+            </a:r>
+          </a:p>
+          <a:p>
+            <a:pPr algn="l">
+              <a:lnSpc>
+                <a:spcPct val="114000"/>
+              </a:lnSpc>
               <a:spcAft>
                 <a:spcPts val="700"/>
               </a:spcAft>
-              <a:defRPr sz="1700"/>
-            </a:pPr>
-            <a:r>
-              <a:t>- 96% of lines Active, 2 under maintenance</a:t>
-            </a:r>
+              <a:buNone/>
+            </a:pPr>
+            <a:r>
+              <a:rPr sz="1500" b="1" i="0">
+                <a:solidFill>
+                  <a:srgbClr val="15B8A6"/>
+                </a:solidFill>
+                <a:latin typeface="Segoe UI"/>
+              </a:rPr>
+              <a:t>▸  </a:t>
+            </a:r>
+            <a:r>
+              <a:rPr sz="1500" b="0" i="0">
+                <a:solidFill>
+                  <a:srgbClr val="1B2A38"/>
+                </a:solidFill>
+                <a:latin typeface="Segoe UI"/>
+              </a:rPr>
+              <a:t>96% of lines Active, 2 under maintenance</a:t>
+            </a:r>
+          </a:p>
+        </p:txBody>
+      </p:sp>
+      <p:sp>
+        <p:nvSpPr>
+          <p:cNvPr id="11" name="Rectangle 10"/>
+          <p:cNvSpPr/>
+          <p:nvPr/>
+        </p:nvSpPr>
+        <p:spPr>
+          <a:xfrm>
+            <a:off x="7406640" y="1920240"/>
+            <a:ext cx="4114800" cy="2606040"/>
+          </a:xfrm>
+          <a:prstGeom prst="rect">
+            <a:avLst/>
+          </a:prstGeom>
+          <a:solidFill>
+            <a:srgbClr val="ECF2F8"/>
+          </a:solidFill>
+          <a:ln>
+            <a:noFill/>
+          </a:ln>
+          <a:effectLst/>
+        </p:spPr>
+        <p:style>
+          <a:lnRef idx="1">
+            <a:schemeClr val="accent1"/>
+          </a:lnRef>
+          <a:fillRef idx="3">
+            <a:schemeClr val="accent1"/>
+          </a:fillRef>
+          <a:effectRef idx="2">
+            <a:schemeClr val="accent1"/>
+          </a:effectRef>
+          <a:fontRef idx="minor">
+            <a:schemeClr val="lt1"/>
+          </a:fontRef>
+        </p:style>
+        <p:txBody>
+          <a:bodyPr rtlCol="0" anchor="ctr"/>
+          <a:lstStyle/>
+          <a:p>
+            <a:pPr algn="ctr"/>
           </a:p>
         </p:txBody>
       </p:sp>
       <p:pic>
         <p:nvPicPr>
-          <p:cNvPr id="7" name="Picture 6" descr="eda_lines_per_utility.png"/>
+          <p:cNvPr id="10" name="Picture 9" descr="eda_lines_per_utility.png"/>
           <p:cNvPicPr>
             <a:picLocks noChangeAspect="1"/>
           </p:cNvPicPr>
@@ -7126,7 +10001,7 @@
         </p:blipFill>
         <p:spPr>
           <a:xfrm>
-            <a:off x="7680960" y="1371600"/>
+            <a:off x="7452360" y="1965960"/>
             <a:ext cx="4023360" cy="2514600"/>
           </a:xfrm>
           <a:prstGeom prst="rect">
@@ -7134,6 +10009,49 @@
           </a:prstGeom>
         </p:spPr>
       </p:pic>
+      <p:sp>
+        <p:nvSpPr>
+          <p:cNvPr id="12" name="TextBox 11"/>
+          <p:cNvSpPr txBox="1"/>
+          <p:nvPr/>
+        </p:nvSpPr>
+        <p:spPr>
+          <a:xfrm>
+            <a:off x="7452360" y="4590288"/>
+            <a:ext cx="4023360" cy="274320"/>
+          </a:xfrm>
+          <a:prstGeom prst="rect">
+            <a:avLst/>
+          </a:prstGeom>
+          <a:noFill/>
+        </p:spPr>
+        <p:txBody>
+          <a:bodyPr wrap="square" anchor="t" lIns="0" rIns="0" tIns="0" bIns="0">
+            <a:spAutoFit/>
+          </a:bodyPr>
+          <a:lstStyle/>
+          <a:p>
+            <a:pPr algn="l">
+              <a:lnSpc>
+                <a:spcPct val="112000"/>
+              </a:lnSpc>
+              <a:spcAft>
+                <a:spcPts val="600"/>
+              </a:spcAft>
+              <a:buNone/>
+            </a:pPr>
+            <a:r>
+              <a:rPr sz="900" b="0" i="1">
+                <a:solidFill>
+                  <a:srgbClr val="5C6C7E"/>
+                </a:solidFill>
+                <a:latin typeface="Segoe UI"/>
+              </a:rPr>
+              <a:t>eda_lines_per_utility.png</a:t>
+            </a:r>
+          </a:p>
+        </p:txBody>
+      </p:sp>
     </p:spTree>
   </p:cSld>
   <p:clrMapOvr>
@@ -7205,13 +10123,13 @@
         <p:spPr>
           <a:xfrm>
             <a:off x="0" y="0"/>
-            <a:ext cx="12191695" cy="960120"/>
+            <a:ext cx="146304" cy="6858000"/>
           </a:xfrm>
           <a:prstGeom prst="rect">
             <a:avLst/>
           </a:prstGeom>
           <a:solidFill>
-            <a:srgbClr val="F1F5FB"/>
+            <a:srgbClr val="15B8A6"/>
           </a:solidFill>
           <a:ln>
             <a:noFill/>
@@ -7242,20 +10160,106 @@
       </p:sp>
       <p:sp>
         <p:nvSpPr>
-          <p:cNvPr id="4" name="Rectangle 3"/>
+          <p:cNvPr id="4" name="TextBox 3"/>
+          <p:cNvSpPr txBox="1"/>
+          <p:nvPr/>
+        </p:nvSpPr>
+        <p:spPr>
+          <a:xfrm>
+            <a:off x="822960" y="475488"/>
+            <a:ext cx="10515600" cy="274320"/>
+          </a:xfrm>
+          <a:prstGeom prst="rect">
+            <a:avLst/>
+          </a:prstGeom>
+          <a:noFill/>
+        </p:spPr>
+        <p:txBody>
+          <a:bodyPr wrap="square" anchor="t" lIns="0" rIns="0" tIns="0" bIns="0">
+            <a:spAutoFit/>
+          </a:bodyPr>
+          <a:lstStyle/>
+          <a:p>
+            <a:pPr algn="l">
+              <a:lnSpc>
+                <a:spcPct val="112000"/>
+              </a:lnSpc>
+              <a:spcAft>
+                <a:spcPts val="600"/>
+              </a:spcAft>
+              <a:buNone/>
+            </a:pPr>
+            <a:r>
+              <a:rPr sz="1100" b="1" i="0">
+                <a:solidFill>
+                  <a:srgbClr val="15B8A6"/>
+                </a:solidFill>
+                <a:latin typeface="Segoe UI"/>
+              </a:rPr>
+              <a:t>PART 1  ·  GRID ANALYSIS</a:t>
+            </a:r>
+          </a:p>
+        </p:txBody>
+      </p:sp>
+      <p:sp>
+        <p:nvSpPr>
+          <p:cNvPr id="5" name="TextBox 4"/>
+          <p:cNvSpPr txBox="1"/>
+          <p:nvPr/>
+        </p:nvSpPr>
+        <p:spPr>
+          <a:xfrm>
+            <a:off x="822960" y="786384"/>
+            <a:ext cx="10515600" cy="822960"/>
+          </a:xfrm>
+          <a:prstGeom prst="rect">
+            <a:avLst/>
+          </a:prstGeom>
+          <a:noFill/>
+        </p:spPr>
+        <p:txBody>
+          <a:bodyPr wrap="square" anchor="t" lIns="0" rIns="0" tIns="0" bIns="0">
+            <a:spAutoFit/>
+          </a:bodyPr>
+          <a:lstStyle/>
+          <a:p>
+            <a:pPr algn="l">
+              <a:lnSpc>
+                <a:spcPct val="100000"/>
+              </a:lnSpc>
+              <a:spcAft>
+                <a:spcPts val="600"/>
+              </a:spcAft>
+              <a:buNone/>
+            </a:pPr>
+            <a:r>
+              <a:rPr sz="2700" b="1" i="0">
+                <a:solidFill>
+                  <a:srgbClr val="0E2942"/>
+                </a:solidFill>
+                <a:latin typeface="Segoe UI Semibold"/>
+              </a:rPr>
+              <a:t>Network model</a:t>
+            </a:r>
+          </a:p>
+        </p:txBody>
+      </p:sp>
+      <p:sp>
+        <p:nvSpPr>
+          <p:cNvPr id="6" name="Rectangle 5"/>
           <p:cNvSpPr/>
           <p:nvPr/>
         </p:nvSpPr>
         <p:spPr>
           <a:xfrm>
-            <a:off x="0" y="960120"/>
-            <a:ext cx="12191695" cy="45720"/>
+            <a:off x="822960" y="1463040"/>
+            <a:ext cx="1234440" cy="54864"/>
           </a:xfrm>
           <a:prstGeom prst="rect">
             <a:avLst/>
           </a:prstGeom>
           <a:solidFill>
-            <a:srgbClr val="2563EB"/>
+            <a:srgbClr val="F59E0B"/>
           </a:solidFill>
           <a:ln>
             <a:noFill/>
@@ -7286,14 +10290,14 @@
       </p:sp>
       <p:sp>
         <p:nvSpPr>
-          <p:cNvPr id="5" name="TextBox 4"/>
+          <p:cNvPr id="7" name="TextBox 6"/>
           <p:cNvSpPr txBox="1"/>
           <p:nvPr/>
         </p:nvSpPr>
         <p:spPr>
           <a:xfrm>
-            <a:off x="640080" y="164592"/>
-            <a:ext cx="10972800" cy="685800"/>
+            <a:off x="822960" y="6382512"/>
+            <a:ext cx="7315200" cy="274320"/>
           </a:xfrm>
           <a:prstGeom prst="rect">
             <a:avLst/>
@@ -7301,34 +10305,42 @@
           <a:noFill/>
         </p:spPr>
         <p:txBody>
-          <a:bodyPr wrap="none">
+          <a:bodyPr wrap="square" anchor="t" lIns="0" rIns="0" tIns="0" bIns="0">
             <a:spAutoFit/>
           </a:bodyPr>
           <a:lstStyle/>
           <a:p>
-            <a:pPr>
-              <a:defRPr sz="2600" b="1">
-                <a:solidFill>
-                  <a:srgbClr val="1C2733"/>
-                </a:solidFill>
-              </a:defRPr>
-            </a:pPr>
-            <a:r>
-              <a:t>Network model</a:t>
-            </a:r>
-          </a:p>
-        </p:txBody>
-      </p:sp>
-      <p:sp>
-        <p:nvSpPr>
-          <p:cNvPr id="6" name="TextBox 5"/>
+            <a:pPr algn="l">
+              <a:lnSpc>
+                <a:spcPct val="112000"/>
+              </a:lnSpc>
+              <a:spcAft>
+                <a:spcPts val="600"/>
+              </a:spcAft>
+              <a:buNone/>
+            </a:pPr>
+            <a:r>
+              <a:rPr sz="900" b="0" i="0">
+                <a:solidFill>
+                  <a:srgbClr val="5C6C7E"/>
+                </a:solidFill>
+                <a:latin typeface="Segoe UI"/>
+              </a:rPr>
+              <a:t>CS 112  ·  Cohort A — Team 3</a:t>
+            </a:r>
+          </a:p>
+        </p:txBody>
+      </p:sp>
+      <p:sp>
+        <p:nvSpPr>
+          <p:cNvPr id="8" name="TextBox 7"/>
           <p:cNvSpPr txBox="1"/>
           <p:nvPr/>
         </p:nvSpPr>
         <p:spPr>
           <a:xfrm>
-            <a:off x="640080" y="1280160"/>
-            <a:ext cx="10972800" cy="5120640"/>
+            <a:off x="10820095" y="6382512"/>
+            <a:ext cx="822960" cy="274320"/>
           </a:xfrm>
           <a:prstGeom prst="rect">
             <a:avLst/>
@@ -7336,78 +10348,216 @@
           <a:noFill/>
         </p:spPr>
         <p:txBody>
-          <a:bodyPr wrap="square" anchor="t">
+          <a:bodyPr wrap="square" anchor="t" lIns="0" rIns="0" tIns="0" bIns="0">
             <a:spAutoFit/>
           </a:bodyPr>
           <a:lstStyle/>
           <a:p>
-            <a:pPr>
+            <a:pPr algn="r">
+              <a:lnSpc>
+                <a:spcPct val="112000"/>
+              </a:lnSpc>
+              <a:spcAft>
+                <a:spcPts val="600"/>
+              </a:spcAft>
+              <a:buNone/>
+            </a:pPr>
+            <a:r>
+              <a:rPr sz="900" b="1" i="0">
+                <a:solidFill>
+                  <a:srgbClr val="5C6C7E"/>
+                </a:solidFill>
+                <a:latin typeface="Segoe UI"/>
+              </a:rPr>
+              <a:t>6</a:t>
+            </a:r>
+          </a:p>
+        </p:txBody>
+      </p:sp>
+      <p:sp>
+        <p:nvSpPr>
+          <p:cNvPr id="9" name="TextBox 8"/>
+          <p:cNvSpPr txBox="1"/>
+          <p:nvPr/>
+        </p:nvSpPr>
+        <p:spPr>
+          <a:xfrm>
+            <a:off x="822960" y="2331720"/>
+            <a:ext cx="10515600" cy="1956816"/>
+          </a:xfrm>
+          <a:prstGeom prst="rect">
+            <a:avLst/>
+          </a:prstGeom>
+          <a:noFill/>
+        </p:spPr>
+        <p:txBody>
+          <a:bodyPr wrap="square" anchor="t" lIns="0" rIns="0" tIns="0" bIns="0">
+            <a:spAutoFit/>
+          </a:bodyPr>
+          <a:lstStyle/>
+          <a:p>
+            <a:pPr algn="l">
+              <a:lnSpc>
+                <a:spcPct val="114000"/>
+              </a:lnSpc>
               <a:spcAft>
                 <a:spcPts val="700"/>
               </a:spcAft>
-              <a:defRPr sz="1700"/>
-            </a:pPr>
-            <a:r>
-              <a:t>- Undirected graph: 44 nodes, 55 edges</a:t>
-            </a:r>
-          </a:p>
-          <a:p>
-            <a:pPr>
+              <a:buNone/>
+            </a:pPr>
+            <a:r>
+              <a:rPr sz="1500" b="1" i="0">
+                <a:solidFill>
+                  <a:srgbClr val="15B8A6"/>
+                </a:solidFill>
+                <a:latin typeface="Segoe UI"/>
+              </a:rPr>
+              <a:t>▸  </a:t>
+            </a:r>
+            <a:r>
+              <a:rPr sz="1500" b="0" i="0">
+                <a:solidFill>
+                  <a:srgbClr val="1B2A38"/>
+                </a:solidFill>
+                <a:latin typeface="Segoe UI"/>
+              </a:rPr>
+              <a:t>Undirected graph: 44 nodes, 55 edges</a:t>
+            </a:r>
+          </a:p>
+          <a:p>
+            <a:pPr algn="l">
+              <a:lnSpc>
+                <a:spcPct val="114000"/>
+              </a:lnSpc>
               <a:spcAft>
                 <a:spcPts val="700"/>
               </a:spcAft>
-              <a:defRPr sz="1700"/>
-            </a:pPr>
-            <a:r>
-              <a:t>- Built from substation IDs -&gt; reveals 3 connected components</a:t>
-            </a:r>
-          </a:p>
-          <a:p>
-            <a:pPr>
+              <a:buNone/>
+            </a:pPr>
+            <a:r>
+              <a:rPr sz="1500" b="1" i="0">
+                <a:solidFill>
+                  <a:srgbClr val="15B8A6"/>
+                </a:solidFill>
+                <a:latin typeface="Segoe UI"/>
+              </a:rPr>
+              <a:t>▸  </a:t>
+            </a:r>
+            <a:r>
+              <a:rPr sz="1500" b="0" i="0">
+                <a:solidFill>
+                  <a:srgbClr val="1B2A38"/>
+                </a:solidFill>
+                <a:latin typeface="Segoe UI"/>
+              </a:rPr>
+              <a:t>Built from substation IDs → reveals 3 connected components</a:t>
+            </a:r>
+          </a:p>
+          <a:p>
+            <a:pPr algn="l">
+              <a:lnSpc>
+                <a:spcPct val="114000"/>
+              </a:lnSpc>
+              <a:spcAft>
+                <a:spcPts val="400"/>
+              </a:spcAft>
+              <a:buNone/>
+            </a:pPr>
+            <a:r>
+              <a:rPr sz="1200" b="0" i="1">
+                <a:solidFill>
+                  <a:srgbClr val="5C6C7E"/>
+                </a:solidFill>
+                <a:latin typeface="Segoe UI"/>
+              </a:rPr>
+              <a:t>(a name-keyed graph hides the 2 isolated substations — DEF-02)</a:t>
+            </a:r>
+          </a:p>
+          <a:p>
+            <a:pPr algn="l">
+              <a:lnSpc>
+                <a:spcPct val="114000"/>
+              </a:lnSpc>
               <a:spcAft>
                 <a:spcPts val="700"/>
               </a:spcAft>
-              <a:defRPr sz="1500" i="1">
-                <a:solidFill>
-                  <a:srgbClr val="1C2733"/>
-                </a:solidFill>
-              </a:defRPr>
-            </a:pPr>
-            <a:r>
-              <a:t>(a name-keyed graph hides the 2 isolated substations — DEF-02)</a:t>
-            </a:r>
-          </a:p>
-          <a:p>
-            <a:pPr>
+              <a:buNone/>
+            </a:pPr>
+            <a:r>
+              <a:rPr sz="1500" b="1" i="0">
+                <a:solidFill>
+                  <a:srgbClr val="15B8A6"/>
+                </a:solidFill>
+                <a:latin typeface="Segoe UI"/>
+              </a:rPr>
+              <a:t>▸  </a:t>
+            </a:r>
+            <a:r>
+              <a:rPr sz="1500" b="0" i="0">
+                <a:solidFill>
+                  <a:srgbClr val="1B2A38"/>
+                </a:solidFill>
+                <a:latin typeface="Segoe UI"/>
+              </a:rPr>
+              <a:t>Highest betweenness: Cape Coast (0.53), Takoradi, Kumasi Central</a:t>
+            </a:r>
+          </a:p>
+          <a:p>
+            <a:pPr algn="l">
+              <a:lnSpc>
+                <a:spcPct val="114000"/>
+              </a:lnSpc>
               <a:spcAft>
                 <a:spcPts val="700"/>
               </a:spcAft>
-              <a:defRPr sz="1700"/>
-            </a:pPr>
-            <a:r>
-              <a:t>- Highest betweenness: Cape Coast (0.53), Takoradi, Kumasi Central</a:t>
-            </a:r>
-          </a:p>
-          <a:p>
-            <a:pPr>
+              <a:buNone/>
+            </a:pPr>
+            <a:r>
+              <a:rPr sz="1500" b="1" i="0">
+                <a:solidFill>
+                  <a:srgbClr val="15B8A6"/>
+                </a:solidFill>
+                <a:latin typeface="Segoe UI"/>
+              </a:rPr>
+              <a:t>▸  </a:t>
+            </a:r>
+            <a:r>
+              <a:rPr sz="1500" b="0" i="0">
+                <a:solidFill>
+                  <a:srgbClr val="1B2A38"/>
+                </a:solidFill>
+                <a:latin typeface="Segoe UI"/>
+              </a:rPr>
+              <a:t>10 communities ≈ administrative regions + cross-border clusters</a:t>
+            </a:r>
+          </a:p>
+          <a:p>
+            <a:pPr algn="l">
+              <a:lnSpc>
+                <a:spcPct val="114000"/>
+              </a:lnSpc>
               <a:spcAft>
                 <a:spcPts val="700"/>
               </a:spcAft>
-              <a:defRPr sz="1700"/>
-            </a:pPr>
-            <a:r>
-              <a:t>- 10 communities ~ administrative regions + cross-border clusters</a:t>
-            </a:r>
-          </a:p>
-          <a:p>
-            <a:pPr>
-              <a:spcAft>
-                <a:spcPts val="700"/>
-              </a:spcAft>
-              <a:defRPr sz="1700"/>
-            </a:pPr>
-            <a:r>
-              <a:t>- 21 of 55 edges are bridges — global efficiency only 0.24</a:t>
+              <a:buNone/>
+            </a:pPr>
+            <a:r>
+              <a:rPr sz="1500" b="1" i="0">
+                <a:solidFill>
+                  <a:srgbClr val="15B8A6"/>
+                </a:solidFill>
+                <a:latin typeface="Segoe UI"/>
+              </a:rPr>
+              <a:t>▸  </a:t>
+            </a:r>
+            <a:r>
+              <a:rPr sz="1500" b="0" i="0">
+                <a:solidFill>
+                  <a:srgbClr val="1B2A38"/>
+                </a:solidFill>
+                <a:latin typeface="Segoe UI"/>
+              </a:rPr>
+              <a:t>21 of 55 edges are bridges — global efficiency only 0.24</a:t>
             </a:r>
           </a:p>
         </p:txBody>
@@ -7483,13 +10633,13 @@
         <p:spPr>
           <a:xfrm>
             <a:off x="0" y="0"/>
-            <a:ext cx="12191695" cy="960120"/>
+            <a:ext cx="146304" cy="6858000"/>
           </a:xfrm>
           <a:prstGeom prst="rect">
             <a:avLst/>
           </a:prstGeom>
           <a:solidFill>
-            <a:srgbClr val="F1F5FB"/>
+            <a:srgbClr val="15B8A6"/>
           </a:solidFill>
           <a:ln>
             <a:noFill/>
@@ -7520,20 +10670,106 @@
       </p:sp>
       <p:sp>
         <p:nvSpPr>
-          <p:cNvPr id="4" name="Rectangle 3"/>
+          <p:cNvPr id="4" name="TextBox 3"/>
+          <p:cNvSpPr txBox="1"/>
+          <p:nvPr/>
+        </p:nvSpPr>
+        <p:spPr>
+          <a:xfrm>
+            <a:off x="822960" y="475488"/>
+            <a:ext cx="10515600" cy="274320"/>
+          </a:xfrm>
+          <a:prstGeom prst="rect">
+            <a:avLst/>
+          </a:prstGeom>
+          <a:noFill/>
+        </p:spPr>
+        <p:txBody>
+          <a:bodyPr wrap="square" anchor="t" lIns="0" rIns="0" tIns="0" bIns="0">
+            <a:spAutoFit/>
+          </a:bodyPr>
+          <a:lstStyle/>
+          <a:p>
+            <a:pPr algn="l">
+              <a:lnSpc>
+                <a:spcPct val="112000"/>
+              </a:lnSpc>
+              <a:spcAft>
+                <a:spcPts val="600"/>
+              </a:spcAft>
+              <a:buNone/>
+            </a:pPr>
+            <a:r>
+              <a:rPr sz="1100" b="1" i="0">
+                <a:solidFill>
+                  <a:srgbClr val="15B8A6"/>
+                </a:solidFill>
+                <a:latin typeface="Segoe UI"/>
+              </a:rPr>
+              <a:t>PART 1  ·  GRID ANALYSIS</a:t>
+            </a:r>
+          </a:p>
+        </p:txBody>
+      </p:sp>
+      <p:sp>
+        <p:nvSpPr>
+          <p:cNvPr id="5" name="TextBox 4"/>
+          <p:cNvSpPr txBox="1"/>
+          <p:nvPr/>
+        </p:nvSpPr>
+        <p:spPr>
+          <a:xfrm>
+            <a:off x="822960" y="786384"/>
+            <a:ext cx="10515600" cy="822960"/>
+          </a:xfrm>
+          <a:prstGeom prst="rect">
+            <a:avLst/>
+          </a:prstGeom>
+          <a:noFill/>
+        </p:spPr>
+        <p:txBody>
+          <a:bodyPr wrap="square" anchor="t" lIns="0" rIns="0" tIns="0" bIns="0">
+            <a:spAutoFit/>
+          </a:bodyPr>
+          <a:lstStyle/>
+          <a:p>
+            <a:pPr algn="l">
+              <a:lnSpc>
+                <a:spcPct val="100000"/>
+              </a:lnSpc>
+              <a:spcAft>
+                <a:spcPts val="600"/>
+              </a:spcAft>
+              <a:buNone/>
+            </a:pPr>
+            <a:r>
+              <a:rPr sz="2700" b="1" i="0">
+                <a:solidFill>
+                  <a:srgbClr val="0E2942"/>
+                </a:solidFill>
+                <a:latin typeface="Segoe UI Semibold"/>
+              </a:rPr>
+              <a:t>N-1 contingency analysis</a:t>
+            </a:r>
+          </a:p>
+        </p:txBody>
+      </p:sp>
+      <p:sp>
+        <p:nvSpPr>
+          <p:cNvPr id="6" name="Rectangle 5"/>
           <p:cNvSpPr/>
           <p:nvPr/>
         </p:nvSpPr>
         <p:spPr>
           <a:xfrm>
-            <a:off x="0" y="960120"/>
-            <a:ext cx="12191695" cy="45720"/>
+            <a:off x="822960" y="1463040"/>
+            <a:ext cx="1234440" cy="54864"/>
           </a:xfrm>
           <a:prstGeom prst="rect">
             <a:avLst/>
           </a:prstGeom>
           <a:solidFill>
-            <a:srgbClr val="2563EB"/>
+            <a:srgbClr val="F59E0B"/>
           </a:solidFill>
           <a:ln>
             <a:noFill/>
@@ -7564,14 +10800,14 @@
       </p:sp>
       <p:sp>
         <p:nvSpPr>
-          <p:cNvPr id="5" name="TextBox 4"/>
+          <p:cNvPr id="7" name="TextBox 6"/>
           <p:cNvSpPr txBox="1"/>
           <p:nvPr/>
         </p:nvSpPr>
         <p:spPr>
           <a:xfrm>
-            <a:off x="640080" y="164592"/>
-            <a:ext cx="10972800" cy="685800"/>
+            <a:off x="822960" y="6382512"/>
+            <a:ext cx="7315200" cy="274320"/>
           </a:xfrm>
           <a:prstGeom prst="rect">
             <a:avLst/>
@@ -7579,34 +10815,42 @@
           <a:noFill/>
         </p:spPr>
         <p:txBody>
-          <a:bodyPr wrap="none">
+          <a:bodyPr wrap="square" anchor="t" lIns="0" rIns="0" tIns="0" bIns="0">
             <a:spAutoFit/>
           </a:bodyPr>
           <a:lstStyle/>
           <a:p>
-            <a:pPr>
-              <a:defRPr sz="2600" b="1">
-                <a:solidFill>
-                  <a:srgbClr val="1C2733"/>
-                </a:solidFill>
-              </a:defRPr>
-            </a:pPr>
-            <a:r>
-              <a:t>N-1 contingency analysis</a:t>
-            </a:r>
-          </a:p>
-        </p:txBody>
-      </p:sp>
-      <p:sp>
-        <p:nvSpPr>
-          <p:cNvPr id="6" name="TextBox 5"/>
+            <a:pPr algn="l">
+              <a:lnSpc>
+                <a:spcPct val="112000"/>
+              </a:lnSpc>
+              <a:spcAft>
+                <a:spcPts val="600"/>
+              </a:spcAft>
+              <a:buNone/>
+            </a:pPr>
+            <a:r>
+              <a:rPr sz="900" b="0" i="0">
+                <a:solidFill>
+                  <a:srgbClr val="5C6C7E"/>
+                </a:solidFill>
+                <a:latin typeface="Segoe UI"/>
+              </a:rPr>
+              <a:t>CS 112  ·  Cohort A — Team 3</a:t>
+            </a:r>
+          </a:p>
+        </p:txBody>
+      </p:sp>
+      <p:sp>
+        <p:nvSpPr>
+          <p:cNvPr id="8" name="TextBox 7"/>
           <p:cNvSpPr txBox="1"/>
           <p:nvPr/>
         </p:nvSpPr>
         <p:spPr>
           <a:xfrm>
-            <a:off x="640080" y="1280160"/>
-            <a:ext cx="10972800" cy="5120640"/>
+            <a:off x="10820095" y="6382512"/>
+            <a:ext cx="822960" cy="274320"/>
           </a:xfrm>
           <a:prstGeom prst="rect">
             <a:avLst/>
@@ -7614,83 +10858,86 @@
           <a:noFill/>
         </p:spPr>
         <p:txBody>
-          <a:bodyPr wrap="square" anchor="t">
+          <a:bodyPr wrap="square" anchor="t" lIns="0" rIns="0" tIns="0" bIns="0">
             <a:spAutoFit/>
           </a:bodyPr>
           <a:lstStyle/>
           <a:p>
-            <a:pPr>
+            <a:pPr algn="r">
+              <a:lnSpc>
+                <a:spcPct val="112000"/>
+              </a:lnSpc>
+              <a:spcAft>
+                <a:spcPts val="600"/>
+              </a:spcAft>
+              <a:buNone/>
+            </a:pPr>
+            <a:r>
+              <a:rPr sz="900" b="1" i="0">
+                <a:solidFill>
+                  <a:srgbClr val="5C6C7E"/>
+                </a:solidFill>
+                <a:latin typeface="Segoe UI"/>
+              </a:rPr>
+              <a:t>7</a:t>
+            </a:r>
+          </a:p>
+        </p:txBody>
+      </p:sp>
+      <p:sp>
+        <p:nvSpPr>
+          <p:cNvPr id="9" name="TextBox 8"/>
+          <p:cNvSpPr txBox="1"/>
+          <p:nvPr/>
+        </p:nvSpPr>
+        <p:spPr>
+          <a:xfrm>
+            <a:off x="822960" y="1874519"/>
+            <a:ext cx="10515600" cy="402336"/>
+          </a:xfrm>
+          <a:prstGeom prst="rect">
+            <a:avLst/>
+          </a:prstGeom>
+          <a:noFill/>
+        </p:spPr>
+        <p:txBody>
+          <a:bodyPr wrap="square" anchor="t" lIns="0" rIns="0" tIns="0" bIns="0">
+            <a:spAutoFit/>
+          </a:bodyPr>
+          <a:lstStyle/>
+          <a:p>
+            <a:pPr algn="l">
+              <a:lnSpc>
+                <a:spcPct val="114000"/>
+              </a:lnSpc>
               <a:spcAft>
                 <a:spcPts val="700"/>
               </a:spcAft>
-              <a:defRPr sz="1500" i="0">
-                <a:solidFill>
-                  <a:srgbClr val="1C2733"/>
-                </a:solidFill>
-              </a:defRPr>
-            </a:pPr>
-            <a:r>
+              <a:buNone/>
+            </a:pPr>
+            <a:r>
+              <a:rPr sz="1450" b="0" i="0">
+                <a:solidFill>
+                  <a:srgbClr val="1B2A38"/>
+                </a:solidFill>
+                <a:latin typeface="Segoe UI"/>
+              </a:rPr>
               <a:t>Remove one component, measure fragmentation.</a:t>
-            </a:r>
-          </a:p>
-          <a:p>
-            <a:pPr>
-              <a:spcAft>
-                <a:spcPts val="700"/>
-              </a:spcAft>
-              <a:defRPr sz="1500" i="0">
-                <a:solidFill>
-                  <a:srgbClr val="0D9488"/>
-                </a:solidFill>
-              </a:defRPr>
-            </a:pPr>
-            <a:r>
-              <a:t>This grid is radial-leaning — not topologically N-1 secure.</a:t>
-            </a:r>
-          </a:p>
-          <a:p>
-            <a:pPr>
-              <a:spcAft>
-                <a:spcPts val="700"/>
-              </a:spcAft>
-              <a:defRPr sz="1500" i="0">
-                <a:solidFill>
-                  <a:srgbClr val="0D9488"/>
-                </a:solidFill>
-              </a:defRPr>
-            </a:pPr>
-            <a:r>
-              <a:t>Recommendation: build loops around the bridge corridors.</a:t>
-            </a:r>
-          </a:p>
-          <a:p>
-            <a:pPr>
-              <a:spcAft>
-                <a:spcPts val="700"/>
-              </a:spcAft>
-              <a:defRPr sz="1500" i="1">
-                <a:solidFill>
-                  <a:srgbClr val="1C2733"/>
-                </a:solidFill>
-              </a:defRPr>
-            </a:pPr>
-            <a:r>
-              <a:t>(Graph topology only — ignores load flow, thermal limits, protection.)</a:t>
             </a:r>
           </a:p>
         </p:txBody>
       </p:sp>
       <p:graphicFrame>
         <p:nvGraphicFramePr>
-          <p:cNvPr id="7" name="Table 6"/>
+          <p:cNvPr id="10" name="Table 9"/>
           <p:cNvGraphicFramePr>
             <a:graphicFrameLocks noGrp="1"/>
           </p:cNvGraphicFramePr>
           <p:nvPr/>
         </p:nvGraphicFramePr>
         <p:xfrm>
-          <a:off x="640080" y="4023360"/>
-          <a:ext cx="10972800" cy="1828800"/>
+          <a:off x="822960" y="2386584"/>
+          <a:ext cx="10515600" cy="2011680"/>
         </p:xfrm>
         <a:graphic>
           <a:graphicData uri="http://schemas.openxmlformats.org/drawingml/2006/table">
@@ -7699,30 +10946,32 @@
                 <a:tableStyleId>{5C22544A-7EE6-4342-B048-85BDC9FD1C3A}</a:tableStyleId>
               </a:tblPr>
               <a:tblGrid>
-                <a:gridCol w="5486400"/>
-                <a:gridCol w="5486400"/>
+                <a:gridCol w="5257800"/>
+                <a:gridCol w="5257800"/>
               </a:tblGrid>
-              <a:tr h="365760">
+              <a:tr h="402336">
                 <a:tc>
                   <a:txBody>
                     <a:bodyPr/>
                     <a:lstStyle/>
                     <a:p>
                       <a:pPr>
-                        <a:defRPr sz="1200" b="1">
+                        <a:buNone/>
+                      </a:pPr>
+                      <a:r>
+                        <a:rPr sz="1200" b="1">
                           <a:solidFill>
                             <a:srgbClr val="FFFFFF"/>
                           </a:solidFill>
-                        </a:defRPr>
-                      </a:pPr>
-                      <a:r>
+                          <a:latin typeface="Segoe UI"/>
+                        </a:rPr>
                         <a:t>Remove</a:t>
                       </a:r>
                     </a:p>
                   </a:txBody>
-                  <a:tcPr>
+                  <a:tcPr marL="128016" marR="128016" marT="36576" marB="36576" anchor="ctr">
                     <a:solidFill>
-                      <a:srgbClr val="2563EB"/>
+                      <a:srgbClr val="0E2942"/>
                     </a:solidFill>
                   </a:tcPr>
                 </a:tc>
@@ -7732,39 +10981,47 @@
                     <a:lstStyle/>
                     <a:p>
                       <a:pPr>
-                        <a:defRPr sz="1200" b="1">
+                        <a:buNone/>
+                      </a:pPr>
+                      <a:r>
+                        <a:rPr sz="1200" b="1">
                           <a:solidFill>
                             <a:srgbClr val="FFFFFF"/>
                           </a:solidFill>
-                        </a:defRPr>
-                      </a:pPr>
-                      <a:r>
+                          <a:latin typeface="Segoe UI"/>
+                        </a:rPr>
                         <a:t>Result</a:t>
                       </a:r>
                     </a:p>
                   </a:txBody>
-                  <a:tcPr>
+                  <a:tcPr marL="128016" marR="128016" marT="36576" marB="36576" anchor="ctr">
                     <a:solidFill>
-                      <a:srgbClr val="2563EB"/>
+                      <a:srgbClr val="0E2942"/>
                     </a:solidFill>
                   </a:tcPr>
                 </a:tc>
               </a:tr>
-              <a:tr h="365760">
+              <a:tr h="402336">
                 <a:tc>
                   <a:txBody>
                     <a:bodyPr/>
                     <a:lstStyle/>
                     <a:p>
                       <a:pPr>
-                        <a:defRPr sz="1200" b="0"/>
+                        <a:buNone/>
                       </a:pPr>
                       <a:r>
+                        <a:rPr sz="1150" b="0">
+                          <a:solidFill>
+                            <a:srgbClr val="1B2A38"/>
+                          </a:solidFill>
+                          <a:latin typeface="Segoe UI"/>
+                        </a:rPr>
                         <a:t>Kumasi Central substation</a:t>
                       </a:r>
                     </a:p>
                   </a:txBody>
-                  <a:tcPr>
+                  <a:tcPr marL="128016" marR="128016" marT="36576" marB="36576" anchor="ctr">
                     <a:solidFill>
                       <a:srgbClr val="FFFFFF"/>
                     </a:solidFill>
@@ -7776,37 +11033,49 @@
                     <a:lstStyle/>
                     <a:p>
                       <a:pPr>
-                        <a:defRPr sz="1200" b="0"/>
+                        <a:buNone/>
                       </a:pPr>
                       <a:r>
+                        <a:rPr sz="1150" b="0">
+                          <a:solidFill>
+                            <a:srgbClr val="1B2A38"/>
+                          </a:solidFill>
+                          <a:latin typeface="Segoe UI"/>
+                        </a:rPr>
                         <a:t>+3 fragments, 15 substations cut from main grid</a:t>
                       </a:r>
                     </a:p>
                   </a:txBody>
-                  <a:tcPr>
+                  <a:tcPr marL="128016" marR="128016" marT="36576" marB="36576" anchor="ctr">
                     <a:solidFill>
                       <a:srgbClr val="FFFFFF"/>
                     </a:solidFill>
                   </a:tcPr>
                 </a:tc>
               </a:tr>
-              <a:tr h="365760">
+              <a:tr h="402336">
                 <a:tc>
                   <a:txBody>
                     <a:bodyPr/>
                     <a:lstStyle/>
                     <a:p>
                       <a:pPr>
-                        <a:defRPr sz="1200" b="0"/>
+                        <a:buNone/>
                       </a:pPr>
                       <a:r>
+                        <a:rPr sz="1150" b="0">
+                          <a:solidFill>
+                            <a:srgbClr val="1B2A38"/>
+                          </a:solidFill>
+                          <a:latin typeface="Segoe UI"/>
+                        </a:rPr>
                         <a:t>Cape Coast / Takoradi</a:t>
                       </a:r>
                     </a:p>
                   </a:txBody>
-                  <a:tcPr>
+                  <a:tcPr marL="128016" marR="128016" marT="36576" marB="36576" anchor="ctr">
                     <a:solidFill>
-                      <a:srgbClr val="F1F5FB"/>
+                      <a:srgbClr val="ECF2F8"/>
                     </a:solidFill>
                   </a:tcPr>
                 </a:tc>
@@ -7816,35 +11085,47 @@
                     <a:lstStyle/>
                     <a:p>
                       <a:pPr>
-                        <a:defRPr sz="1200" b="0"/>
+                        <a:buNone/>
                       </a:pPr>
                       <a:r>
+                        <a:rPr sz="1150" b="0">
+                          <a:solidFill>
+                            <a:srgbClr val="1B2A38"/>
+                          </a:solidFill>
+                          <a:latin typeface="Segoe UI"/>
+                        </a:rPr>
                         <a:t>2 fragments, ~20 substations cut</a:t>
                       </a:r>
                     </a:p>
                   </a:txBody>
-                  <a:tcPr>
+                  <a:tcPr marL="128016" marR="128016" marT="36576" marB="36576" anchor="ctr">
                     <a:solidFill>
-                      <a:srgbClr val="F1F5FB"/>
+                      <a:srgbClr val="ECF2F8"/>
                     </a:solidFill>
                   </a:tcPr>
                 </a:tc>
               </a:tr>
-              <a:tr h="365760">
+              <a:tr h="402336">
                 <a:tc>
                   <a:txBody>
                     <a:bodyPr/>
                     <a:lstStyle/>
                     <a:p>
                       <a:pPr>
-                        <a:defRPr sz="1200" b="0"/>
+                        <a:buNone/>
                       </a:pPr>
                       <a:r>
+                        <a:rPr sz="1150" b="0">
+                          <a:solidFill>
+                            <a:srgbClr val="1B2A38"/>
+                          </a:solidFill>
+                          <a:latin typeface="Segoe UI"/>
+                        </a:rPr>
                         <a:t>Mallam / Legon (peripheral)</a:t>
                       </a:r>
                     </a:p>
                   </a:txBody>
-                  <a:tcPr>
+                  <a:tcPr marL="128016" marR="128016" marT="36576" marB="36576" anchor="ctr">
                     <a:solidFill>
                       <a:srgbClr val="FFFFFF"/>
                     </a:solidFill>
@@ -7856,37 +11137,49 @@
                     <a:lstStyle/>
                     <a:p>
                       <a:pPr>
-                        <a:defRPr sz="1200" b="0"/>
+                        <a:buNone/>
                       </a:pPr>
                       <a:r>
+                        <a:rPr sz="1150" b="0">
+                          <a:solidFill>
+                            <a:srgbClr val="1B2A38"/>
+                          </a:solidFill>
+                          <a:latin typeface="Segoe UI"/>
+                        </a:rPr>
                         <a:t>no extra fragmentation</a:t>
                       </a:r>
                     </a:p>
                   </a:txBody>
-                  <a:tcPr>
+                  <a:tcPr marL="128016" marR="128016" marT="36576" marB="36576" anchor="ctr">
                     <a:solidFill>
                       <a:srgbClr val="FFFFFF"/>
                     </a:solidFill>
                   </a:tcPr>
                 </a:tc>
               </a:tr>
-              <a:tr h="365760">
+              <a:tr h="402336">
                 <a:tc>
                   <a:txBody>
                     <a:bodyPr/>
                     <a:lstStyle/>
                     <a:p>
                       <a:pPr>
-                        <a:defRPr sz="1200" b="0"/>
+                        <a:buNone/>
                       </a:pPr>
                       <a:r>
+                        <a:rPr sz="1150" b="1">
+                          <a:solidFill>
+                            <a:srgbClr val="1B2A38"/>
+                          </a:solidFill>
+                          <a:latin typeface="Segoe UI"/>
+                        </a:rPr>
                         <a:t>21 of 55 single lines</a:t>
                       </a:r>
                     </a:p>
                   </a:txBody>
-                  <a:tcPr>
+                  <a:tcPr marL="128016" marR="128016" marT="36576" marB="36576" anchor="ctr">
                     <a:solidFill>
-                      <a:srgbClr val="F1F5FB"/>
+                      <a:srgbClr val="ECF2F8"/>
                     </a:solidFill>
                   </a:tcPr>
                 </a:tc>
@@ -7896,16 +11189,22 @@
                     <a:lstStyle/>
                     <a:p>
                       <a:pPr>
-                        <a:defRPr sz="1200" b="0"/>
+                        <a:buNone/>
                       </a:pPr>
                       <a:r>
+                        <a:rPr sz="1150" b="1">
+                          <a:solidFill>
+                            <a:srgbClr val="1B2A38"/>
+                          </a:solidFill>
+                          <a:latin typeface="Segoe UI"/>
+                        </a:rPr>
                         <a:t>split the network</a:t>
                       </a:r>
                     </a:p>
                   </a:txBody>
-                  <a:tcPr>
+                  <a:tcPr marL="128016" marR="128016" marT="36576" marB="36576" anchor="ctr">
                     <a:solidFill>
-                      <a:srgbClr val="F1F5FB"/>
+                      <a:srgbClr val="ECF2F8"/>
                     </a:solidFill>
                   </a:tcPr>
                 </a:tc>
@@ -7914,6 +11213,200 @@
           </a:graphicData>
         </a:graphic>
       </p:graphicFrame>
+      <p:sp>
+        <p:nvSpPr>
+          <p:cNvPr id="11" name="Rectangle 10"/>
+          <p:cNvSpPr/>
+          <p:nvPr/>
+        </p:nvSpPr>
+        <p:spPr>
+          <a:xfrm>
+            <a:off x="822960" y="4581144"/>
+            <a:ext cx="10515600" cy="585216"/>
+          </a:xfrm>
+          <a:prstGeom prst="rect">
+            <a:avLst/>
+          </a:prstGeom>
+          <a:solidFill>
+            <a:srgbClr val="ECF2F8"/>
+          </a:solidFill>
+          <a:ln>
+            <a:noFill/>
+          </a:ln>
+          <a:effectLst/>
+        </p:spPr>
+        <p:style>
+          <a:lnRef idx="1">
+            <a:schemeClr val="accent1"/>
+          </a:lnRef>
+          <a:fillRef idx="3">
+            <a:schemeClr val="accent1"/>
+          </a:fillRef>
+          <a:effectRef idx="2">
+            <a:schemeClr val="accent1"/>
+          </a:effectRef>
+          <a:fontRef idx="minor">
+            <a:schemeClr val="lt1"/>
+          </a:fontRef>
+        </p:style>
+        <p:txBody>
+          <a:bodyPr rtlCol="0" anchor="ctr"/>
+          <a:lstStyle/>
+          <a:p>
+            <a:pPr algn="ctr"/>
+          </a:p>
+        </p:txBody>
+      </p:sp>
+      <p:sp>
+        <p:nvSpPr>
+          <p:cNvPr id="12" name="Rectangle 11"/>
+          <p:cNvSpPr/>
+          <p:nvPr/>
+        </p:nvSpPr>
+        <p:spPr>
+          <a:xfrm>
+            <a:off x="822960" y="4581144"/>
+            <a:ext cx="64008" cy="585216"/>
+          </a:xfrm>
+          <a:prstGeom prst="rect">
+            <a:avLst/>
+          </a:prstGeom>
+          <a:solidFill>
+            <a:srgbClr val="15B8A6"/>
+          </a:solidFill>
+          <a:ln>
+            <a:noFill/>
+          </a:ln>
+          <a:effectLst/>
+        </p:spPr>
+        <p:style>
+          <a:lnRef idx="1">
+            <a:schemeClr val="accent1"/>
+          </a:lnRef>
+          <a:fillRef idx="3">
+            <a:schemeClr val="accent1"/>
+          </a:fillRef>
+          <a:effectRef idx="2">
+            <a:schemeClr val="accent1"/>
+          </a:effectRef>
+          <a:fontRef idx="minor">
+            <a:schemeClr val="lt1"/>
+          </a:fontRef>
+        </p:style>
+        <p:txBody>
+          <a:bodyPr rtlCol="0" anchor="ctr"/>
+          <a:lstStyle/>
+          <a:p>
+            <a:pPr algn="ctr"/>
+          </a:p>
+        </p:txBody>
+      </p:sp>
+      <p:sp>
+        <p:nvSpPr>
+          <p:cNvPr id="13" name="TextBox 12"/>
+          <p:cNvSpPr txBox="1"/>
+          <p:nvPr/>
+        </p:nvSpPr>
+        <p:spPr>
+          <a:xfrm>
+            <a:off x="1078992" y="4581144"/>
+            <a:ext cx="10058400" cy="585216"/>
+          </a:xfrm>
+          <a:prstGeom prst="rect">
+            <a:avLst/>
+          </a:prstGeom>
+          <a:noFill/>
+        </p:spPr>
+        <p:txBody>
+          <a:bodyPr wrap="square" anchor="ctr" lIns="0" rIns="0" tIns="0" bIns="0">
+            <a:spAutoFit/>
+          </a:bodyPr>
+          <a:lstStyle/>
+          <a:p>
+            <a:pPr algn="l">
+              <a:lnSpc>
+                <a:spcPct val="115000"/>
+              </a:lnSpc>
+              <a:spcAft>
+                <a:spcPts val="600"/>
+              </a:spcAft>
+              <a:buNone/>
+            </a:pPr>
+            <a:r>
+              <a:rPr sz="1350" b="1" i="0">
+                <a:solidFill>
+                  <a:srgbClr val="0E2942"/>
+                </a:solidFill>
+                <a:latin typeface="Segoe UI"/>
+              </a:rPr>
+              <a:t>This grid is radial-leaning — not topologically N-1 secure.</a:t>
+            </a:r>
+          </a:p>
+        </p:txBody>
+      </p:sp>
+      <p:sp>
+        <p:nvSpPr>
+          <p:cNvPr id="14" name="TextBox 13"/>
+          <p:cNvSpPr txBox="1"/>
+          <p:nvPr/>
+        </p:nvSpPr>
+        <p:spPr>
+          <a:xfrm>
+            <a:off x="822960" y="5330952"/>
+            <a:ext cx="10515600" cy="713232"/>
+          </a:xfrm>
+          <a:prstGeom prst="rect">
+            <a:avLst/>
+          </a:prstGeom>
+          <a:noFill/>
+        </p:spPr>
+        <p:txBody>
+          <a:bodyPr wrap="square" anchor="t" lIns="0" rIns="0" tIns="0" bIns="0">
+            <a:spAutoFit/>
+          </a:bodyPr>
+          <a:lstStyle/>
+          <a:p>
+            <a:pPr algn="l">
+              <a:lnSpc>
+                <a:spcPct val="114000"/>
+              </a:lnSpc>
+              <a:spcAft>
+                <a:spcPts val="700"/>
+              </a:spcAft>
+              <a:buNone/>
+            </a:pPr>
+            <a:r>
+              <a:rPr sz="1450" b="0" i="0">
+                <a:solidFill>
+                  <a:srgbClr val="1B2A38"/>
+                </a:solidFill>
+                <a:latin typeface="Segoe UI"/>
+              </a:rPr>
+              <a:t>Recommendation: build loops around the bridge corridors.</a:t>
+            </a:r>
+          </a:p>
+          <a:p>
+            <a:pPr algn="l">
+              <a:lnSpc>
+                <a:spcPct val="114000"/>
+              </a:lnSpc>
+              <a:spcAft>
+                <a:spcPts val="400"/>
+              </a:spcAft>
+              <a:buNone/>
+            </a:pPr>
+            <a:r>
+              <a:rPr sz="1200" b="0" i="1">
+                <a:solidFill>
+                  <a:srgbClr val="5C6C7E"/>
+                </a:solidFill>
+                <a:latin typeface="Segoe UI"/>
+              </a:rPr>
+              <a:t>(Graph topology only — ignores load flow, thermal limits, protection.)</a:t>
+            </a:r>
+          </a:p>
+        </p:txBody>
+      </p:sp>
     </p:spTree>
   </p:cSld>
   <p:clrMapOvr>
@@ -7985,13 +11478,13 @@
         <p:spPr>
           <a:xfrm>
             <a:off x="0" y="0"/>
-            <a:ext cx="12191695" cy="960120"/>
+            <a:ext cx="146304" cy="6858000"/>
           </a:xfrm>
           <a:prstGeom prst="rect">
             <a:avLst/>
           </a:prstGeom>
           <a:solidFill>
-            <a:srgbClr val="F1F5FB"/>
+            <a:srgbClr val="15B8A6"/>
           </a:solidFill>
           <a:ln>
             <a:noFill/>
@@ -8022,20 +11515,106 @@
       </p:sp>
       <p:sp>
         <p:nvSpPr>
-          <p:cNvPr id="4" name="Rectangle 3"/>
+          <p:cNvPr id="4" name="TextBox 3"/>
+          <p:cNvSpPr txBox="1"/>
+          <p:nvPr/>
+        </p:nvSpPr>
+        <p:spPr>
+          <a:xfrm>
+            <a:off x="822960" y="475488"/>
+            <a:ext cx="10515600" cy="274320"/>
+          </a:xfrm>
+          <a:prstGeom prst="rect">
+            <a:avLst/>
+          </a:prstGeom>
+          <a:noFill/>
+        </p:spPr>
+        <p:txBody>
+          <a:bodyPr wrap="square" anchor="t" lIns="0" rIns="0" tIns="0" bIns="0">
+            <a:spAutoFit/>
+          </a:bodyPr>
+          <a:lstStyle/>
+          <a:p>
+            <a:pPr algn="l">
+              <a:lnSpc>
+                <a:spcPct val="112000"/>
+              </a:lnSpc>
+              <a:spcAft>
+                <a:spcPts val="600"/>
+              </a:spcAft>
+              <a:buNone/>
+            </a:pPr>
+            <a:r>
+              <a:rPr sz="1100" b="1" i="0">
+                <a:solidFill>
+                  <a:srgbClr val="15B8A6"/>
+                </a:solidFill>
+                <a:latin typeface="Segoe UI"/>
+              </a:rPr>
+              <a:t>PART 1  ·  GRID ANALYSIS</a:t>
+            </a:r>
+          </a:p>
+        </p:txBody>
+      </p:sp>
+      <p:sp>
+        <p:nvSpPr>
+          <p:cNvPr id="5" name="TextBox 4"/>
+          <p:cNvSpPr txBox="1"/>
+          <p:nvPr/>
+        </p:nvSpPr>
+        <p:spPr>
+          <a:xfrm>
+            <a:off x="822960" y="786384"/>
+            <a:ext cx="10515600" cy="822960"/>
+          </a:xfrm>
+          <a:prstGeom prst="rect">
+            <a:avLst/>
+          </a:prstGeom>
+          <a:noFill/>
+        </p:spPr>
+        <p:txBody>
+          <a:bodyPr wrap="square" anchor="t" lIns="0" rIns="0" tIns="0" bIns="0">
+            <a:spAutoFit/>
+          </a:bodyPr>
+          <a:lstStyle/>
+          <a:p>
+            <a:pPr algn="l">
+              <a:lnSpc>
+                <a:spcPct val="100000"/>
+              </a:lnSpc>
+              <a:spcAft>
+                <a:spcPts val="600"/>
+              </a:spcAft>
+              <a:buNone/>
+            </a:pPr>
+            <a:r>
+              <a:rPr sz="2700" b="1" i="0">
+                <a:solidFill>
+                  <a:srgbClr val="0E2942"/>
+                </a:solidFill>
+                <a:latin typeface="Segoe UI Semibold"/>
+              </a:rPr>
+              <a:t>Visualisation</a:t>
+            </a:r>
+          </a:p>
+        </p:txBody>
+      </p:sp>
+      <p:sp>
+        <p:nvSpPr>
+          <p:cNvPr id="6" name="Rectangle 5"/>
           <p:cNvSpPr/>
           <p:nvPr/>
         </p:nvSpPr>
         <p:spPr>
           <a:xfrm>
-            <a:off x="0" y="960120"/>
-            <a:ext cx="12191695" cy="45720"/>
+            <a:off x="822960" y="1463040"/>
+            <a:ext cx="1234440" cy="54864"/>
           </a:xfrm>
           <a:prstGeom prst="rect">
             <a:avLst/>
           </a:prstGeom>
           <a:solidFill>
-            <a:srgbClr val="2563EB"/>
+            <a:srgbClr val="F59E0B"/>
           </a:solidFill>
           <a:ln>
             <a:noFill/>
@@ -8066,14 +11645,14 @@
       </p:sp>
       <p:sp>
         <p:nvSpPr>
-          <p:cNvPr id="5" name="TextBox 4"/>
+          <p:cNvPr id="7" name="TextBox 6"/>
           <p:cNvSpPr txBox="1"/>
           <p:nvPr/>
         </p:nvSpPr>
         <p:spPr>
           <a:xfrm>
-            <a:off x="640080" y="164592"/>
-            <a:ext cx="10972800" cy="685800"/>
+            <a:off x="822960" y="6382512"/>
+            <a:ext cx="7315200" cy="274320"/>
           </a:xfrm>
           <a:prstGeom prst="rect">
             <a:avLst/>
@@ -8081,34 +11660,42 @@
           <a:noFill/>
         </p:spPr>
         <p:txBody>
-          <a:bodyPr wrap="none">
+          <a:bodyPr wrap="square" anchor="t" lIns="0" rIns="0" tIns="0" bIns="0">
             <a:spAutoFit/>
           </a:bodyPr>
           <a:lstStyle/>
           <a:p>
-            <a:pPr>
-              <a:defRPr sz="2600" b="1">
-                <a:solidFill>
-                  <a:srgbClr val="1C2733"/>
-                </a:solidFill>
-              </a:defRPr>
-            </a:pPr>
-            <a:r>
-              <a:t>Visualisation</a:t>
-            </a:r>
-          </a:p>
-        </p:txBody>
-      </p:sp>
-      <p:sp>
-        <p:nvSpPr>
-          <p:cNvPr id="6" name="TextBox 5"/>
+            <a:pPr algn="l">
+              <a:lnSpc>
+                <a:spcPct val="112000"/>
+              </a:lnSpc>
+              <a:spcAft>
+                <a:spcPts val="600"/>
+              </a:spcAft>
+              <a:buNone/>
+            </a:pPr>
+            <a:r>
+              <a:rPr sz="900" b="0" i="0">
+                <a:solidFill>
+                  <a:srgbClr val="5C6C7E"/>
+                </a:solidFill>
+                <a:latin typeface="Segoe UI"/>
+              </a:rPr>
+              <a:t>CS 112  ·  Cohort A — Team 3</a:t>
+            </a:r>
+          </a:p>
+        </p:txBody>
+      </p:sp>
+      <p:sp>
+        <p:nvSpPr>
+          <p:cNvPr id="8" name="TextBox 7"/>
           <p:cNvSpPr txBox="1"/>
           <p:nvPr/>
         </p:nvSpPr>
         <p:spPr>
           <a:xfrm>
-            <a:off x="640080" y="1280160"/>
-            <a:ext cx="6766560" cy="5120640"/>
+            <a:off x="10820095" y="6382512"/>
+            <a:ext cx="822960" cy="274320"/>
           </a:xfrm>
           <a:prstGeom prst="rect">
             <a:avLst/>
@@ -8116,59 +11703,218 @@
           <a:noFill/>
         </p:spPr>
         <p:txBody>
-          <a:bodyPr wrap="square" anchor="t">
+          <a:bodyPr wrap="square" anchor="t" lIns="0" rIns="0" tIns="0" bIns="0">
             <a:spAutoFit/>
           </a:bodyPr>
           <a:lstStyle/>
           <a:p>
-            <a:pPr>
+            <a:pPr algn="r">
+              <a:lnSpc>
+                <a:spcPct val="112000"/>
+              </a:lnSpc>
+              <a:spcAft>
+                <a:spcPts val="600"/>
+              </a:spcAft>
+              <a:buNone/>
+            </a:pPr>
+            <a:r>
+              <a:rPr sz="900" b="1" i="0">
+                <a:solidFill>
+                  <a:srgbClr val="5C6C7E"/>
+                </a:solidFill>
+                <a:latin typeface="Segoe UI"/>
+              </a:rPr>
+              <a:t>8</a:t>
+            </a:r>
+          </a:p>
+        </p:txBody>
+      </p:sp>
+      <p:sp>
+        <p:nvSpPr>
+          <p:cNvPr id="9" name="TextBox 8"/>
+          <p:cNvSpPr txBox="1"/>
+          <p:nvPr/>
+        </p:nvSpPr>
+        <p:spPr>
+          <a:xfrm>
+            <a:off x="822960" y="2331720"/>
+            <a:ext cx="6309360" cy="1956816"/>
+          </a:xfrm>
+          <a:prstGeom prst="rect">
+            <a:avLst/>
+          </a:prstGeom>
+          <a:noFill/>
+        </p:spPr>
+        <p:txBody>
+          <a:bodyPr wrap="square" anchor="t" lIns="0" rIns="0" tIns="0" bIns="0">
+            <a:spAutoFit/>
+          </a:bodyPr>
+          <a:lstStyle/>
+          <a:p>
+            <a:pPr algn="l">
+              <a:lnSpc>
+                <a:spcPct val="114000"/>
+              </a:lnSpc>
               <a:spcAft>
                 <a:spcPts val="700"/>
               </a:spcAft>
-              <a:defRPr sz="1700"/>
-            </a:pPr>
-            <a:r>
-              <a:t>- Static network diagram (geographic, node size ~ capacity)</a:t>
-            </a:r>
-          </a:p>
-          <a:p>
-            <a:pPr>
+              <a:buNone/>
+            </a:pPr>
+            <a:r>
+              <a:rPr sz="1500" b="1" i="0">
+                <a:solidFill>
+                  <a:srgbClr val="15B8A6"/>
+                </a:solidFill>
+                <a:latin typeface="Segoe UI"/>
+              </a:rPr>
+              <a:t>▸  </a:t>
+            </a:r>
+            <a:r>
+              <a:rPr sz="1500" b="0" i="0">
+                <a:solidFill>
+                  <a:srgbClr val="1B2A38"/>
+                </a:solidFill>
+                <a:latin typeface="Segoe UI"/>
+              </a:rPr>
+              <a:t>Static network diagram (geographic, node size ∝ capacity)</a:t>
+            </a:r>
+          </a:p>
+          <a:p>
+            <a:pPr algn="l">
+              <a:lnSpc>
+                <a:spcPct val="114000"/>
+              </a:lnSpc>
               <a:spcAft>
                 <a:spcPts val="700"/>
               </a:spcAft>
-              <a:defRPr sz="1700"/>
-            </a:pPr>
-            <a:r>
-              <a:t>- Interactive Folium map — substation + line layers, voltage colour-coding, maintenance highlighting</a:t>
-            </a:r>
-          </a:p>
-          <a:p>
-            <a:pPr>
+              <a:buNone/>
+            </a:pPr>
+            <a:r>
+              <a:rPr sz="1500" b="1" i="0">
+                <a:solidFill>
+                  <a:srgbClr val="15B8A6"/>
+                </a:solidFill>
+                <a:latin typeface="Segoe UI"/>
+              </a:rPr>
+              <a:t>▸  </a:t>
+            </a:r>
+            <a:r>
+              <a:rPr sz="1500" b="0" i="0">
+                <a:solidFill>
+                  <a:srgbClr val="1B2A38"/>
+                </a:solidFill>
+                <a:latin typeface="Segoe UI"/>
+              </a:rPr>
+              <a:t>Interactive Folium map — substation + line layers, voltage colour-coding, maintenance highlighting</a:t>
+            </a:r>
+          </a:p>
+          <a:p>
+            <a:pPr algn="l">
+              <a:lnSpc>
+                <a:spcPct val="114000"/>
+              </a:lnSpc>
               <a:spcAft>
                 <a:spcPts val="700"/>
               </a:spcAft>
-              <a:defRPr sz="1700"/>
-            </a:pPr>
-            <a:r>
-              <a:t>- Plotly scatter-geo map</a:t>
-            </a:r>
-          </a:p>
-          <a:p>
-            <a:pPr>
+              <a:buNone/>
+            </a:pPr>
+            <a:r>
+              <a:rPr sz="1500" b="1" i="0">
+                <a:solidFill>
+                  <a:srgbClr val="15B8A6"/>
+                </a:solidFill>
+                <a:latin typeface="Segoe UI"/>
+              </a:rPr>
+              <a:t>▸  </a:t>
+            </a:r>
+            <a:r>
+              <a:rPr sz="1500" b="0" i="0">
+                <a:solidFill>
+                  <a:srgbClr val="1B2A38"/>
+                </a:solidFill>
+                <a:latin typeface="Segoe UI"/>
+              </a:rPr>
+              <a:t>Plotly scatter-geo map</a:t>
+            </a:r>
+          </a:p>
+          <a:p>
+            <a:pPr algn="l">
+              <a:lnSpc>
+                <a:spcPct val="114000"/>
+              </a:lnSpc>
               <a:spcAft>
                 <a:spcPts val="700"/>
               </a:spcAft>
-              <a:defRPr sz="1700"/>
-            </a:pPr>
-            <a:r>
-              <a:t>- Streamlit dashboard — Overview / Network / Geography / Reliability / Search</a:t>
-            </a:r>
+              <a:buNone/>
+            </a:pPr>
+            <a:r>
+              <a:rPr sz="1500" b="1" i="0">
+                <a:solidFill>
+                  <a:srgbClr val="15B8A6"/>
+                </a:solidFill>
+                <a:latin typeface="Segoe UI"/>
+              </a:rPr>
+              <a:t>▸  </a:t>
+            </a:r>
+            <a:r>
+              <a:rPr sz="1500" b="0" i="0">
+                <a:solidFill>
+                  <a:srgbClr val="1B2A38"/>
+                </a:solidFill>
+                <a:latin typeface="Segoe UI"/>
+              </a:rPr>
+              <a:t>Streamlit dashboard — Overview / Network / Geography / Reliability / Search</a:t>
+            </a:r>
+          </a:p>
+        </p:txBody>
+      </p:sp>
+      <p:sp>
+        <p:nvSpPr>
+          <p:cNvPr id="11" name="Rectangle 10"/>
+          <p:cNvSpPr/>
+          <p:nvPr/>
+        </p:nvSpPr>
+        <p:spPr>
+          <a:xfrm>
+            <a:off x="7406640" y="1920240"/>
+            <a:ext cx="4114800" cy="3805311"/>
+          </a:xfrm>
+          <a:prstGeom prst="rect">
+            <a:avLst/>
+          </a:prstGeom>
+          <a:solidFill>
+            <a:srgbClr val="ECF2F8"/>
+          </a:solidFill>
+          <a:ln>
+            <a:noFill/>
+          </a:ln>
+          <a:effectLst/>
+        </p:spPr>
+        <p:style>
+          <a:lnRef idx="1">
+            <a:schemeClr val="accent1"/>
+          </a:lnRef>
+          <a:fillRef idx="3">
+            <a:schemeClr val="accent1"/>
+          </a:fillRef>
+          <a:effectRef idx="2">
+            <a:schemeClr val="accent1"/>
+          </a:effectRef>
+          <a:fontRef idx="minor">
+            <a:schemeClr val="lt1"/>
+          </a:fontRef>
+        </p:style>
+        <p:txBody>
+          <a:bodyPr rtlCol="0" anchor="ctr"/>
+          <a:lstStyle/>
+          <a:p>
+            <a:pPr algn="ctr"/>
           </a:p>
         </p:txBody>
       </p:sp>
       <p:pic>
         <p:nvPicPr>
-          <p:cNvPr id="7" name="Picture 6" descr="network_graph.png"/>
+          <p:cNvPr id="10" name="Picture 9" descr="network_graph.png"/>
           <p:cNvPicPr>
             <a:picLocks noChangeAspect="1"/>
           </p:cNvPicPr>
@@ -8182,7 +11928,7 @@
         </p:blipFill>
         <p:spPr>
           <a:xfrm>
-            <a:off x="7680960" y="1371600"/>
+            <a:off x="7452360" y="1965960"/>
             <a:ext cx="4023360" cy="3713871"/>
           </a:xfrm>
           <a:prstGeom prst="rect">
@@ -8190,6 +11936,49 @@
           </a:prstGeom>
         </p:spPr>
       </p:pic>
+      <p:sp>
+        <p:nvSpPr>
+          <p:cNvPr id="12" name="TextBox 11"/>
+          <p:cNvSpPr txBox="1"/>
+          <p:nvPr/>
+        </p:nvSpPr>
+        <p:spPr>
+          <a:xfrm>
+            <a:off x="7452360" y="5789559"/>
+            <a:ext cx="4023360" cy="274320"/>
+          </a:xfrm>
+          <a:prstGeom prst="rect">
+            <a:avLst/>
+          </a:prstGeom>
+          <a:noFill/>
+        </p:spPr>
+        <p:txBody>
+          <a:bodyPr wrap="square" anchor="t" lIns="0" rIns="0" tIns="0" bIns="0">
+            <a:spAutoFit/>
+          </a:bodyPr>
+          <a:lstStyle/>
+          <a:p>
+            <a:pPr algn="l">
+              <a:lnSpc>
+                <a:spcPct val="112000"/>
+              </a:lnSpc>
+              <a:spcAft>
+                <a:spcPts val="600"/>
+              </a:spcAft>
+              <a:buNone/>
+            </a:pPr>
+            <a:r>
+              <a:rPr sz="900" b="0" i="1">
+                <a:solidFill>
+                  <a:srgbClr val="5C6C7E"/>
+                </a:solidFill>
+                <a:latin typeface="Segoe UI"/>
+              </a:rPr>
+              <a:t>network_graph.png</a:t>
+            </a:r>
+          </a:p>
+        </p:txBody>
+      </p:sp>
     </p:spTree>
   </p:cSld>
   <p:clrMapOvr>
@@ -8261,13 +12050,13 @@
         <p:spPr>
           <a:xfrm>
             <a:off x="0" y="0"/>
-            <a:ext cx="12191695" cy="960120"/>
+            <a:ext cx="146304" cy="6858000"/>
           </a:xfrm>
           <a:prstGeom prst="rect">
             <a:avLst/>
           </a:prstGeom>
           <a:solidFill>
-            <a:srgbClr val="F1F5FB"/>
+            <a:srgbClr val="15B8A6"/>
           </a:solidFill>
           <a:ln>
             <a:noFill/>
@@ -8298,20 +12087,106 @@
       </p:sp>
       <p:sp>
         <p:nvSpPr>
-          <p:cNvPr id="4" name="Rectangle 3"/>
+          <p:cNvPr id="4" name="TextBox 3"/>
+          <p:cNvSpPr txBox="1"/>
+          <p:nvPr/>
+        </p:nvSpPr>
+        <p:spPr>
+          <a:xfrm>
+            <a:off x="822960" y="475488"/>
+            <a:ext cx="10515600" cy="274320"/>
+          </a:xfrm>
+          <a:prstGeom prst="rect">
+            <a:avLst/>
+          </a:prstGeom>
+          <a:noFill/>
+        </p:spPr>
+        <p:txBody>
+          <a:bodyPr wrap="square" anchor="t" lIns="0" rIns="0" tIns="0" bIns="0">
+            <a:spAutoFit/>
+          </a:bodyPr>
+          <a:lstStyle/>
+          <a:p>
+            <a:pPr algn="l">
+              <a:lnSpc>
+                <a:spcPct val="112000"/>
+              </a:lnSpc>
+              <a:spcAft>
+                <a:spcPts val="600"/>
+              </a:spcAft>
+              <a:buNone/>
+            </a:pPr>
+            <a:r>
+              <a:rPr sz="1100" b="1" i="0">
+                <a:solidFill>
+                  <a:srgbClr val="15B8A6"/>
+                </a:solidFill>
+                <a:latin typeface="Segoe UI"/>
+              </a:rPr>
+              <a:t>PART 2  ·  GRIDCARE-LITE</a:t>
+            </a:r>
+          </a:p>
+        </p:txBody>
+      </p:sp>
+      <p:sp>
+        <p:nvSpPr>
+          <p:cNvPr id="5" name="TextBox 4"/>
+          <p:cNvSpPr txBox="1"/>
+          <p:nvPr/>
+        </p:nvSpPr>
+        <p:spPr>
+          <a:xfrm>
+            <a:off x="822960" y="786384"/>
+            <a:ext cx="10515600" cy="822960"/>
+          </a:xfrm>
+          <a:prstGeom prst="rect">
+            <a:avLst/>
+          </a:prstGeom>
+          <a:noFill/>
+        </p:spPr>
+        <p:txBody>
+          <a:bodyPr wrap="square" anchor="t" lIns="0" rIns="0" tIns="0" bIns="0">
+            <a:spAutoFit/>
+          </a:bodyPr>
+          <a:lstStyle/>
+          <a:p>
+            <a:pPr algn="l">
+              <a:lnSpc>
+                <a:spcPct val="100000"/>
+              </a:lnSpc>
+              <a:spcAft>
+                <a:spcPts val="600"/>
+              </a:spcAft>
+              <a:buNone/>
+            </a:pPr>
+            <a:r>
+              <a:rPr sz="2700" b="1" i="0">
+                <a:solidFill>
+                  <a:srgbClr val="0E2942"/>
+                </a:solidFill>
+                <a:latin typeface="Segoe UI Semibold"/>
+              </a:rPr>
+              <a:t>GridCare-Lite</a:t>
+            </a:r>
+          </a:p>
+        </p:txBody>
+      </p:sp>
+      <p:sp>
+        <p:nvSpPr>
+          <p:cNvPr id="6" name="Rectangle 5"/>
           <p:cNvSpPr/>
           <p:nvPr/>
         </p:nvSpPr>
         <p:spPr>
           <a:xfrm>
-            <a:off x="0" y="960120"/>
-            <a:ext cx="12191695" cy="45720"/>
+            <a:off x="822960" y="1463040"/>
+            <a:ext cx="1234440" cy="54864"/>
           </a:xfrm>
           <a:prstGeom prst="rect">
             <a:avLst/>
           </a:prstGeom>
           <a:solidFill>
-            <a:srgbClr val="2563EB"/>
+            <a:srgbClr val="F59E0B"/>
           </a:solidFill>
           <a:ln>
             <a:noFill/>
@@ -8342,14 +12217,14 @@
       </p:sp>
       <p:sp>
         <p:nvSpPr>
-          <p:cNvPr id="5" name="TextBox 4"/>
+          <p:cNvPr id="7" name="TextBox 6"/>
           <p:cNvSpPr txBox="1"/>
           <p:nvPr/>
         </p:nvSpPr>
         <p:spPr>
           <a:xfrm>
-            <a:off x="640080" y="164592"/>
-            <a:ext cx="10972800" cy="685800"/>
+            <a:off x="822960" y="6382512"/>
+            <a:ext cx="7315200" cy="274320"/>
           </a:xfrm>
           <a:prstGeom prst="rect">
             <a:avLst/>
@@ -8357,34 +12232,42 @@
           <a:noFill/>
         </p:spPr>
         <p:txBody>
-          <a:bodyPr wrap="none">
+          <a:bodyPr wrap="square" anchor="t" lIns="0" rIns="0" tIns="0" bIns="0">
             <a:spAutoFit/>
           </a:bodyPr>
           <a:lstStyle/>
           <a:p>
-            <a:pPr>
-              <a:defRPr sz="2600" b="1">
-                <a:solidFill>
-                  <a:srgbClr val="1C2733"/>
-                </a:solidFill>
-              </a:defRPr>
-            </a:pPr>
-            <a:r>
-              <a:t>Part 2 — GridCare-Lite</a:t>
-            </a:r>
-          </a:p>
-        </p:txBody>
-      </p:sp>
-      <p:sp>
-        <p:nvSpPr>
-          <p:cNvPr id="6" name="TextBox 5"/>
+            <a:pPr algn="l">
+              <a:lnSpc>
+                <a:spcPct val="112000"/>
+              </a:lnSpc>
+              <a:spcAft>
+                <a:spcPts val="600"/>
+              </a:spcAft>
+              <a:buNone/>
+            </a:pPr>
+            <a:r>
+              <a:rPr sz="900" b="0" i="0">
+                <a:solidFill>
+                  <a:srgbClr val="5C6C7E"/>
+                </a:solidFill>
+                <a:latin typeface="Segoe UI"/>
+              </a:rPr>
+              <a:t>CS 112  ·  Cohort A — Team 3</a:t>
+            </a:r>
+          </a:p>
+        </p:txBody>
+      </p:sp>
+      <p:sp>
+        <p:nvSpPr>
+          <p:cNvPr id="8" name="TextBox 7"/>
           <p:cNvSpPr txBox="1"/>
           <p:nvPr/>
         </p:nvSpPr>
         <p:spPr>
           <a:xfrm>
-            <a:off x="640080" y="1280160"/>
-            <a:ext cx="10972800" cy="5120640"/>
+            <a:off x="10820095" y="6382512"/>
+            <a:ext cx="822960" cy="274320"/>
           </a:xfrm>
           <a:prstGeom prst="rect">
             <a:avLst/>
@@ -8392,93 +12275,236 @@
           <a:noFill/>
         </p:spPr>
         <p:txBody>
-          <a:bodyPr wrap="square" anchor="t">
+          <a:bodyPr wrap="square" anchor="t" lIns="0" rIns="0" tIns="0" bIns="0">
             <a:spAutoFit/>
           </a:bodyPr>
           <a:lstStyle/>
           <a:p>
-            <a:pPr>
+            <a:pPr algn="r">
+              <a:lnSpc>
+                <a:spcPct val="112000"/>
+              </a:lnSpc>
+              <a:spcAft>
+                <a:spcPts val="600"/>
+              </a:spcAft>
+              <a:buNone/>
+            </a:pPr>
+            <a:r>
+              <a:rPr sz="900" b="1" i="0">
+                <a:solidFill>
+                  <a:srgbClr val="5C6C7E"/>
+                </a:solidFill>
+                <a:latin typeface="Segoe UI"/>
+              </a:rPr>
+              <a:t>9</a:t>
+            </a:r>
+          </a:p>
+        </p:txBody>
+      </p:sp>
+      <p:sp>
+        <p:nvSpPr>
+          <p:cNvPr id="9" name="TextBox 8"/>
+          <p:cNvSpPr txBox="1"/>
+          <p:nvPr/>
+        </p:nvSpPr>
+        <p:spPr>
+          <a:xfrm>
+            <a:off x="822960" y="2331720"/>
+            <a:ext cx="10515600" cy="2267712"/>
+          </a:xfrm>
+          <a:prstGeom prst="rect">
+            <a:avLst/>
+          </a:prstGeom>
+          <a:noFill/>
+        </p:spPr>
+        <p:txBody>
+          <a:bodyPr wrap="square" anchor="t" lIns="0" rIns="0" tIns="0" bIns="0">
+            <a:spAutoFit/>
+          </a:bodyPr>
+          <a:lstStyle/>
+          <a:p>
+            <a:pPr algn="l">
+              <a:lnSpc>
+                <a:spcPct val="114000"/>
+              </a:lnSpc>
               <a:spcAft>
                 <a:spcPts val="700"/>
               </a:spcAft>
-              <a:defRPr sz="1500" i="0">
-                <a:solidFill>
-                  <a:srgbClr val="1C2733"/>
-                </a:solidFill>
-              </a:defRPr>
-            </a:pPr>
-            <a:r>
+              <a:buNone/>
+            </a:pPr>
+            <a:r>
+              <a:rPr sz="1450" b="0" i="0">
+                <a:solidFill>
+                  <a:srgbClr val="1B2A38"/>
+                </a:solidFill>
+                <a:latin typeface="Segoe UI"/>
+              </a:rPr>
               <a:t>Role-based Tkinter + SQLite outage &amp; maintenance management.</a:t>
             </a:r>
           </a:p>
           <a:p>
-            <a:pPr>
+            <a:pPr algn="l">
+              <a:lnSpc>
+                <a:spcPct val="114000"/>
+              </a:lnSpc>
               <a:spcAft>
                 <a:spcPts val="700"/>
               </a:spcAft>
-              <a:defRPr sz="1500" i="0">
-                <a:solidFill>
-                  <a:srgbClr val="1C2733"/>
-                </a:solidFill>
-              </a:defRPr>
-            </a:pPr>
-            <a:r>
+              <a:buNone/>
+            </a:pPr>
+            <a:r>
+              <a:rPr sz="1450" b="0" i="0">
+                <a:solidFill>
+                  <a:srgbClr val="1B2A38"/>
+                </a:solidFill>
+                <a:latin typeface="Segoe UI"/>
+              </a:rPr>
               <a:t>Roles: administrator · engineer · technician · customer-service</a:t>
             </a:r>
           </a:p>
           <a:p>
-            <a:pPr>
+            <a:pPr algn="l">
+              <a:lnSpc>
+                <a:spcPct val="114000"/>
+              </a:lnSpc>
               <a:spcAft>
                 <a:spcPts val="700"/>
               </a:spcAft>
-              <a:defRPr sz="1700"/>
-            </a:pPr>
-            <a:r>
-              <a:t>- RBAC in the service layer and DB constraints — not just hidden buttons</a:t>
-            </a:r>
-          </a:p>
-          <a:p>
-            <a:pPr>
+              <a:buNone/>
+            </a:pPr>
+            <a:r>
+              <a:rPr sz="1500" b="1" i="0">
+                <a:solidFill>
+                  <a:srgbClr val="15B8A6"/>
+                </a:solidFill>
+                <a:latin typeface="Segoe UI"/>
+              </a:rPr>
+              <a:t>▸  </a:t>
+            </a:r>
+            <a:r>
+              <a:rPr sz="1500" b="0" i="0">
+                <a:solidFill>
+                  <a:srgbClr val="1B2A38"/>
+                </a:solidFill>
+                <a:latin typeface="Segoe UI"/>
+              </a:rPr>
+              <a:t>RBAC in the service layer and DB constraints — not just hidden buttons</a:t>
+            </a:r>
+          </a:p>
+          <a:p>
+            <a:pPr algn="l">
+              <a:lnSpc>
+                <a:spcPct val="114000"/>
+              </a:lnSpc>
               <a:spcAft>
                 <a:spcPts val="700"/>
               </a:spcAft>
-              <a:defRPr sz="1700"/>
-            </a:pPr>
-            <a:r>
-              <a:t>- State machines: Open-&gt;In Progress-&gt;Resolved, Pending-&gt;Scheduled-&gt;Completed</a:t>
-            </a:r>
-          </a:p>
-          <a:p>
-            <a:pPr>
+              <a:buNone/>
+            </a:pPr>
+            <a:r>
+              <a:rPr sz="1500" b="1" i="0">
+                <a:solidFill>
+                  <a:srgbClr val="15B8A6"/>
+                </a:solidFill>
+                <a:latin typeface="Segoe UI"/>
+              </a:rPr>
+              <a:t>▸  </a:t>
+            </a:r>
+            <a:r>
+              <a:rPr sz="1500" b="0" i="0">
+                <a:solidFill>
+                  <a:srgbClr val="1B2A38"/>
+                </a:solidFill>
+                <a:latin typeface="Segoe UI"/>
+              </a:rPr>
+              <a:t>State machines: Open→In Progress→Resolved, Pending→Scheduled→Completed</a:t>
+            </a:r>
+          </a:p>
+          <a:p>
+            <a:pPr algn="l">
+              <a:lnSpc>
+                <a:spcPct val="114000"/>
+              </a:lnSpc>
               <a:spcAft>
                 <a:spcPts val="700"/>
               </a:spcAft>
-              <a:defRPr sz="1700"/>
-            </a:pPr>
-            <a:r>
-              <a:t>- Every transition writes a status_history audit row</a:t>
-            </a:r>
-          </a:p>
-          <a:p>
-            <a:pPr>
+              <a:buNone/>
+            </a:pPr>
+            <a:r>
+              <a:rPr sz="1500" b="1" i="0">
+                <a:solidFill>
+                  <a:srgbClr val="15B8A6"/>
+                </a:solidFill>
+                <a:latin typeface="Segoe UI"/>
+              </a:rPr>
+              <a:t>▸  </a:t>
+            </a:r>
+            <a:r>
+              <a:rPr sz="1500" b="0" i="0">
+                <a:solidFill>
+                  <a:srgbClr val="1B2A38"/>
+                </a:solidFill>
+                <a:latin typeface="Segoe UI"/>
+              </a:rPr>
+              <a:t>Every transition writes a status_history audit row</a:t>
+            </a:r>
+          </a:p>
+          <a:p>
+            <a:pPr algn="l">
+              <a:lnSpc>
+                <a:spcPct val="114000"/>
+              </a:lnSpc>
               <a:spcAft>
                 <a:spcPts val="700"/>
               </a:spcAft>
-              <a:defRPr sz="1700"/>
-            </a:pPr>
-            <a:r>
-              <a:t>- Substations imported from grid-analysis -&gt; outages only against real assets</a:t>
-            </a:r>
-          </a:p>
-          <a:p>
-            <a:pPr>
+              <a:buNone/>
+            </a:pPr>
+            <a:r>
+              <a:rPr sz="1500" b="1" i="0">
+                <a:solidFill>
+                  <a:srgbClr val="15B8A6"/>
+                </a:solidFill>
+                <a:latin typeface="Segoe UI"/>
+              </a:rPr>
+              <a:t>▸  </a:t>
+            </a:r>
+            <a:r>
+              <a:rPr sz="1500" b="0" i="0">
+                <a:solidFill>
+                  <a:srgbClr val="1B2A38"/>
+                </a:solidFill>
+                <a:latin typeface="Segoe UI"/>
+              </a:rPr>
+              <a:t>Substations imported from grid-analysis → outages only against real assets</a:t>
+            </a:r>
+          </a:p>
+          <a:p>
+            <a:pPr algn="l">
+              <a:lnSpc>
+                <a:spcPct val="114000"/>
+              </a:lnSpc>
               <a:spcAft>
                 <a:spcPts val="700"/>
               </a:spcAft>
-              <a:defRPr sz="1700"/>
-            </a:pPr>
-            <a:r>
-              <a:t>- "Critical substation" flag from betweenness centrality (labelled a structural proxy)</a:t>
+              <a:buNone/>
+            </a:pPr>
+            <a:r>
+              <a:rPr sz="1500" b="1" i="0">
+                <a:solidFill>
+                  <a:srgbClr val="15B8A6"/>
+                </a:solidFill>
+                <a:latin typeface="Segoe UI"/>
+              </a:rPr>
+              <a:t>▸  </a:t>
+            </a:r>
+            <a:r>
+              <a:rPr sz="1500" b="0" i="0">
+                <a:solidFill>
+                  <a:srgbClr val="1B2A38"/>
+                </a:solidFill>
+                <a:latin typeface="Segoe UI"/>
+              </a:rPr>
+              <a:t>"Critical substation" flag from betweenness centrality (labelled a structural proxy)</a:t>
             </a:r>
           </a:p>
         </p:txBody>
